--- a/slide/pptx/P12-FreeRTOS.pptx
+++ b/slide/pptx/P12-FreeRTOS.pptx
@@ -30,9 +30,10 @@
     <p:sldId id="278" r:id="rId24"/>
     <p:sldId id="279" r:id="rId25"/>
     <p:sldId id="280" r:id="rId26"/>
+    <p:sldId id="281" r:id="rId27"/>
   </p:sldIdLst>
   <p:notesMasterIdLst>
-    <p:notesMasterId r:id="rId27"/>
+    <p:notesMasterId r:id="rId28"/>
   </p:notesMasterIdLst>
   <p:sldSz cx="12192000" cy="6858000"/>
   <p:notesSz cx="6858000" cy="12192000"/>
@@ -131,20 +132,20 @@
   <p:extLst>
     <p:ext uri="{521415D9-36F7-43E2-AB2F-B90AF26B5E84}">
       <p14:sectionLst xmlns:p14="http://schemas.microsoft.com/office/powerpoint/2010/main">
-        <p14:section name="Pembuka" id="{53d87f78-b326-02b8-5697-25bea52c14de}">
+        <p14:section name="Pembuka" id="{e6b5b8ec-c8c6-b939-c811-f98df2c8ed95}">
           <p14:sldIdLst>
             <p14:sldId id="256"/>
             <p14:sldId id="257"/>
           </p14:sldIdLst>
         </p14:section>
-        <p14:section name="Konsep" id="{db610e8b-13e9-9408-d272-e4d635f6a16e}">
+        <p14:section name="Konsep" id="{22421da2-642b-8883-ed60-2a6a7784c7db}">
           <p14:sldIdLst>
             <p14:sldId id="258"/>
             <p14:sldId id="259"/>
             <p14:sldId id="260"/>
           </p14:sldIdLst>
         </p14:section>
-        <p14:section name="Task" id="{cc9ae7f4-f2f2-1c67-06c2-43b2f04f3433}">
+        <p14:section name="Task" id="{cbe7bf51-5039-bdfc-43b2-ef7c2fefceb0}">
           <p14:sldIdLst>
             <p14:sldId id="261"/>
             <p14:sldId id="262"/>
@@ -154,11 +155,11 @@
             <p14:sldId id="266"/>
             <p14:sldId id="267"/>
             <p14:sldId id="268"/>
+            <p14:sldId id="269"/>
           </p14:sldIdLst>
         </p14:section>
-        <p14:section name="Komunikasi" id="{ef1745b9-4d82-2e7c-f3cb-d53e50677f24}">
+        <p14:section name="Komunikasi" id="{f5975f68-cfab-0e5b-b5fe-d767d325a2d3}">
           <p14:sldIdLst>
-            <p14:sldId id="269"/>
             <p14:sldId id="270"/>
             <p14:sldId id="271"/>
             <p14:sldId id="272"/>
@@ -168,12 +169,13 @@
             <p14:sldId id="276"/>
             <p14:sldId id="277"/>
             <p14:sldId id="278"/>
+            <p14:sldId id="279"/>
           </p14:sldIdLst>
         </p14:section>
-        <p14:section name="Penutup" id="{ebaa2d08-90c3-687c-5ea8-4d412409f8a3}">
+        <p14:section name="Penutup" id="{9c32480a-1fa4-81b6-4886-0415324f15e9}">
           <p14:sldIdLst>
-            <p14:sldId id="279"/>
             <p14:sldId id="280"/>
+            <p14:sldId id="281"/>
           </p14:sldIdLst>
         </p14:section>
       </p14:sectionLst>
@@ -668,7 +670,7 @@
           <a:p>
             <a:r>
               <a:rPr lang="en-US" dirty="0"/>
-              <a:t>Inti 0 (PRO_CPU) bawaan untuk Wi-Fi, TCP/IP (prioritas 18), esp_timer (22). Inti 1 (APP_CPU) untuk loopTask dan arduino_events (19). Setiap inti punya task IDLE sendiri. Time slicing di ESP-IDF bersifat best effort; letakkan task berprioritas sama di inti yang sama bila urutan bergiliran penting.</a:t>
+              <a:t>Aturan penjadwal: jalankan task Ready berprioritas tertinggi. Prioritas 0–24 di Arduino-ESP32 (configMAX_PRIORITIES = 25). Tick 1.000 Hz = 1 ms. Prioritas sama bergantian (time slicing); prioritas lebih tinggi langsung merebut (preemption). IDLE prioritas 0. Ingatkan starvation: prioritas tinggi yang tidak pernah Blocked membuat yang lain kelaparan.</a:t>
             </a:r>
             <a:endParaRPr lang="en-US" dirty="0"/>
           </a:p>
@@ -756,7 +758,7 @@
           <a:p>
             <a:r>
               <a:rPr lang="en-US" dirty="0"/>
-              <a:t>Bahas tujuh parameter satu per satu. Nilai kembali pdPASS bila berhasil. xTaskCreate() tanpa parameter inti membuat task yang tidak terikat inti (tskNO_AFFINITY).</a:t>
+              <a:t>Inti 0 (PRO_CPU) bawaan untuk Wi-Fi, TCP/IP (prioritas 18), esp_timer (22). Inti 1 (APP_CPU) untuk loopTask dan arduino_events (19). Setiap inti punya task IDLE sendiri. Time slicing di ESP-IDF bersifat best effort; letakkan task berprioritas sama di inti yang sama bila urutan bergiliran penting.</a:t>
             </a:r>
             <a:endParaRPr lang="en-US" dirty="0"/>
           </a:p>
@@ -844,7 +846,7 @@
           <a:p>
             <a:r>
               <a:rPr lang="en-US" dirty="0"/>
-              <a:t>Sumber: ESP-IDF Programming Guide v5.5, FreeRTOS (IDF): "task stack sizes are specified in bytes". Kesalahan ini sering terjadi saat menyalin contoh dari internet.</a:t>
+              <a:t>Bahas tujuh parameter satu per satu. Nilai kembali pdPASS bila berhasil. xTaskCreate() tanpa parameter inti membuat task yang tidak terikat inti (tskNO_AFFINITY).</a:t>
             </a:r>
             <a:endParaRPr lang="en-US" dirty="0"/>
           </a:p>
@@ -932,7 +934,7 @@
           <a:p>
             <a:r>
               <a:rPr lang="en-US" dirty="0"/>
-              <a:t>vTaskDelayUntil() adalah nama lama yang masih bisa dipakai. Angka ±900 B diukur di Praktikum 1 (3.536 B → 2.628 B). delayMicroseconds() adalah busy-wait sungguhan.</a:t>
+              <a:t>Sumber: ESP-IDF Programming Guide v5.5, FreeRTOS (IDF): "task stack sizes are specified in bytes". Kesalahan ini sering terjadi saat menyalin contoh dari internet.</a:t>
             </a:r>
             <a:endParaRPr lang="en-US" dirty="0"/>
           </a:p>
@@ -1020,7 +1022,7 @@
           <a:p>
             <a:r>
               <a:rPr lang="en-US" dirty="0"/>
-              <a:t/>
+              <a:t>vTaskDelayUntil() adalah nama lama yang masih bisa dipakai. Angka ±900 B diukur di Praktikum 1 (3.536 B → 2.628 B). delayMicroseconds() adalah busy-wait sungguhan.</a:t>
             </a:r>
             <a:endParaRPr lang="en-US" dirty="0"/>
           </a:p>
@@ -1108,7 +1110,7 @@
           <a:p>
             <a:r>
               <a:rPr lang="en-US" dirty="0"/>
-              <a:t>Antrean = rel tiket pesanan di dapur (FIFO). xQueueSend menyalin data (bukan alamat). Timeout: 0 (tidak menunggu), pdMS_TO_TICKS(n), portMAX_DELAY (selamanya). Antrean penuh + timeout 0 → errQUEUE_FULL. Variabel global hanya aman untuk satu nilai 32-bit dengan satu penulis.</a:t>
+              <a:t/>
             </a:r>
             <a:endParaRPr lang="en-US" dirty="0"/>
           </a:p>
@@ -1196,7 +1198,7 @@
           <a:p>
             <a:r>
               <a:rPr lang="en-US" dirty="0"/>
-              <a:t>penghitung++ = baca, tambah, tulis. Dua task bersilang → satu tambahan hilang. Galatnya acak, sulit dilacak. Sumber daya bersama lain: Serial, OLED, bus I2C.</a:t>
+              <a:t>Antrean = rel tiket pesanan di dapur (FIFO). xQueueSend menyalin data (bukan alamat). Timeout: 0 (tidak menunggu), pdMS_TO_TICKS(n), portMAX_DELAY (selamanya). Antrean penuh + timeout 0 → errQUEUE_FULL. Variabel global hanya aman untuk satu nilai 32-bit dengan satu penulis.</a:t>
             </a:r>
             <a:endParaRPr lang="en-US" dirty="0"/>
           </a:p>
@@ -1284,7 +1286,7 @@
           <a:p>
             <a:r>
               <a:rPr lang="en-US" dirty="0"/>
-              <a:t>Buat mutex sebelum task dibuat; bagian kritis sesingkat mungkin; setiap Take yang berhasil wajib diikuti Give. Deadlock: dua task saling menunggu kunci; hindari dengan urutan pengambilan kunci yang sama atau timeout.</a:t>
+              <a:t>penghitung++ = baca, tambah, tulis. Dua task bersilang → satu tambahan hilang. Galatnya acak, sulit dilacak. Sumber daya bersama lain: Serial, OLED, bus I2C.</a:t>
             </a:r>
             <a:endParaRPr lang="en-US" dirty="0"/>
           </a:p>
@@ -1372,7 +1374,7 @@
           <a:p>
             <a:r>
               <a:rPr lang="en-US" dirty="0"/>
-              <a:t>Pewarisan prioritas: bila task penting menunggu kunci yang dipegang task berprioritas rendah, prioritas pemegang kunci dinaikkan sementara agar cepat selesai.</a:t>
+              <a:t>Buat mutex sebelum task dibuat; bagian kritis sesingkat mungkin; setiap Take yang berhasil wajib diikuti Give. Deadlock: dua task saling menunggu kunci; hindari dengan urutan pengambilan kunci yang sama atau timeout.</a:t>
             </a:r>
             <a:endParaRPr lang="en-US" dirty="0"/>
           </a:p>
@@ -1460,7 +1462,7 @@
           <a:p>
             <a:r>
               <a:rPr lang="en-US" dirty="0"/>
-              <a:t>TWDT Arduino-ESP32 3.3: aktif sejak boot, batas 5 detik, mengawasi IDLE0 saja, lalu restart (panic). loopTask tidak diawasi kecuali enableLoopWDT(). Di ISR: xQueueSendFromISR, xSemaphoreGiveFromISR, lalu portYIELD_FROM_ISR() bila ada task penting yang bangun.</a:t>
+              <a:t>Pewarisan prioritas: bila task penting menunggu kunci yang dipegang task berprioritas rendah, prioritas pemegang kunci dinaikkan sementara agar cepat selesai.</a:t>
             </a:r>
             <a:endParaRPr lang="en-US" dirty="0"/>
           </a:p>
@@ -1636,7 +1638,7 @@
           <a:p>
             <a:r>
               <a:rPr lang="en-US" dirty="0"/>
-              <a:t>Keluaran QEMU: Lapor 3.536 B → 2.628 B setelah printf pertama; Kedip 1.500 B dari 2.048 B; loopTask sisa 6.544 B dari 8.192 B. Pada eksperimen busy-wait, pesan task_wdt menyebut IDLE0 (CPU 0) dan CPU 0: Kedip.</a:t>
+              <a:t>TWDT Arduino-ESP32 3.3: aktif sejak boot, batas 5 detik, mengawasi IDLE0 saja, lalu restart (panic). loopTask tidak diawasi kecuali enableLoopWDT(). Di ISR: xQueueSendFromISR, xSemaphoreGiveFromISR, lalu portYIELD_FROM_ISR() bila ada task penting yang bangun.</a:t>
             </a:r>
             <a:endParaRPr lang="en-US" dirty="0"/>
           </a:p>
@@ -1724,7 +1726,7 @@
           <a:p>
             <a:r>
               <a:rPr lang="en-US" dirty="0"/>
-              <a:t>Nilai t bertambah tepat 500 ms berkat xTaskDelayUntil. Dengan JEDA_TAMPIL_MS = 2000, isi antrean mencapai 4–5 dan muncul PERINGATAN antrean penuh; data yang tampil makin basi.</a:t>
+              <a:t>Keluaran QEMU: Lapor 3.536 B → 2.628 B setelah printf pertama; Kedip 1.500 B dari 2.048 B; loopTask sisa 6.544 B dari 8.192 B. Pada eksperimen busy-wait, pesan task_wdt menyebut IDLE0 (CPU 0) dan CPU 0: Kedip.</a:t>
             </a:r>
             <a:endParaRPr lang="en-US" dirty="0"/>
           </a:p>
@@ -1812,7 +1814,7 @@
           <a:p>
             <a:r>
               <a:rPr lang="en-US" dirty="0"/>
-              <a:t>Driver UART Arduino-ESP32 mengunci per satu panggilan tulis, jadi satu printf pendek jarang terpotong; baris dari banyak panggilan (atau OLED/I2C) tetap perlu mutex. Eksperimen: jadikan xSemaphoreGive komentar → hanya satu baris tercetak, lalu macet.</a:t>
+              <a:t>Nilai t bertambah tepat 500 ms berkat xTaskDelayUntil. Dengan JEDA_TAMPIL_MS = 2000, isi antrean mencapai 4–5 dan muncul PERINGATAN antrean penuh; data yang tampil makin basi.</a:t>
             </a:r>
             <a:endParaRPr lang="en-US" dirty="0"/>
           </a:p>
@@ -1900,7 +1902,7 @@
           <a:p>
             <a:r>
               <a:rPr lang="en-US" dirty="0"/>
-              <a:t>Jawaban: B. Penjadwal selalu menjalankan task Ready berprioritas tertinggi. C hanya berlaku bila prioritasnya sama.</a:t>
+              <a:t>Driver UART Arduino-ESP32 mengunci per satu panggilan tulis, jadi satu printf pendek jarang terpotong; baris dari banyak panggilan (atau OLED/I2C) tetap perlu mutex. Eksperimen: jadikan xSemaphoreGive komentar → hanya satu baris tercetak, lalu macet.</a:t>
             </a:r>
             <a:endParaRPr lang="en-US" dirty="0"/>
           </a:p>
@@ -1988,7 +1990,7 @@
           <a:p>
             <a:r>
               <a:rPr lang="en-US" dirty="0"/>
-              <a:t>Tanyakan balik: kapan cukup memakai super-loop + millis()? (Proyek kecil tanpa penantian panjang.)</a:t>
+              <a:t>Jawaban: B. Penjadwal selalu menjalankan task Ready berprioritas tertinggi. C hanya berlaku bila prioritasnya sama.</a:t>
             </a:r>
             <a:endParaRPr lang="en-US" dirty="0"/>
           </a:p>
@@ -2076,7 +2078,7 @@
           <a:p>
             <a:r>
               <a:rPr lang="en-US" dirty="0"/>
-              <a:t>Di Pertemuan 13, pola antrean dipakai lagi: task sensor mengirim data ke task Wi-Fi/MQTT.</a:t>
+              <a:t>Tanyakan balik: kapan cukup memakai super-loop + millis()? (Proyek kecil tanpa penantian panjang.)</a:t>
             </a:r>
             <a:endParaRPr lang="en-US" dirty="0"/>
           </a:p>
@@ -2100,6 +2102,94 @@
             <a:fld id="{F7021451-1387-4CA6-816F-3879F97B5CBC}" type="slidenum">
               <a:rPr lang="en-US"/>
               <a:t>25</a:t>
+            </a:fld>
+            <a:endParaRPr lang="en-US"/>
+          </a:p>
+        </p:txBody>
+      </p:sp>
+    </p:spTree>
+    <p:extLst>
+      <p:ext uri="{BB962C8B-B14F-4D97-AF65-F5344CB8AC3E}">
+        <p14:creationId xmlns:p14="http://schemas.microsoft.com/office/powerpoint/2010/main" val="1024086991"/>
+      </p:ext>
+    </p:extLst>
+  </p:cSld>
+  <p:clrMapOvr>
+    <a:masterClrMapping/>
+  </p:clrMapOvr>
+</p:notes>
+</file>
+
+<file path=ppt/notesSlides/notesSlide26.xml><?xml version="1.0" encoding="utf-8"?>
+<p:notes xmlns:a="http://schemas.openxmlformats.org/drawingml/2006/main" xmlns:r="http://schemas.openxmlformats.org/officeDocument/2006/relationships" xmlns:p="http://schemas.openxmlformats.org/presentationml/2006/main">
+  <p:cSld>
+    <p:spTree>
+      <p:nvGrpSpPr>
+        <p:cNvPr id="1" name=""/>
+        <p:cNvGrpSpPr/>
+        <p:nvPr/>
+      </p:nvGrpSpPr>
+      <p:grpSpPr>
+        <a:xfrm>
+          <a:off x="0" y="0"/>
+          <a:ext cx="0" cy="0"/>
+          <a:chOff x="0" y="0"/>
+          <a:chExt cx="0" cy="0"/>
+        </a:xfrm>
+      </p:grpSpPr>
+      <p:sp>
+        <p:nvSpPr>
+          <p:cNvPr id="2" name="Slide Image Placeholder 1"/>
+          <p:cNvSpPr>
+            <a:spLocks noGrp="1" noRot="1" noChangeAspect="1"/>
+          </p:cNvSpPr>
+          <p:nvPr>
+            <p:ph type="sldImg"/>
+          </p:nvPr>
+        </p:nvSpPr>
+        <p:spPr/>
+      </p:sp>
+      <p:sp>
+        <p:nvSpPr>
+          <p:cNvPr id="3" name="Notes Placeholder 2"/>
+          <p:cNvSpPr>
+            <a:spLocks noGrp="1"/>
+          </p:cNvSpPr>
+          <p:nvPr>
+            <p:ph type="body" idx="1"/>
+          </p:nvPr>
+        </p:nvSpPr>
+        <p:spPr/>
+        <p:txBody>
+          <a:bodyPr/>
+          <a:lstStyle/>
+          <a:p>
+            <a:r>
+              <a:rPr lang="en-US" dirty="0"/>
+              <a:t>Di Pertemuan 13, pola antrean dipakai lagi: task sensor mengirim data ke task Wi-Fi/MQTT.</a:t>
+            </a:r>
+            <a:endParaRPr lang="en-US" dirty="0"/>
+          </a:p>
+        </p:txBody>
+      </p:sp>
+      <p:sp>
+        <p:nvSpPr>
+          <p:cNvPr id="4" name="Slide Number Placeholder 3"/>
+          <p:cNvSpPr>
+            <a:spLocks noGrp="1"/>
+          </p:cNvSpPr>
+          <p:nvPr>
+            <p:ph type="sldNum" sz="quarter" idx="10"/>
+          </p:nvPr>
+        </p:nvSpPr>
+        <p:spPr/>
+        <p:txBody>
+          <a:bodyPr/>
+          <a:lstStyle/>
+          <a:p>
+            <a:fld id="{F7021451-1387-4CA6-816F-3879F97B5CBC}" type="slidenum">
+              <a:rPr lang="en-US"/>
+              <a:t>26</a:t>
             </a:fld>
             <a:endParaRPr lang="en-US"/>
           </a:p>
@@ -2604,7 +2694,7 @@
           <a:p>
             <a:r>
               <a:rPr lang="en-US" dirty="0"/>
-              <a:t>Running = kompor yang sedang ditangani koki; Ready = menunggu giliran koki; Blocked = air sedang dipanaskan, koki tidak perlu menunggui; Suspended = kompor dimatikan. Pertanyaan pancingan: keadaan mana yang membuat RTOS efisien? (Blocked).</a:t>
+              <a:t>Inti pesan: loop() bukan penguasa tunggal CPU, melainkan satu task di antara task lain. Di kode sumber core (cores/esp32/main.cpp): xTaskCreateUniversal(loopTask, "loopTask", getArduinoLoopTaskStackSize() = 8192 byte, NULL, prioritas 1, &amp;handle, ARDUINO_RUNNING_CORE = 1). Fungsi loopTask() memanggil setup() sekali lalu loop() dalam for(;;). Analogi: loop() adalah seorang koki dengan meja kerja 8 KB, pangkat rendah (prioritas 1), bertugas di kompor nomor 1. Pertanyaan pancingan: apa yang terjadi bila kita membuat task prioritas 2 di inti 1 yang tidak pernah Blocked? (loop() tidak pernah kebagian CPU = starvation). Bukti di Praktikum 1: Serial mencetak "setup() berjalan di task loopTask, inti 1, prioritas 1".</a:t>
             </a:r>
             <a:endParaRPr lang="en-US" dirty="0"/>
           </a:p>
@@ -2692,7 +2782,7 @@
           <a:p>
             <a:r>
               <a:rPr lang="en-US" dirty="0"/>
-              <a:t>Aturan penjadwal: jalankan task Ready berprioritas tertinggi. Prioritas 0–24 di Arduino-ESP32 (configMAX_PRIORITIES = 25). Tick 1.000 Hz = 1 ms. Prioritas sama bergantian (time slicing); prioritas lebih tinggi langsung merebut (preemption). IDLE prioritas 0. Ingatkan starvation: prioritas tinggi yang tidak pernah Blocked membuat yang lain kelaparan.</a:t>
+              <a:t>Running = kompor yang sedang ditangani koki; Ready = menunggu giliran koki; Blocked = air sedang dipanaskan, koki tidak perlu menunggui; Suspended = kompor dimatikan. Pertanyaan pancingan: keadaan mana yang membuat RTOS efisien? (Blocked).</a:t>
             </a:r>
             <a:endParaRPr lang="en-US" dirty="0"/>
           </a:p>
@@ -4000,7 +4090,7 @@
                   <a:schemeClr val="tx2"/>
                 </a:solidFill>
               </a:rPr>
-              <a:t>ESP32 Punya Dua Inti</a:t>
+              <a:t>Prioritas, Preemption, dan Time Slicing</a:t>
             </a:r>
             <a:endParaRPr lang="en-US" sz="3000" dirty="0"/>
           </a:p>
@@ -4008,7 +4098,7 @@
       </p:sp>
       <p:pic>
         <p:nvPicPr>
-          <p:cNvPr id="3" name="gambar" descr="/home/claude/work/slides/img/p12/p12-dua-core.png">    </p:cNvPr>
+          <p:cNvPr id="3" name="gambar" descr="/home/claude/work/slides/img/p12/p12-penjadwal-prioritas.png">    </p:cNvPr>
           <p:cNvPicPr>
             <a:picLocks noChangeAspect="1"/>
           </p:cNvPicPr>
@@ -4022,8 +4112,8 @@
         </p:blipFill>
         <p:spPr>
           <a:xfrm>
-            <a:off x="1545113" y="1280160"/>
-            <a:ext cx="9101470" cy="4892040"/>
+            <a:off x="1849002" y="1280160"/>
+            <a:ext cx="8493692" cy="4892040"/>
           </a:xfrm>
           <a:prstGeom prst="rect">
             <a:avLst/>
@@ -4132,7 +4222,7 @@
                   <a:schemeClr val="tx2"/>
                 </a:solidFill>
               </a:rPr>
-              <a:t>Anatomi xTaskCreatePinnedToCore()</a:t>
+              <a:t>ESP32 Punya Dua Inti</a:t>
             </a:r>
             <a:endParaRPr lang="en-US" sz="3000" dirty="0"/>
           </a:p>
@@ -4140,7 +4230,7 @@
       </p:sp>
       <p:pic>
         <p:nvPicPr>
-          <p:cNvPr id="3" name="gambar" descr="/home/claude/work/slides/img/p12/p12-anatomi-task.png">    </p:cNvPr>
+          <p:cNvPr id="3" name="gambar" descr="/home/claude/work/slides/img/p12/p12-dua-core.png">    </p:cNvPr>
           <p:cNvPicPr>
             <a:picLocks noChangeAspect="1"/>
           </p:cNvPicPr>
@@ -4154,8 +4244,8 @@
         </p:blipFill>
         <p:spPr>
           <a:xfrm>
-            <a:off x="2409093" y="1280160"/>
-            <a:ext cx="7373510" cy="4892040"/>
+            <a:off x="1545113" y="1280160"/>
+            <a:ext cx="9101470" cy="4892040"/>
           </a:xfrm>
           <a:prstGeom prst="rect">
             <a:avLst/>
@@ -4264,67 +4354,15 @@
                   <a:schemeClr val="tx2"/>
                 </a:solidFill>
               </a:rPr>
-              <a:t>Ukuran Stack: Byte, Bukan Word</a:t>
+              <a:t>Anatomi xTaskCreatePinnedToCore()</a:t>
             </a:r>
             <a:endParaRPr lang="en-US" sz="3000" dirty="0"/>
           </a:p>
         </p:txBody>
-      </p:sp>
-      <p:sp>
-        <p:nvSpPr>
-          <p:cNvPr id="3" name="kartu"/>
-          <p:cNvSpPr/>
-          <p:nvPr/>
-        </p:nvSpPr>
-        <p:spPr>
-          <a:xfrm>
-            <a:off x="548640" y="1600200"/>
-            <a:ext cx="11094415" cy="1828800"/>
-          </a:xfrm>
-          <a:prstGeom prst="roundRect">
-            <a:avLst>
-              <a:gd name="adj" fmla="val 6000"/>
-            </a:avLst>
-          </a:prstGeom>
-          <a:solidFill>
-            <a:srgbClr val="FBEDEB"/>
-          </a:solidFill>
-          <a:ln w="9525">
-            <a:solidFill>
-              <a:schemeClr val="bg2"/>
-            </a:solidFill>
-            <a:prstDash val="solid"/>
-          </a:ln>
-        </p:spPr>
-      </p:sp>
-      <p:sp>
-        <p:nvSpPr>
-          <p:cNvPr id="4" name="pad"/>
-          <p:cNvSpPr/>
-          <p:nvPr/>
-        </p:nvSpPr>
-        <p:spPr>
-          <a:xfrm>
-            <a:off x="914400" y="2057400"/>
-            <a:ext cx="914400" cy="914400"/>
-          </a:xfrm>
-          <a:prstGeom prst="ellipse">
-            <a:avLst/>
-          </a:prstGeom>
-          <a:solidFill>
-            <a:schemeClr val="bg1"/>
-          </a:solidFill>
-          <a:ln w="28575">
-            <a:solidFill>
-              <a:schemeClr val="accent2"/>
-            </a:solidFill>
-            <a:prstDash val="solid"/>
-          </a:ln>
-        </p:spPr>
       </p:sp>
       <p:pic>
         <p:nvPicPr>
-          <p:cNvPr id="5" name="ikon-memory" descr="preencoded.png">    </p:cNvPr>
+          <p:cNvPr id="3" name="gambar" descr="/home/claude/work/slides/img/p12/p12-anatomi-task.png">    </p:cNvPr>
           <p:cNvPicPr>
             <a:picLocks noChangeAspect="1"/>
           </p:cNvPicPr>
@@ -4338,177 +4376,14 @@
         </p:blipFill>
         <p:spPr>
           <a:xfrm>
-            <a:off x="1143000" y="2286000"/>
-            <a:ext cx="457200" cy="457200"/>
+            <a:off x="2409093" y="1280160"/>
+            <a:ext cx="7373510" cy="4892040"/>
           </a:xfrm>
           <a:prstGeom prst="rect">
             <a:avLst/>
           </a:prstGeom>
         </p:spPr>
       </p:pic>
-      <p:sp>
-        <p:nvSpPr>
-          <p:cNvPr id="6" name="Text 3"/>
-          <p:cNvSpPr txBox="1"/>
-          <p:nvPr/>
-        </p:nvSpPr>
-        <p:spPr>
-          <a:xfrm>
-            <a:off x="2103120" y="1600200"/>
-            <a:ext cx="9265615" cy="1828800"/>
-          </a:xfrm>
-          <a:prstGeom prst="rect">
-            <a:avLst/>
-          </a:prstGeom>
-          <a:noFill/>
-          <a:ln/>
-        </p:spPr>
-        <p:txBody>
-          <a:bodyPr wrap="square" lIns="0" tIns="0" rIns="0" bIns="0" rtlCol="0" anchor="ctr"/>
-          <a:lstStyle/>
-          <a:p>
-            <a:pPr indent="0" marL="0">
-              <a:buNone/>
-            </a:pPr>
-            <a:r>
-              <a:rPr lang="en-US" sz="2400" dirty="0">
-                <a:solidFill>
-                  <a:schemeClr val="tx1"/>
-                </a:solidFill>
-              </a:rPr>
-              <a:t>Di ESP-IDF dan Arduino-ESP32, ukuran stack ditulis dalam </a:t>
-            </a:r>
-            <a:r>
-              <a:rPr lang="en-US" sz="2400" b="1" dirty="0">
-                <a:solidFill>
-                  <a:schemeClr val="tx1"/>
-                </a:solidFill>
-              </a:rPr>
-              <a:t>byte</a:t>
-            </a:r>
-            <a:r>
-              <a:rPr lang="en-US" sz="2400" dirty="0">
-                <a:solidFill>
-                  <a:schemeClr val="tx1"/>
-                </a:solidFill>
-              </a:rPr>
-              <a:t>. FreeRTOS asli memakai </a:t>
-            </a:r>
-            <a:r>
-              <a:rPr lang="en-US" sz="2400" b="1" dirty="0">
-                <a:solidFill>
-                  <a:schemeClr val="tx1"/>
-                </a:solidFill>
-              </a:rPr>
-              <a:t>word</a:t>
-            </a:r>
-            <a:r>
-              <a:rPr lang="en-US" sz="2400" dirty="0">
-                <a:solidFill>
-                  <a:schemeClr val="tx1"/>
-                </a:solidFill>
-              </a:rPr>
-              <a:t> (4 byte).</a:t>
-            </a:r>
-            <a:endParaRPr lang="en-US" sz="2400" dirty="0"/>
-          </a:p>
-        </p:txBody>
-      </p:sp>
-      <p:sp>
-        <p:nvSpPr>
-          <p:cNvPr id="7" name="daftar-poin"/>
-          <p:cNvSpPr txBox="1"/>
-          <p:nvPr/>
-        </p:nvSpPr>
-        <p:spPr>
-          <a:xfrm>
-            <a:off x="548640" y="3749040"/>
-            <a:ext cx="11094415" cy="2423160"/>
-          </a:xfrm>
-          <a:prstGeom prst="rect">
-            <a:avLst/>
-          </a:prstGeom>
-          <a:noFill/>
-          <a:ln/>
-        </p:spPr>
-        <p:txBody>
-          <a:bodyPr wrap="square" lIns="25400" tIns="25400" rIns="50800" bIns="25400" rtlCol="0" anchor="t"/>
-          <a:lstStyle/>
-          <a:p>
-            <a:pPr marL="279400" indent="-279400">
-              <a:spcAft>
-                <a:spcPts val="1000"/>
-              </a:spcAft>
-              <a:buSzPct val="100000"/>
-              <a:buChar char="•"/>
-            </a:pPr>
-            <a:r>
-              <a:rPr lang="en-US" sz="1900" dirty="0">
-                <a:solidFill>
-                  <a:schemeClr val="tx1"/>
-                </a:solidFill>
-              </a:rPr>
-              <a:t>Contoh internet </a:t>
-            </a:r>
-            <a:r>
-              <a:rPr lang="en-US" sz="1900" dirty="0">
-                <a:solidFill>
-                  <a:srgbClr val="A35F14"/>
-                </a:solidFill>
-                <a:latin typeface="Consolas" pitchFamily="34" charset="0"/>
-                <a:ea typeface="Consolas" pitchFamily="34" charset="-122"/>
-                <a:cs typeface="Consolas" pitchFamily="34" charset="-120"/>
-              </a:rPr>
-              <a:t>1000</a:t>
-            </a:r>
-            <a:r>
-              <a:rPr lang="en-US" sz="1900" dirty="0">
-                <a:solidFill>
-                  <a:schemeClr val="tx1"/>
-                </a:solidFill>
-              </a:rPr>
-              <a:t> = 4.000 byte di FreeRTOS asli, tetapi 1.000 byte di ESP32</a:t>
-            </a:r>
-            <a:endParaRPr lang="en-US" sz="1900" dirty="0"/>
-          </a:p>
-          <a:p>
-            <a:pPr marL="279400" indent="-279400">
-              <a:spcAft>
-                <a:spcPts val="1000"/>
-              </a:spcAft>
-              <a:buSzPct val="100000"/>
-              <a:buChar char="•"/>
-            </a:pPr>
-            <a:r>
-              <a:rPr lang="en-US" sz="1900" dirty="0">
-                <a:solidFill>
-                  <a:schemeClr val="tx1"/>
-                </a:solidFill>
-              </a:rPr>
-              <a:t>Mulai dari 2.048–4.096 byte, lalu ukur sisanya</a:t>
-            </a:r>
-            <a:endParaRPr lang="en-US" sz="1900" dirty="0"/>
-          </a:p>
-          <a:p>
-            <a:pPr marL="279400" indent="-279400">
-              <a:spcAft>
-                <a:spcPts val="1000"/>
-              </a:spcAft>
-              <a:buSzPct val="100000"/>
-              <a:buChar char="•"/>
-            </a:pPr>
-            <a:r>
-              <a:rPr lang="en-US" sz="1900" dirty="0">
-                <a:solidFill>
-                  <a:schemeClr val="tx1"/>
-                </a:solidFill>
-              </a:rPr>
-              <a:t>Nama task maks. 15 karakter; prioritas 0–24</a:t>
-            </a:r>
-            <a:endParaRPr lang="en-US" sz="1900" dirty="0"/>
-          </a:p>
-        </p:txBody>
-      </p:sp>
       <p:sp>
         <p:nvSpPr>
           <p:cNvPr id="25" name="Slide Number Placeholder 0"/>
@@ -4611,7 +4486,7 @@
                   <a:schemeClr val="tx2"/>
                 </a:solidFill>
               </a:rPr>
-              <a:t>Menunggu dengan Benar &amp; Mengukur Stack</a:t>
+              <a:t>Ukuran Stack: Byte, Bukan Word</a:t>
             </a:r>
             <a:endParaRPr lang="en-US" sz="3000" dirty="0"/>
           </a:p>
@@ -4619,26 +4494,26 @@
       </p:sp>
       <p:sp>
         <p:nvSpPr>
-          <p:cNvPr id="3" name="blok-kode"/>
+          <p:cNvPr id="3" name="kartu"/>
           <p:cNvSpPr/>
           <p:nvPr/>
         </p:nvSpPr>
         <p:spPr>
           <a:xfrm>
-            <a:off x="548640" y="1325880"/>
-            <a:ext cx="6656649" cy="3891153"/>
+            <a:off x="548640" y="1600200"/>
+            <a:ext cx="11094415" cy="1828800"/>
           </a:xfrm>
           <a:prstGeom prst="roundRect">
             <a:avLst>
-              <a:gd name="adj" fmla="val 2350"/>
+              <a:gd name="adj" fmla="val 6000"/>
             </a:avLst>
           </a:prstGeom>
           <a:solidFill>
-            <a:srgbClr val="10231A"/>
+            <a:srgbClr val="FBEDEB"/>
           </a:solidFill>
-          <a:ln w="12700">
+          <a:ln w="9525">
             <a:solidFill>
-              <a:srgbClr val="10231A"/>
+              <a:schemeClr val="bg2"/>
             </a:solidFill>
             <a:prstDash val="solid"/>
           </a:ln>
@@ -4646,14 +4521,63 @@
       </p:sp>
       <p:sp>
         <p:nvSpPr>
-          <p:cNvPr id="4" name="Text 2"/>
+          <p:cNvPr id="4" name="pad"/>
+          <p:cNvSpPr/>
+          <p:nvPr/>
+        </p:nvSpPr>
+        <p:spPr>
+          <a:xfrm>
+            <a:off x="914400" y="2057400"/>
+            <a:ext cx="914400" cy="914400"/>
+          </a:xfrm>
+          <a:prstGeom prst="ellipse">
+            <a:avLst/>
+          </a:prstGeom>
+          <a:solidFill>
+            <a:schemeClr val="bg1"/>
+          </a:solidFill>
+          <a:ln w="28575">
+            <a:solidFill>
+              <a:schemeClr val="accent2"/>
+            </a:solidFill>
+            <a:prstDash val="solid"/>
+          </a:ln>
+        </p:spPr>
+      </p:sp>
+      <p:pic>
+        <p:nvPicPr>
+          <p:cNvPr id="5" name="ikon-memory" descr="preencoded.png">    </p:cNvPr>
+          <p:cNvPicPr>
+            <a:picLocks noChangeAspect="1"/>
+          </p:cNvPicPr>
+          <p:nvPr/>
+        </p:nvPicPr>
+        <p:blipFill>
+          <a:blip r:embed="rId1"/>
+          <a:stretch>
+            <a:fillRect/>
+          </a:stretch>
+        </p:blipFill>
+        <p:spPr>
+          <a:xfrm>
+            <a:off x="1143000" y="2286000"/>
+            <a:ext cx="457200" cy="457200"/>
+          </a:xfrm>
+          <a:prstGeom prst="rect">
+            <a:avLst/>
+          </a:prstGeom>
+        </p:spPr>
+      </p:pic>
+      <p:sp>
+        <p:nvSpPr>
+          <p:cNvPr id="6" name="Text 3"/>
           <p:cNvSpPr txBox="1"/>
           <p:nvPr/>
         </p:nvSpPr>
         <p:spPr>
           <a:xfrm>
-            <a:off x="777240" y="1399032"/>
-            <a:ext cx="6199449" cy="274320"/>
+            <a:off x="2103120" y="1600200"/>
+            <a:ext cx="9265615" cy="1828800"/>
           </a:xfrm>
           <a:prstGeom prst="rect">
             <a:avLst/>
@@ -4669,840 +4593,59 @@
               <a:buNone/>
             </a:pPr>
             <a:r>
-              <a:rPr lang="en-US" sz="1100" dirty="0">
-                <a:solidFill>
-                  <a:srgbClr val="8FB8A3"/>
-                </a:solidFill>
-                <a:latin typeface="Consolas" pitchFamily="34" charset="0"/>
-                <a:ea typeface="Consolas" pitchFamily="34" charset="-122"/>
-                <a:cs typeface="Consolas" pitchFamily="34" charset="-120"/>
-              </a:rPr>
-              <a:t>contoh</a:t>
-            </a:r>
-            <a:endParaRPr lang="en-US" sz="1100" dirty="0"/>
-          </a:p>
-        </p:txBody>
-      </p:sp>
-      <p:sp>
-        <p:nvSpPr>
-          <p:cNvPr id="5" name="kode"/>
+              <a:rPr lang="en-US" sz="2400" dirty="0">
+                <a:solidFill>
+                  <a:schemeClr val="tx1"/>
+                </a:solidFill>
+              </a:rPr>
+              <a:t>Di ESP-IDF dan Arduino-ESP32, ukuran stack ditulis dalam </a:t>
+            </a:r>
+            <a:r>
+              <a:rPr lang="en-US" sz="2400" b="1" dirty="0">
+                <a:solidFill>
+                  <a:schemeClr val="tx1"/>
+                </a:solidFill>
+              </a:rPr>
+              <a:t>byte</a:t>
+            </a:r>
+            <a:r>
+              <a:rPr lang="en-US" sz="2400" dirty="0">
+                <a:solidFill>
+                  <a:schemeClr val="tx1"/>
+                </a:solidFill>
+              </a:rPr>
+              <a:t>. FreeRTOS asli memakai </a:t>
+            </a:r>
+            <a:r>
+              <a:rPr lang="en-US" sz="2400" b="1" dirty="0">
+                <a:solidFill>
+                  <a:schemeClr val="tx1"/>
+                </a:solidFill>
+              </a:rPr>
+              <a:t>word</a:t>
+            </a:r>
+            <a:r>
+              <a:rPr lang="en-US" sz="2400" dirty="0">
+                <a:solidFill>
+                  <a:schemeClr val="tx1"/>
+                </a:solidFill>
+              </a:rPr>
+              <a:t> (4 byte).</a:t>
+            </a:r>
+            <a:endParaRPr lang="en-US" sz="2400" dirty="0"/>
+          </a:p>
+        </p:txBody>
+      </p:sp>
+      <p:sp>
+        <p:nvSpPr>
+          <p:cNvPr id="7" name="daftar-poin"/>
           <p:cNvSpPr txBox="1"/>
           <p:nvPr/>
         </p:nvSpPr>
         <p:spPr>
           <a:xfrm>
-            <a:off x="777240" y="1783080"/>
-            <a:ext cx="6290889" cy="3324225"/>
-          </a:xfrm>
-          <a:prstGeom prst="rect">
-            <a:avLst/>
-          </a:prstGeom>
-          <a:noFill/>
-          <a:ln/>
-        </p:spPr>
-        <p:txBody>
-          <a:bodyPr wrap="square" lIns="0" tIns="0" rIns="0" bIns="0" rtlCol="0" anchor="t"/>
-          <a:lstStyle/>
-          <a:p>
-            <a:pPr indent="0" marL="0">
-              <a:lnSpc>
-                <a:spcPct val="105000"/>
-              </a:lnSpc>
-              <a:buNone/>
-            </a:pPr>
-            <a:r>
-              <a:rPr lang="en-US" sz="1500" i="1" dirty="0">
-                <a:solidFill>
-                  <a:srgbClr val="86B596"/>
-                </a:solidFill>
-                <a:latin typeface="Consolas" pitchFamily="34" charset="0"/>
-                <a:ea typeface="Consolas" pitchFamily="34" charset="-122"/>
-                <a:cs typeface="Consolas" pitchFamily="34" charset="-120"/>
-              </a:rPr>
-              <a:t>// Jeda biasa: 500 ms sejak dipanggil</a:t>
-            </a:r>
-            <a:endParaRPr lang="en-US" sz="1500" dirty="0"/>
-          </a:p>
-          <a:p>
-            <a:pPr indent="0" marL="0">
-              <a:lnSpc>
-                <a:spcPct val="105000"/>
-              </a:lnSpc>
-              <a:buNone/>
-            </a:pPr>
-            <a:r>
-              <a:rPr lang="en-US" sz="1500" dirty="0">
-                <a:solidFill>
-                  <a:srgbClr val="E8DC9A"/>
-                </a:solidFill>
-                <a:latin typeface="Consolas" pitchFamily="34" charset="0"/>
-                <a:ea typeface="Consolas" pitchFamily="34" charset="-122"/>
-                <a:cs typeface="Consolas" pitchFamily="34" charset="-120"/>
-              </a:rPr>
-              <a:t>vTaskDelay</a:t>
-            </a:r>
-            <a:r>
-              <a:rPr lang="en-US" sz="1500" dirty="0">
-                <a:solidFill>
-                  <a:srgbClr val="B8C9C0"/>
-                </a:solidFill>
-                <a:latin typeface="Consolas" pitchFamily="34" charset="0"/>
-                <a:ea typeface="Consolas" pitchFamily="34" charset="-122"/>
-                <a:cs typeface="Consolas" pitchFamily="34" charset="-120"/>
-              </a:rPr>
-              <a:t>(</a:t>
-            </a:r>
-            <a:r>
-              <a:rPr lang="en-US" sz="1500" dirty="0">
-                <a:solidFill>
-                  <a:srgbClr val="E8DC9A"/>
-                </a:solidFill>
-                <a:latin typeface="Consolas" pitchFamily="34" charset="0"/>
-                <a:ea typeface="Consolas" pitchFamily="34" charset="-122"/>
-                <a:cs typeface="Consolas" pitchFamily="34" charset="-120"/>
-              </a:rPr>
-              <a:t>pdMS_TO_TICKS</a:t>
-            </a:r>
-            <a:r>
-              <a:rPr lang="en-US" sz="1500" dirty="0">
-                <a:solidFill>
-                  <a:srgbClr val="B8C9C0"/>
-                </a:solidFill>
-                <a:latin typeface="Consolas" pitchFamily="34" charset="0"/>
-                <a:ea typeface="Consolas" pitchFamily="34" charset="-122"/>
-                <a:cs typeface="Consolas" pitchFamily="34" charset="-120"/>
-              </a:rPr>
-              <a:t>(</a:t>
-            </a:r>
-            <a:r>
-              <a:rPr lang="en-US" sz="1500" dirty="0">
-                <a:solidFill>
-                  <a:srgbClr val="B9DDB0"/>
-                </a:solidFill>
-                <a:latin typeface="Consolas" pitchFamily="34" charset="0"/>
-                <a:ea typeface="Consolas" pitchFamily="34" charset="-122"/>
-                <a:cs typeface="Consolas" pitchFamily="34" charset="-120"/>
-              </a:rPr>
-              <a:t>500</a:t>
-            </a:r>
-            <a:r>
-              <a:rPr lang="en-US" sz="1500" dirty="0">
-                <a:solidFill>
-                  <a:srgbClr val="B8C9C0"/>
-                </a:solidFill>
-                <a:latin typeface="Consolas" pitchFamily="34" charset="0"/>
-                <a:ea typeface="Consolas" pitchFamily="34" charset="-122"/>
-                <a:cs typeface="Consolas" pitchFamily="34" charset="-120"/>
-              </a:rPr>
-              <a:t>)</a:t>
-            </a:r>
-            <a:r>
-              <a:rPr lang="en-US" sz="1500" dirty="0">
-                <a:solidFill>
-                  <a:srgbClr val="B8C9C0"/>
-                </a:solidFill>
-                <a:latin typeface="Consolas" pitchFamily="34" charset="0"/>
-                <a:ea typeface="Consolas" pitchFamily="34" charset="-122"/>
-                <a:cs typeface="Consolas" pitchFamily="34" charset="-120"/>
-              </a:rPr>
-              <a:t>)</a:t>
-            </a:r>
-            <a:r>
-              <a:rPr lang="en-US" sz="1500" dirty="0">
-                <a:solidFill>
-                  <a:srgbClr val="B8C9C0"/>
-                </a:solidFill>
-                <a:latin typeface="Consolas" pitchFamily="34" charset="0"/>
-                <a:ea typeface="Consolas" pitchFamily="34" charset="-122"/>
-                <a:cs typeface="Consolas" pitchFamily="34" charset="-120"/>
-              </a:rPr>
-              <a:t>;</a:t>
-            </a:r>
-            <a:endParaRPr lang="en-US" sz="1500" dirty="0"/>
-          </a:p>
-          <a:p>
-            <a:pPr indent="0" marL="0">
-              <a:lnSpc>
-                <a:spcPct val="105000"/>
-              </a:lnSpc>
-              <a:buNone/>
-            </a:pPr>
-            <a:r>
-              <a:rPr lang="en-US" sz="1500" dirty="0">
-                <a:solidFill>
-                  <a:srgbClr val="D9E6DF"/>
-                </a:solidFill>
-                <a:latin typeface="Consolas" pitchFamily="34" charset="0"/>
-                <a:ea typeface="Consolas" pitchFamily="34" charset="-122"/>
-                <a:cs typeface="Consolas" pitchFamily="34" charset="-120"/>
-              </a:rPr>
-              <a:t> </a:t>
-            </a:r>
-            <a:endParaRPr lang="en-US" sz="1500" dirty="0"/>
-          </a:p>
-          <a:p>
-            <a:pPr indent="0" marL="0">
-              <a:lnSpc>
-                <a:spcPct val="105000"/>
-              </a:lnSpc>
-              <a:buNone/>
-            </a:pPr>
-            <a:r>
-              <a:rPr lang="en-US" sz="1500" i="1" dirty="0">
-                <a:solidFill>
-                  <a:srgbClr val="86B596"/>
-                </a:solidFill>
-                <a:latin typeface="Consolas" pitchFamily="34" charset="0"/>
-                <a:ea typeface="Consolas" pitchFamily="34" charset="-122"/>
-                <a:cs typeface="Consolas" pitchFamily="34" charset="-120"/>
-              </a:rPr>
-              <a:t>// Periode tetap: bangun tiap 500 ms</a:t>
-            </a:r>
-            <a:endParaRPr lang="en-US" sz="1500" dirty="0"/>
-          </a:p>
-          <a:p>
-            <a:pPr indent="0" marL="0">
-              <a:lnSpc>
-                <a:spcPct val="105000"/>
-              </a:lnSpc>
-              <a:buNone/>
-            </a:pPr>
-            <a:r>
-              <a:rPr lang="en-US" sz="1500" dirty="0">
-                <a:solidFill>
-                  <a:srgbClr val="5FD3BC"/>
-                </a:solidFill>
-                <a:latin typeface="Consolas" pitchFamily="34" charset="0"/>
-                <a:ea typeface="Consolas" pitchFamily="34" charset="-122"/>
-                <a:cs typeface="Consolas" pitchFamily="34" charset="-120"/>
-              </a:rPr>
-              <a:t>TickType_t</a:t>
-            </a:r>
-            <a:r>
-              <a:rPr lang="en-US" sz="1500" dirty="0">
-                <a:solidFill>
-                  <a:srgbClr val="D9E6DF"/>
-                </a:solidFill>
-                <a:latin typeface="Consolas" pitchFamily="34" charset="0"/>
-                <a:ea typeface="Consolas" pitchFamily="34" charset="-122"/>
-                <a:cs typeface="Consolas" pitchFamily="34" charset="-120"/>
-              </a:rPr>
-              <a:t> </a:t>
-            </a:r>
-            <a:r>
-              <a:rPr lang="en-US" sz="1500" dirty="0">
-                <a:solidFill>
-                  <a:srgbClr val="D9E6DF"/>
-                </a:solidFill>
-                <a:latin typeface="Consolas" pitchFamily="34" charset="0"/>
-                <a:ea typeface="Consolas" pitchFamily="34" charset="-122"/>
-                <a:cs typeface="Consolas" pitchFamily="34" charset="-120"/>
-              </a:rPr>
-              <a:t>bangun</a:t>
-            </a:r>
-            <a:r>
-              <a:rPr lang="en-US" sz="1500" dirty="0">
-                <a:solidFill>
-                  <a:srgbClr val="D9E6DF"/>
-                </a:solidFill>
-                <a:latin typeface="Consolas" pitchFamily="34" charset="0"/>
-                <a:ea typeface="Consolas" pitchFamily="34" charset="-122"/>
-                <a:cs typeface="Consolas" pitchFamily="34" charset="-120"/>
-              </a:rPr>
-              <a:t> </a:t>
-            </a:r>
-            <a:r>
-              <a:rPr lang="en-US" sz="1500" dirty="0">
-                <a:solidFill>
-                  <a:srgbClr val="B8C9C0"/>
-                </a:solidFill>
-                <a:latin typeface="Consolas" pitchFamily="34" charset="0"/>
-                <a:ea typeface="Consolas" pitchFamily="34" charset="-122"/>
-                <a:cs typeface="Consolas" pitchFamily="34" charset="-120"/>
-              </a:rPr>
-              <a:t>=</a:t>
-            </a:r>
-            <a:r>
-              <a:rPr lang="en-US" sz="1500" dirty="0">
-                <a:solidFill>
-                  <a:srgbClr val="D9E6DF"/>
-                </a:solidFill>
-                <a:latin typeface="Consolas" pitchFamily="34" charset="0"/>
-                <a:ea typeface="Consolas" pitchFamily="34" charset="-122"/>
-                <a:cs typeface="Consolas" pitchFamily="34" charset="-120"/>
-              </a:rPr>
-              <a:t> </a:t>
-            </a:r>
-            <a:r>
-              <a:rPr lang="en-US" sz="1500" dirty="0">
-                <a:solidFill>
-                  <a:srgbClr val="E8DC9A"/>
-                </a:solidFill>
-                <a:latin typeface="Consolas" pitchFamily="34" charset="0"/>
-                <a:ea typeface="Consolas" pitchFamily="34" charset="-122"/>
-                <a:cs typeface="Consolas" pitchFamily="34" charset="-120"/>
-              </a:rPr>
-              <a:t>xTaskGetTickCount</a:t>
-            </a:r>
-            <a:r>
-              <a:rPr lang="en-US" sz="1500" dirty="0">
-                <a:solidFill>
-                  <a:srgbClr val="B8C9C0"/>
-                </a:solidFill>
-                <a:latin typeface="Consolas" pitchFamily="34" charset="0"/>
-                <a:ea typeface="Consolas" pitchFamily="34" charset="-122"/>
-                <a:cs typeface="Consolas" pitchFamily="34" charset="-120"/>
-              </a:rPr>
-              <a:t>(</a:t>
-            </a:r>
-            <a:r>
-              <a:rPr lang="en-US" sz="1500" dirty="0">
-                <a:solidFill>
-                  <a:srgbClr val="B8C9C0"/>
-                </a:solidFill>
-                <a:latin typeface="Consolas" pitchFamily="34" charset="0"/>
-                <a:ea typeface="Consolas" pitchFamily="34" charset="-122"/>
-                <a:cs typeface="Consolas" pitchFamily="34" charset="-120"/>
-              </a:rPr>
-              <a:t>)</a:t>
-            </a:r>
-            <a:r>
-              <a:rPr lang="en-US" sz="1500" dirty="0">
-                <a:solidFill>
-                  <a:srgbClr val="B8C9C0"/>
-                </a:solidFill>
-                <a:latin typeface="Consolas" pitchFamily="34" charset="0"/>
-                <a:ea typeface="Consolas" pitchFamily="34" charset="-122"/>
-                <a:cs typeface="Consolas" pitchFamily="34" charset="-120"/>
-              </a:rPr>
-              <a:t>;</a:t>
-            </a:r>
-            <a:endParaRPr lang="en-US" sz="1500" dirty="0"/>
-          </a:p>
-          <a:p>
-            <a:pPr indent="0" marL="0">
-              <a:lnSpc>
-                <a:spcPct val="105000"/>
-              </a:lnSpc>
-              <a:buNone/>
-            </a:pPr>
-            <a:r>
-              <a:rPr lang="en-US" sz="1500" dirty="0">
-                <a:solidFill>
-                  <a:srgbClr val="D7A6F2"/>
-                </a:solidFill>
-                <a:latin typeface="Consolas" pitchFamily="34" charset="0"/>
-                <a:ea typeface="Consolas" pitchFamily="34" charset="-122"/>
-                <a:cs typeface="Consolas" pitchFamily="34" charset="-120"/>
-              </a:rPr>
-              <a:t>for</a:t>
-            </a:r>
-            <a:r>
-              <a:rPr lang="en-US" sz="1500" dirty="0">
-                <a:solidFill>
-                  <a:srgbClr val="D9E6DF"/>
-                </a:solidFill>
-                <a:latin typeface="Consolas" pitchFamily="34" charset="0"/>
-                <a:ea typeface="Consolas" pitchFamily="34" charset="-122"/>
-                <a:cs typeface="Consolas" pitchFamily="34" charset="-120"/>
-              </a:rPr>
-              <a:t> </a:t>
-            </a:r>
-            <a:r>
-              <a:rPr lang="en-US" sz="1500" dirty="0">
-                <a:solidFill>
-                  <a:srgbClr val="B8C9C0"/>
-                </a:solidFill>
-                <a:latin typeface="Consolas" pitchFamily="34" charset="0"/>
-                <a:ea typeface="Consolas" pitchFamily="34" charset="-122"/>
-                <a:cs typeface="Consolas" pitchFamily="34" charset="-120"/>
-              </a:rPr>
-              <a:t>(</a:t>
-            </a:r>
-            <a:r>
-              <a:rPr lang="en-US" sz="1500" dirty="0">
-                <a:solidFill>
-                  <a:srgbClr val="B8C9C0"/>
-                </a:solidFill>
-                <a:latin typeface="Consolas" pitchFamily="34" charset="0"/>
-                <a:ea typeface="Consolas" pitchFamily="34" charset="-122"/>
-                <a:cs typeface="Consolas" pitchFamily="34" charset="-120"/>
-              </a:rPr>
-              <a:t>;</a:t>
-            </a:r>
-            <a:r>
-              <a:rPr lang="en-US" sz="1500" dirty="0">
-                <a:solidFill>
-                  <a:srgbClr val="B8C9C0"/>
-                </a:solidFill>
-                <a:latin typeface="Consolas" pitchFamily="34" charset="0"/>
-                <a:ea typeface="Consolas" pitchFamily="34" charset="-122"/>
-                <a:cs typeface="Consolas" pitchFamily="34" charset="-120"/>
-              </a:rPr>
-              <a:t>;</a:t>
-            </a:r>
-            <a:r>
-              <a:rPr lang="en-US" sz="1500" dirty="0">
-                <a:solidFill>
-                  <a:srgbClr val="B8C9C0"/>
-                </a:solidFill>
-                <a:latin typeface="Consolas" pitchFamily="34" charset="0"/>
-                <a:ea typeface="Consolas" pitchFamily="34" charset="-122"/>
-                <a:cs typeface="Consolas" pitchFamily="34" charset="-120"/>
-              </a:rPr>
-              <a:t>)</a:t>
-            </a:r>
-            <a:r>
-              <a:rPr lang="en-US" sz="1500" dirty="0">
-                <a:solidFill>
-                  <a:srgbClr val="D9E6DF"/>
-                </a:solidFill>
-                <a:latin typeface="Consolas" pitchFamily="34" charset="0"/>
-                <a:ea typeface="Consolas" pitchFamily="34" charset="-122"/>
-                <a:cs typeface="Consolas" pitchFamily="34" charset="-120"/>
-              </a:rPr>
-              <a:t> </a:t>
-            </a:r>
-            <a:r>
-              <a:rPr lang="en-US" sz="1500" dirty="0">
-                <a:solidFill>
-                  <a:srgbClr val="B8C9C0"/>
-                </a:solidFill>
-                <a:latin typeface="Consolas" pitchFamily="34" charset="0"/>
-                <a:ea typeface="Consolas" pitchFamily="34" charset="-122"/>
-                <a:cs typeface="Consolas" pitchFamily="34" charset="-120"/>
-              </a:rPr>
-              <a:t>{</a:t>
-            </a:r>
-            <a:endParaRPr lang="en-US" sz="1500" dirty="0"/>
-          </a:p>
-          <a:p>
-            <a:pPr indent="0" marL="0">
-              <a:lnSpc>
-                <a:spcPct val="105000"/>
-              </a:lnSpc>
-              <a:buNone/>
-            </a:pPr>
-            <a:r>
-              <a:rPr lang="en-US" sz="1500" dirty="0">
-                <a:solidFill>
-                  <a:srgbClr val="D9E6DF"/>
-                </a:solidFill>
-                <a:latin typeface="Consolas" pitchFamily="34" charset="0"/>
-                <a:ea typeface="Consolas" pitchFamily="34" charset="-122"/>
-                <a:cs typeface="Consolas" pitchFamily="34" charset="-120"/>
-              </a:rPr>
-              <a:t>  </a:t>
-            </a:r>
-            <a:r>
-              <a:rPr lang="en-US" sz="1500" dirty="0">
-                <a:solidFill>
-                  <a:srgbClr val="E8DC9A"/>
-                </a:solidFill>
-                <a:latin typeface="Consolas" pitchFamily="34" charset="0"/>
-                <a:ea typeface="Consolas" pitchFamily="34" charset="-122"/>
-                <a:cs typeface="Consolas" pitchFamily="34" charset="-120"/>
-              </a:rPr>
-              <a:t>bacaSensor</a:t>
-            </a:r>
-            <a:r>
-              <a:rPr lang="en-US" sz="1500" dirty="0">
-                <a:solidFill>
-                  <a:srgbClr val="B8C9C0"/>
-                </a:solidFill>
-                <a:latin typeface="Consolas" pitchFamily="34" charset="0"/>
-                <a:ea typeface="Consolas" pitchFamily="34" charset="-122"/>
-                <a:cs typeface="Consolas" pitchFamily="34" charset="-120"/>
-              </a:rPr>
-              <a:t>(</a:t>
-            </a:r>
-            <a:r>
-              <a:rPr lang="en-US" sz="1500" dirty="0">
-                <a:solidFill>
-                  <a:srgbClr val="B8C9C0"/>
-                </a:solidFill>
-                <a:latin typeface="Consolas" pitchFamily="34" charset="0"/>
-                <a:ea typeface="Consolas" pitchFamily="34" charset="-122"/>
-                <a:cs typeface="Consolas" pitchFamily="34" charset="-120"/>
-              </a:rPr>
-              <a:t>)</a:t>
-            </a:r>
-            <a:r>
-              <a:rPr lang="en-US" sz="1500" dirty="0">
-                <a:solidFill>
-                  <a:srgbClr val="B8C9C0"/>
-                </a:solidFill>
-                <a:latin typeface="Consolas" pitchFamily="34" charset="0"/>
-                <a:ea typeface="Consolas" pitchFamily="34" charset="-122"/>
-                <a:cs typeface="Consolas" pitchFamily="34" charset="-120"/>
-              </a:rPr>
-              <a:t>;</a:t>
-            </a:r>
-            <a:endParaRPr lang="en-US" sz="1500" dirty="0"/>
-          </a:p>
-          <a:p>
-            <a:pPr indent="0" marL="0">
-              <a:lnSpc>
-                <a:spcPct val="105000"/>
-              </a:lnSpc>
-              <a:buNone/>
-            </a:pPr>
-            <a:r>
-              <a:rPr lang="en-US" sz="1500" dirty="0">
-                <a:solidFill>
-                  <a:srgbClr val="D9E6DF"/>
-                </a:solidFill>
-                <a:latin typeface="Consolas" pitchFamily="34" charset="0"/>
-                <a:ea typeface="Consolas" pitchFamily="34" charset="-122"/>
-                <a:cs typeface="Consolas" pitchFamily="34" charset="-120"/>
-              </a:rPr>
-              <a:t>  </a:t>
-            </a:r>
-            <a:r>
-              <a:rPr lang="en-US" sz="1500" dirty="0">
-                <a:solidFill>
-                  <a:srgbClr val="E8DC9A"/>
-                </a:solidFill>
-                <a:latin typeface="Consolas" pitchFamily="34" charset="0"/>
-                <a:ea typeface="Consolas" pitchFamily="34" charset="-122"/>
-                <a:cs typeface="Consolas" pitchFamily="34" charset="-120"/>
-              </a:rPr>
-              <a:t>xTaskDelayUntil</a:t>
-            </a:r>
-            <a:r>
-              <a:rPr lang="en-US" sz="1500" dirty="0">
-                <a:solidFill>
-                  <a:srgbClr val="B8C9C0"/>
-                </a:solidFill>
-                <a:latin typeface="Consolas" pitchFamily="34" charset="0"/>
-                <a:ea typeface="Consolas" pitchFamily="34" charset="-122"/>
-                <a:cs typeface="Consolas" pitchFamily="34" charset="-120"/>
-              </a:rPr>
-              <a:t>(</a:t>
-            </a:r>
-            <a:r>
-              <a:rPr lang="en-US" sz="1500" dirty="0">
-                <a:solidFill>
-                  <a:srgbClr val="B8C9C0"/>
-                </a:solidFill>
-                <a:latin typeface="Consolas" pitchFamily="34" charset="0"/>
-                <a:ea typeface="Consolas" pitchFamily="34" charset="-122"/>
-                <a:cs typeface="Consolas" pitchFamily="34" charset="-120"/>
-              </a:rPr>
-              <a:t>&amp;</a:t>
-            </a:r>
-            <a:r>
-              <a:rPr lang="en-US" sz="1500" dirty="0">
-                <a:solidFill>
-                  <a:srgbClr val="D9E6DF"/>
-                </a:solidFill>
-                <a:latin typeface="Consolas" pitchFamily="34" charset="0"/>
-                <a:ea typeface="Consolas" pitchFamily="34" charset="-122"/>
-                <a:cs typeface="Consolas" pitchFamily="34" charset="-120"/>
-              </a:rPr>
-              <a:t>bangun</a:t>
-            </a:r>
-            <a:r>
-              <a:rPr lang="en-US" sz="1500" dirty="0">
-                <a:solidFill>
-                  <a:srgbClr val="B8C9C0"/>
-                </a:solidFill>
-                <a:latin typeface="Consolas" pitchFamily="34" charset="0"/>
-                <a:ea typeface="Consolas" pitchFamily="34" charset="-122"/>
-                <a:cs typeface="Consolas" pitchFamily="34" charset="-120"/>
-              </a:rPr>
-              <a:t>,</a:t>
-            </a:r>
-            <a:r>
-              <a:rPr lang="en-US" sz="1500" dirty="0">
-                <a:solidFill>
-                  <a:srgbClr val="D9E6DF"/>
-                </a:solidFill>
-                <a:latin typeface="Consolas" pitchFamily="34" charset="0"/>
-                <a:ea typeface="Consolas" pitchFamily="34" charset="-122"/>
-                <a:cs typeface="Consolas" pitchFamily="34" charset="-120"/>
-              </a:rPr>
-              <a:t> </a:t>
-            </a:r>
-            <a:r>
-              <a:rPr lang="en-US" sz="1500" dirty="0">
-                <a:solidFill>
-                  <a:srgbClr val="E8DC9A"/>
-                </a:solidFill>
-                <a:latin typeface="Consolas" pitchFamily="34" charset="0"/>
-                <a:ea typeface="Consolas" pitchFamily="34" charset="-122"/>
-                <a:cs typeface="Consolas" pitchFamily="34" charset="-120"/>
-              </a:rPr>
-              <a:t>pdMS_TO_TICKS</a:t>
-            </a:r>
-            <a:r>
-              <a:rPr lang="en-US" sz="1500" dirty="0">
-                <a:solidFill>
-                  <a:srgbClr val="B8C9C0"/>
-                </a:solidFill>
-                <a:latin typeface="Consolas" pitchFamily="34" charset="0"/>
-                <a:ea typeface="Consolas" pitchFamily="34" charset="-122"/>
-                <a:cs typeface="Consolas" pitchFamily="34" charset="-120"/>
-              </a:rPr>
-              <a:t>(</a:t>
-            </a:r>
-            <a:r>
-              <a:rPr lang="en-US" sz="1500" dirty="0">
-                <a:solidFill>
-                  <a:srgbClr val="B9DDB0"/>
-                </a:solidFill>
-                <a:latin typeface="Consolas" pitchFamily="34" charset="0"/>
-                <a:ea typeface="Consolas" pitchFamily="34" charset="-122"/>
-                <a:cs typeface="Consolas" pitchFamily="34" charset="-120"/>
-              </a:rPr>
-              <a:t>500</a:t>
-            </a:r>
-            <a:r>
-              <a:rPr lang="en-US" sz="1500" dirty="0">
-                <a:solidFill>
-                  <a:srgbClr val="B8C9C0"/>
-                </a:solidFill>
-                <a:latin typeface="Consolas" pitchFamily="34" charset="0"/>
-                <a:ea typeface="Consolas" pitchFamily="34" charset="-122"/>
-                <a:cs typeface="Consolas" pitchFamily="34" charset="-120"/>
-              </a:rPr>
-              <a:t>)</a:t>
-            </a:r>
-            <a:r>
-              <a:rPr lang="en-US" sz="1500" dirty="0">
-                <a:solidFill>
-                  <a:srgbClr val="B8C9C0"/>
-                </a:solidFill>
-                <a:latin typeface="Consolas" pitchFamily="34" charset="0"/>
-                <a:ea typeface="Consolas" pitchFamily="34" charset="-122"/>
-                <a:cs typeface="Consolas" pitchFamily="34" charset="-120"/>
-              </a:rPr>
-              <a:t>)</a:t>
-            </a:r>
-            <a:r>
-              <a:rPr lang="en-US" sz="1500" dirty="0">
-                <a:solidFill>
-                  <a:srgbClr val="B8C9C0"/>
-                </a:solidFill>
-                <a:latin typeface="Consolas" pitchFamily="34" charset="0"/>
-                <a:ea typeface="Consolas" pitchFamily="34" charset="-122"/>
-                <a:cs typeface="Consolas" pitchFamily="34" charset="-120"/>
-              </a:rPr>
-              <a:t>;</a:t>
-            </a:r>
-            <a:endParaRPr lang="en-US" sz="1500" dirty="0"/>
-          </a:p>
-          <a:p>
-            <a:pPr indent="0" marL="0">
-              <a:lnSpc>
-                <a:spcPct val="105000"/>
-              </a:lnSpc>
-              <a:buNone/>
-            </a:pPr>
-            <a:r>
-              <a:rPr lang="en-US" sz="1500" dirty="0">
-                <a:solidFill>
-                  <a:srgbClr val="B8C9C0"/>
-                </a:solidFill>
-                <a:latin typeface="Consolas" pitchFamily="34" charset="0"/>
-                <a:ea typeface="Consolas" pitchFamily="34" charset="-122"/>
-                <a:cs typeface="Consolas" pitchFamily="34" charset="-120"/>
-              </a:rPr>
-              <a:t>}</a:t>
-            </a:r>
-            <a:endParaRPr lang="en-US" sz="1500" dirty="0"/>
-          </a:p>
-          <a:p>
-            <a:pPr indent="0" marL="0">
-              <a:lnSpc>
-                <a:spcPct val="105000"/>
-              </a:lnSpc>
-              <a:buNone/>
-            </a:pPr>
-            <a:r>
-              <a:rPr lang="en-US" sz="1500" dirty="0">
-                <a:solidFill>
-                  <a:srgbClr val="D9E6DF"/>
-                </a:solidFill>
-                <a:latin typeface="Consolas" pitchFamily="34" charset="0"/>
-                <a:ea typeface="Consolas" pitchFamily="34" charset="-122"/>
-                <a:cs typeface="Consolas" pitchFamily="34" charset="-120"/>
-              </a:rPr>
-              <a:t> </a:t>
-            </a:r>
-            <a:endParaRPr lang="en-US" sz="1500" dirty="0"/>
-          </a:p>
-          <a:p>
-            <a:pPr indent="0" marL="0">
-              <a:lnSpc>
-                <a:spcPct val="105000"/>
-              </a:lnSpc>
-              <a:buNone/>
-            </a:pPr>
-            <a:r>
-              <a:rPr lang="en-US" sz="1500" i="1" dirty="0">
-                <a:solidFill>
-                  <a:srgbClr val="86B596"/>
-                </a:solidFill>
-                <a:latin typeface="Consolas" pitchFamily="34" charset="0"/>
-                <a:ea typeface="Consolas" pitchFamily="34" charset="-122"/>
-                <a:cs typeface="Consolas" pitchFamily="34" charset="-120"/>
-              </a:rPr>
-              <a:t>// Sisa stack paling sedikit (byte)</a:t>
-            </a:r>
-            <a:endParaRPr lang="en-US" sz="1500" dirty="0"/>
-          </a:p>
-          <a:p>
-            <a:pPr indent="0" marL="0">
-              <a:lnSpc>
-                <a:spcPct val="105000"/>
-              </a:lnSpc>
-              <a:buNone/>
-            </a:pPr>
-            <a:r>
-              <a:rPr lang="en-US" sz="1500" dirty="0">
-                <a:solidFill>
-                  <a:srgbClr val="5FD3BC"/>
-                </a:solidFill>
-                <a:latin typeface="Consolas" pitchFamily="34" charset="0"/>
-                <a:ea typeface="Consolas" pitchFamily="34" charset="-122"/>
-                <a:cs typeface="Consolas" pitchFamily="34" charset="-120"/>
-              </a:rPr>
-              <a:t>UBaseType_t</a:t>
-            </a:r>
-            <a:r>
-              <a:rPr lang="en-US" sz="1500" dirty="0">
-                <a:solidFill>
-                  <a:srgbClr val="D9E6DF"/>
-                </a:solidFill>
-                <a:latin typeface="Consolas" pitchFamily="34" charset="0"/>
-                <a:ea typeface="Consolas" pitchFamily="34" charset="-122"/>
-                <a:cs typeface="Consolas" pitchFamily="34" charset="-120"/>
-              </a:rPr>
-              <a:t> </a:t>
-            </a:r>
-            <a:r>
-              <a:rPr lang="en-US" sz="1500" dirty="0">
-                <a:solidFill>
-                  <a:srgbClr val="D9E6DF"/>
-                </a:solidFill>
-                <a:latin typeface="Consolas" pitchFamily="34" charset="0"/>
-                <a:ea typeface="Consolas" pitchFamily="34" charset="-122"/>
-                <a:cs typeface="Consolas" pitchFamily="34" charset="-120"/>
-              </a:rPr>
-              <a:t>sisa</a:t>
-            </a:r>
-            <a:r>
-              <a:rPr lang="en-US" sz="1500" dirty="0">
-                <a:solidFill>
-                  <a:srgbClr val="D9E6DF"/>
-                </a:solidFill>
-                <a:latin typeface="Consolas" pitchFamily="34" charset="0"/>
-                <a:ea typeface="Consolas" pitchFamily="34" charset="-122"/>
-                <a:cs typeface="Consolas" pitchFamily="34" charset="-120"/>
-              </a:rPr>
-              <a:t> </a:t>
-            </a:r>
-            <a:r>
-              <a:rPr lang="en-US" sz="1500" dirty="0">
-                <a:solidFill>
-                  <a:srgbClr val="B8C9C0"/>
-                </a:solidFill>
-                <a:latin typeface="Consolas" pitchFamily="34" charset="0"/>
-                <a:ea typeface="Consolas" pitchFamily="34" charset="-122"/>
-                <a:cs typeface="Consolas" pitchFamily="34" charset="-120"/>
-              </a:rPr>
-              <a:t>=</a:t>
-            </a:r>
-            <a:endParaRPr lang="en-US" sz="1500" dirty="0"/>
-          </a:p>
-          <a:p>
-            <a:pPr indent="0" marL="0">
-              <a:lnSpc>
-                <a:spcPct val="105000"/>
-              </a:lnSpc>
-              <a:buNone/>
-            </a:pPr>
-            <a:r>
-              <a:rPr lang="en-US" sz="1500" dirty="0">
-                <a:solidFill>
-                  <a:srgbClr val="D9E6DF"/>
-                </a:solidFill>
-                <a:latin typeface="Consolas" pitchFamily="34" charset="0"/>
-                <a:ea typeface="Consolas" pitchFamily="34" charset="-122"/>
-                <a:cs typeface="Consolas" pitchFamily="34" charset="-120"/>
-              </a:rPr>
-              <a:t>    </a:t>
-            </a:r>
-            <a:r>
-              <a:rPr lang="en-US" sz="1500" dirty="0">
-                <a:solidFill>
-                  <a:srgbClr val="E8DC9A"/>
-                </a:solidFill>
-                <a:latin typeface="Consolas" pitchFamily="34" charset="0"/>
-                <a:ea typeface="Consolas" pitchFamily="34" charset="-122"/>
-                <a:cs typeface="Consolas" pitchFamily="34" charset="-120"/>
-              </a:rPr>
-              <a:t>uxTaskGetStackHighWaterMark</a:t>
-            </a:r>
-            <a:r>
-              <a:rPr lang="en-US" sz="1500" dirty="0">
-                <a:solidFill>
-                  <a:srgbClr val="B8C9C0"/>
-                </a:solidFill>
-                <a:latin typeface="Consolas" pitchFamily="34" charset="0"/>
-                <a:ea typeface="Consolas" pitchFamily="34" charset="-122"/>
-                <a:cs typeface="Consolas" pitchFamily="34" charset="-120"/>
-              </a:rPr>
-              <a:t>(</a:t>
-            </a:r>
-            <a:r>
-              <a:rPr lang="en-US" sz="1500" dirty="0">
-                <a:solidFill>
-                  <a:srgbClr val="7CC8FF"/>
-                </a:solidFill>
-                <a:latin typeface="Consolas" pitchFamily="34" charset="0"/>
-                <a:ea typeface="Consolas" pitchFamily="34" charset="-122"/>
-                <a:cs typeface="Consolas" pitchFamily="34" charset="-120"/>
-              </a:rPr>
-              <a:t>NULL</a:t>
-            </a:r>
-            <a:r>
-              <a:rPr lang="en-US" sz="1500" dirty="0">
-                <a:solidFill>
-                  <a:srgbClr val="B8C9C0"/>
-                </a:solidFill>
-                <a:latin typeface="Consolas" pitchFamily="34" charset="0"/>
-                <a:ea typeface="Consolas" pitchFamily="34" charset="-122"/>
-                <a:cs typeface="Consolas" pitchFamily="34" charset="-120"/>
-              </a:rPr>
-              <a:t>)</a:t>
-            </a:r>
-            <a:r>
-              <a:rPr lang="en-US" sz="1500" dirty="0">
-                <a:solidFill>
-                  <a:srgbClr val="B8C9C0"/>
-                </a:solidFill>
-                <a:latin typeface="Consolas" pitchFamily="34" charset="0"/>
-                <a:ea typeface="Consolas" pitchFamily="34" charset="-122"/>
-                <a:cs typeface="Consolas" pitchFamily="34" charset="-120"/>
-              </a:rPr>
-              <a:t>;</a:t>
-            </a:r>
-            <a:endParaRPr lang="en-US" sz="1500" dirty="0"/>
-          </a:p>
-        </p:txBody>
-      </p:sp>
-      <p:sp>
-        <p:nvSpPr>
-          <p:cNvPr id="6" name="daftar-poin"/>
-          <p:cNvSpPr txBox="1"/>
-          <p:nvPr/>
-        </p:nvSpPr>
-        <p:spPr>
-          <a:xfrm>
-            <a:off x="7571049" y="1325880"/>
-            <a:ext cx="4072006" cy="4846320"/>
+            <a:off x="548640" y="3749040"/>
+            <a:ext cx="11094415" cy="2423160"/>
           </a:xfrm>
           <a:prstGeom prst="rect">
             <a:avLst/>
@@ -5522,7 +4665,15 @@
               <a:buChar char="•"/>
             </a:pPr>
             <a:r>
-              <a:rPr lang="en-US" sz="1700" dirty="0">
+              <a:rPr lang="en-US" sz="1900" dirty="0">
+                <a:solidFill>
+                  <a:schemeClr val="tx1"/>
+                </a:solidFill>
+              </a:rPr>
+              <a:t>Contoh internet </a:t>
+            </a:r>
+            <a:r>
+              <a:rPr lang="en-US" sz="1900" dirty="0">
                 <a:solidFill>
                   <a:srgbClr val="A35F14"/>
                 </a:solidFill>
@@ -5530,28 +4681,17 @@
                 <a:ea typeface="Consolas" pitchFamily="34" charset="-122"/>
                 <a:cs typeface="Consolas" pitchFamily="34" charset="-120"/>
               </a:rPr>
-              <a:t>delay()</a:t>
-            </a:r>
-            <a:r>
-              <a:rPr lang="en-US" sz="1700" dirty="0">
+              <a:t>1000</a:t>
+            </a:r>
+            <a:r>
+              <a:rPr lang="en-US" sz="1900" dirty="0">
                 <a:solidFill>
                   <a:schemeClr val="tx1"/>
                 </a:solidFill>
               </a:rPr>
-              <a:t> di ESP32 = </a:t>
-            </a:r>
-            <a:r>
-              <a:rPr lang="en-US" sz="1700" dirty="0">
-                <a:solidFill>
-                  <a:srgbClr val="A35F14"/>
-                </a:solidFill>
-                <a:latin typeface="Consolas" pitchFamily="34" charset="0"/>
-                <a:ea typeface="Consolas" pitchFamily="34" charset="-122"/>
-                <a:cs typeface="Consolas" pitchFamily="34" charset="-120"/>
-              </a:rPr>
-              <a:t>vTaskDelay()</a:t>
-            </a:r>
-            <a:endParaRPr lang="en-US" sz="1700" dirty="0"/>
+              <a:t> = 4.000 byte di FreeRTOS asli, tetapi 1.000 byte di ESP32</a:t>
+            </a:r>
+            <a:endParaRPr lang="en-US" sz="1900" dirty="0"/>
           </a:p>
           <a:p>
             <a:pPr marL="279400" indent="-279400">
@@ -5562,33 +4702,14 @@
               <a:buChar char="•"/>
             </a:pPr>
             <a:r>
-              <a:rPr lang="en-US" sz="1700" dirty="0">
+              <a:rPr lang="en-US" sz="1900" dirty="0">
                 <a:solidFill>
                   <a:schemeClr val="tx1"/>
                 </a:solidFill>
               </a:rPr>
-              <a:t>Busy-wait </a:t>
-            </a:r>
-            <a:r>
-              <a:rPr lang="en-US" sz="1700" dirty="0">
-                <a:solidFill>
-                  <a:srgbClr val="A35F14"/>
-                </a:solidFill>
-                <a:latin typeface="Consolas" pitchFamily="34" charset="0"/>
-                <a:ea typeface="Consolas" pitchFamily="34" charset="-122"/>
-                <a:cs typeface="Consolas" pitchFamily="34" charset="-120"/>
-              </a:rPr>
-              <a:t>while (millis() ...)</a:t>
-            </a:r>
-            <a:r>
-              <a:rPr lang="en-US" sz="1700" dirty="0">
-                <a:solidFill>
-                  <a:schemeClr val="tx1"/>
-                </a:solidFill>
-              </a:rPr>
-              <a:t> memonopoli CPU → hindari</a:t>
-            </a:r>
-            <a:endParaRPr lang="en-US" sz="1700" dirty="0"/>
+              <a:t>Mulai dari 2.048–4.096 byte, lalu ukur sisanya</a:t>
+            </a:r>
+            <a:endParaRPr lang="en-US" sz="1900" dirty="0"/>
           </a:p>
           <a:p>
             <a:pPr marL="279400" indent="-279400">
@@ -5599,62 +4720,14 @@
               <a:buChar char="•"/>
             </a:pPr>
             <a:r>
-              <a:rPr lang="en-US" sz="1700" dirty="0">
-                <a:solidFill>
-                  <a:srgbClr val="A35F14"/>
-                </a:solidFill>
-                <a:latin typeface="Consolas" pitchFamily="34" charset="0"/>
-                <a:ea typeface="Consolas" pitchFamily="34" charset="-122"/>
-                <a:cs typeface="Consolas" pitchFamily="34" charset="-120"/>
-              </a:rPr>
-              <a:t>xTaskDelayUntil()</a:t>
-            </a:r>
-            <a:r>
-              <a:rPr lang="en-US" sz="1700" dirty="0">
+              <a:rPr lang="en-US" sz="1900" dirty="0">
                 <a:solidFill>
                   <a:schemeClr val="tx1"/>
                 </a:solidFill>
               </a:rPr>
-              <a:t>: periode tidak bergeser</a:t>
-            </a:r>
-            <a:endParaRPr lang="en-US" sz="1700" dirty="0"/>
-          </a:p>
-          <a:p>
-            <a:pPr marL="279400" indent="-279400">
-              <a:spcAft>
-                <a:spcPts val="1000"/>
-              </a:spcAft>
-              <a:buSzPct val="100000"/>
-              <a:buChar char="•"/>
-            </a:pPr>
-            <a:r>
-              <a:rPr lang="en-US" sz="1700" dirty="0">
-                <a:solidFill>
-                  <a:schemeClr val="tx1"/>
-                </a:solidFill>
-              </a:rPr>
-              <a:t>Satu </a:t>
-            </a:r>
-            <a:r>
-              <a:rPr lang="en-US" sz="1700" dirty="0">
-                <a:solidFill>
-                  <a:srgbClr val="A35F14"/>
-                </a:solidFill>
-                <a:latin typeface="Consolas" pitchFamily="34" charset="0"/>
-                <a:ea typeface="Consolas" pitchFamily="34" charset="-122"/>
-                <a:cs typeface="Consolas" pitchFamily="34" charset="-120"/>
-              </a:rPr>
-              <a:t>Serial.printf()</a:t>
-            </a:r>
-            <a:r>
-              <a:rPr lang="en-US" sz="1700" dirty="0">
-                <a:solidFill>
-                  <a:schemeClr val="tx1"/>
-                </a:solidFill>
-              </a:rPr>
-              <a:t> memakai ±900 B stack</a:t>
-            </a:r>
-            <a:endParaRPr lang="en-US" sz="1700" dirty="0"/>
+              <a:t>Nama task maks. 15 karakter; prioritas 0–24</a:t>
+            </a:r>
+            <a:endParaRPr lang="en-US" sz="1900" dirty="0"/>
           </a:p>
         </p:txBody>
       </p:sp>
@@ -5733,13 +4806,13 @@
           <p:cNvPr id="2" name="Text 0"/>
           <p:cNvSpPr/>
           <p:nvPr>
-            <p:ph idx="101" type="body" hasCustomPrompt="1"/>
+            <p:ph idx="100" type="title" hasCustomPrompt="1"/>
           </p:nvPr>
         </p:nvSpPr>
         <p:spPr>
           <a:xfrm>
-            <a:off x="548640" y="1828800"/>
-            <a:ext cx="2743200" cy="1097280"/>
+            <a:off x="548640" y="320040"/>
+            <a:ext cx="11094415" cy="777240"/>
           </a:xfrm>
           <a:prstGeom prst="rect">
             <a:avLst/>
@@ -5748,36 +4821,100 @@
           <a:ln/>
         </p:spPr>
         <p:txBody>
-          <a:bodyPr wrap="square" lIns="0" tIns="0" rIns="0" bIns="0" rtlCol="0"/>
+          <a:bodyPr wrap="square" lIns="0" tIns="0" rIns="0" bIns="0" rtlCol="0" anchor="ctr"/>
+          <a:lstStyle/>
+          <a:p>
+            <a:pPr algn="l" indent="0" marL="0">
+              <a:buNone/>
+            </a:pPr>
+            <a:r>
+              <a:rPr lang="en-US" sz="3000" b="1" dirty="0">
+                <a:solidFill>
+                  <a:schemeClr val="tx2"/>
+                </a:solidFill>
+              </a:rPr>
+              <a:t>Menunggu dengan Benar &amp; Mengukur Stack</a:t>
+            </a:r>
+            <a:endParaRPr lang="en-US" sz="3000" dirty="0"/>
+          </a:p>
+        </p:txBody>
+      </p:sp>
+      <p:sp>
+        <p:nvSpPr>
+          <p:cNvPr id="3" name="blok-kode"/>
+          <p:cNvSpPr/>
+          <p:nvPr/>
+        </p:nvSpPr>
+        <p:spPr>
+          <a:xfrm>
+            <a:off x="548640" y="1325880"/>
+            <a:ext cx="6656649" cy="3891153"/>
+          </a:xfrm>
+          <a:prstGeom prst="roundRect">
+            <a:avLst>
+              <a:gd name="adj" fmla="val 2350"/>
+            </a:avLst>
+          </a:prstGeom>
+          <a:solidFill>
+            <a:srgbClr val="10231A"/>
+          </a:solidFill>
+          <a:ln w="12700">
+            <a:solidFill>
+              <a:srgbClr val="10231A"/>
+            </a:solidFill>
+            <a:prstDash val="solid"/>
+          </a:ln>
+        </p:spPr>
+      </p:sp>
+      <p:sp>
+        <p:nvSpPr>
+          <p:cNvPr id="4" name="Text 2"/>
+          <p:cNvSpPr txBox="1"/>
+          <p:nvPr/>
+        </p:nvSpPr>
+        <p:spPr>
+          <a:xfrm>
+            <a:off x="777240" y="1399032"/>
+            <a:ext cx="6199449" cy="274320"/>
+          </a:xfrm>
+          <a:prstGeom prst="rect">
+            <a:avLst/>
+          </a:prstGeom>
+          <a:noFill/>
+          <a:ln/>
+        </p:spPr>
+        <p:txBody>
+          <a:bodyPr wrap="square" lIns="0" tIns="0" rIns="0" bIns="0" rtlCol="0" anchor="ctr"/>
           <a:lstStyle/>
           <a:p>
             <a:pPr indent="0" marL="0">
               <a:buNone/>
             </a:pPr>
             <a:r>
-              <a:rPr lang="en-US" sz="6000" b="1" dirty="0">
-                <a:solidFill>
-                  <a:schemeClr val="accent2"/>
-                </a:solidFill>
-              </a:rPr>
-              <a:t>03</a:t>
-            </a:r>
-            <a:endParaRPr lang="en-US" sz="6000" dirty="0"/>
-          </a:p>
-        </p:txBody>
-      </p:sp>
-      <p:sp>
-        <p:nvSpPr>
-          <p:cNvPr id="3" name="Text 0"/>
-          <p:cNvSpPr/>
-          <p:nvPr>
-            <p:ph idx="102" type="title" hasCustomPrompt="1"/>
-          </p:nvPr>
-        </p:nvSpPr>
-        <p:spPr>
-          <a:xfrm>
-            <a:off x="548640" y="2971800"/>
-            <a:ext cx="7315200" cy="1280160"/>
+              <a:rPr lang="en-US" sz="1100" dirty="0">
+                <a:solidFill>
+                  <a:srgbClr val="8FB8A3"/>
+                </a:solidFill>
+                <a:latin typeface="Consolas" pitchFamily="34" charset="0"/>
+                <a:ea typeface="Consolas" pitchFamily="34" charset="-122"/>
+                <a:cs typeface="Consolas" pitchFamily="34" charset="-120"/>
+              </a:rPr>
+              <a:t>contoh</a:t>
+            </a:r>
+            <a:endParaRPr lang="en-US" sz="1100" dirty="0"/>
+          </a:p>
+        </p:txBody>
+      </p:sp>
+      <p:sp>
+        <p:nvSpPr>
+          <p:cNvPr id="5" name="kode"/>
+          <p:cNvSpPr txBox="1"/>
+          <p:nvPr/>
+        </p:nvSpPr>
+        <p:spPr>
+          <a:xfrm>
+            <a:off x="777240" y="1783080"/>
+            <a:ext cx="6290889" cy="3324225"/>
           </a:xfrm>
           <a:prstGeom prst="rect">
             <a:avLst/>
@@ -5789,33 +4926,805 @@
           <a:bodyPr wrap="square" lIns="0" tIns="0" rIns="0" bIns="0" rtlCol="0" anchor="t"/>
           <a:lstStyle/>
           <a:p>
-            <a:pPr algn="l" indent="0" marL="0">
+            <a:pPr indent="0" marL="0">
+              <a:lnSpc>
+                <a:spcPct val="105000"/>
+              </a:lnSpc>
               <a:buNone/>
             </a:pPr>
             <a:r>
-              <a:rPr lang="en-US" sz="3800" b="1" dirty="0">
-                <a:solidFill>
-                  <a:schemeClr val="bg1"/>
-                </a:solidFill>
-              </a:rPr>
-              <a:t>Antrean dan Mutex</a:t>
-            </a:r>
-            <a:endParaRPr lang="en-US" sz="3800" dirty="0"/>
-          </a:p>
-        </p:txBody>
-      </p:sp>
-      <p:sp>
-        <p:nvSpPr>
-          <p:cNvPr id="4" name="Text 0"/>
-          <p:cNvSpPr/>
-          <p:nvPr>
-            <p:ph idx="103" type="body" hasCustomPrompt="1"/>
-          </p:nvPr>
-        </p:nvSpPr>
-        <p:spPr>
-          <a:xfrm>
-            <a:off x="548640" y="4297680"/>
-            <a:ext cx="7315200" cy="914400"/>
+              <a:rPr lang="en-US" sz="1500" i="1" dirty="0">
+                <a:solidFill>
+                  <a:srgbClr val="86B596"/>
+                </a:solidFill>
+                <a:latin typeface="Consolas" pitchFamily="34" charset="0"/>
+                <a:ea typeface="Consolas" pitchFamily="34" charset="-122"/>
+                <a:cs typeface="Consolas" pitchFamily="34" charset="-120"/>
+              </a:rPr>
+              <a:t>// Jeda biasa: 500 ms sejak dipanggil</a:t>
+            </a:r>
+            <a:endParaRPr lang="en-US" sz="1500" dirty="0"/>
+          </a:p>
+          <a:p>
+            <a:pPr indent="0" marL="0">
+              <a:lnSpc>
+                <a:spcPct val="105000"/>
+              </a:lnSpc>
+              <a:buNone/>
+            </a:pPr>
+            <a:r>
+              <a:rPr lang="en-US" sz="1500" dirty="0">
+                <a:solidFill>
+                  <a:srgbClr val="E8DC9A"/>
+                </a:solidFill>
+                <a:latin typeface="Consolas" pitchFamily="34" charset="0"/>
+                <a:ea typeface="Consolas" pitchFamily="34" charset="-122"/>
+                <a:cs typeface="Consolas" pitchFamily="34" charset="-120"/>
+              </a:rPr>
+              <a:t>vTaskDelay</a:t>
+            </a:r>
+            <a:r>
+              <a:rPr lang="en-US" sz="1500" dirty="0">
+                <a:solidFill>
+                  <a:srgbClr val="B8C9C0"/>
+                </a:solidFill>
+                <a:latin typeface="Consolas" pitchFamily="34" charset="0"/>
+                <a:ea typeface="Consolas" pitchFamily="34" charset="-122"/>
+                <a:cs typeface="Consolas" pitchFamily="34" charset="-120"/>
+              </a:rPr>
+              <a:t>(</a:t>
+            </a:r>
+            <a:r>
+              <a:rPr lang="en-US" sz="1500" dirty="0">
+                <a:solidFill>
+                  <a:srgbClr val="E8DC9A"/>
+                </a:solidFill>
+                <a:latin typeface="Consolas" pitchFamily="34" charset="0"/>
+                <a:ea typeface="Consolas" pitchFamily="34" charset="-122"/>
+                <a:cs typeface="Consolas" pitchFamily="34" charset="-120"/>
+              </a:rPr>
+              <a:t>pdMS_TO_TICKS</a:t>
+            </a:r>
+            <a:r>
+              <a:rPr lang="en-US" sz="1500" dirty="0">
+                <a:solidFill>
+                  <a:srgbClr val="B8C9C0"/>
+                </a:solidFill>
+                <a:latin typeface="Consolas" pitchFamily="34" charset="0"/>
+                <a:ea typeface="Consolas" pitchFamily="34" charset="-122"/>
+                <a:cs typeface="Consolas" pitchFamily="34" charset="-120"/>
+              </a:rPr>
+              <a:t>(</a:t>
+            </a:r>
+            <a:r>
+              <a:rPr lang="en-US" sz="1500" dirty="0">
+                <a:solidFill>
+                  <a:srgbClr val="B9DDB0"/>
+                </a:solidFill>
+                <a:latin typeface="Consolas" pitchFamily="34" charset="0"/>
+                <a:ea typeface="Consolas" pitchFamily="34" charset="-122"/>
+                <a:cs typeface="Consolas" pitchFamily="34" charset="-120"/>
+              </a:rPr>
+              <a:t>500</a:t>
+            </a:r>
+            <a:r>
+              <a:rPr lang="en-US" sz="1500" dirty="0">
+                <a:solidFill>
+                  <a:srgbClr val="B8C9C0"/>
+                </a:solidFill>
+                <a:latin typeface="Consolas" pitchFamily="34" charset="0"/>
+                <a:ea typeface="Consolas" pitchFamily="34" charset="-122"/>
+                <a:cs typeface="Consolas" pitchFamily="34" charset="-120"/>
+              </a:rPr>
+              <a:t>)</a:t>
+            </a:r>
+            <a:r>
+              <a:rPr lang="en-US" sz="1500" dirty="0">
+                <a:solidFill>
+                  <a:srgbClr val="B8C9C0"/>
+                </a:solidFill>
+                <a:latin typeface="Consolas" pitchFamily="34" charset="0"/>
+                <a:ea typeface="Consolas" pitchFamily="34" charset="-122"/>
+                <a:cs typeface="Consolas" pitchFamily="34" charset="-120"/>
+              </a:rPr>
+              <a:t>)</a:t>
+            </a:r>
+            <a:r>
+              <a:rPr lang="en-US" sz="1500" dirty="0">
+                <a:solidFill>
+                  <a:srgbClr val="B8C9C0"/>
+                </a:solidFill>
+                <a:latin typeface="Consolas" pitchFamily="34" charset="0"/>
+                <a:ea typeface="Consolas" pitchFamily="34" charset="-122"/>
+                <a:cs typeface="Consolas" pitchFamily="34" charset="-120"/>
+              </a:rPr>
+              <a:t>;</a:t>
+            </a:r>
+            <a:endParaRPr lang="en-US" sz="1500" dirty="0"/>
+          </a:p>
+          <a:p>
+            <a:pPr indent="0" marL="0">
+              <a:lnSpc>
+                <a:spcPct val="105000"/>
+              </a:lnSpc>
+              <a:buNone/>
+            </a:pPr>
+            <a:r>
+              <a:rPr lang="en-US" sz="1500" dirty="0">
+                <a:solidFill>
+                  <a:srgbClr val="D9E6DF"/>
+                </a:solidFill>
+                <a:latin typeface="Consolas" pitchFamily="34" charset="0"/>
+                <a:ea typeface="Consolas" pitchFamily="34" charset="-122"/>
+                <a:cs typeface="Consolas" pitchFamily="34" charset="-120"/>
+              </a:rPr>
+              <a:t> </a:t>
+            </a:r>
+            <a:endParaRPr lang="en-US" sz="1500" dirty="0"/>
+          </a:p>
+          <a:p>
+            <a:pPr indent="0" marL="0">
+              <a:lnSpc>
+                <a:spcPct val="105000"/>
+              </a:lnSpc>
+              <a:buNone/>
+            </a:pPr>
+            <a:r>
+              <a:rPr lang="en-US" sz="1500" i="1" dirty="0">
+                <a:solidFill>
+                  <a:srgbClr val="86B596"/>
+                </a:solidFill>
+                <a:latin typeface="Consolas" pitchFamily="34" charset="0"/>
+                <a:ea typeface="Consolas" pitchFamily="34" charset="-122"/>
+                <a:cs typeface="Consolas" pitchFamily="34" charset="-120"/>
+              </a:rPr>
+              <a:t>// Periode tetap: bangun tiap 500 ms</a:t>
+            </a:r>
+            <a:endParaRPr lang="en-US" sz="1500" dirty="0"/>
+          </a:p>
+          <a:p>
+            <a:pPr indent="0" marL="0">
+              <a:lnSpc>
+                <a:spcPct val="105000"/>
+              </a:lnSpc>
+              <a:buNone/>
+            </a:pPr>
+            <a:r>
+              <a:rPr lang="en-US" sz="1500" dirty="0">
+                <a:solidFill>
+                  <a:srgbClr val="5FD3BC"/>
+                </a:solidFill>
+                <a:latin typeface="Consolas" pitchFamily="34" charset="0"/>
+                <a:ea typeface="Consolas" pitchFamily="34" charset="-122"/>
+                <a:cs typeface="Consolas" pitchFamily="34" charset="-120"/>
+              </a:rPr>
+              <a:t>TickType_t</a:t>
+            </a:r>
+            <a:r>
+              <a:rPr lang="en-US" sz="1500" dirty="0">
+                <a:solidFill>
+                  <a:srgbClr val="D9E6DF"/>
+                </a:solidFill>
+                <a:latin typeface="Consolas" pitchFamily="34" charset="0"/>
+                <a:ea typeface="Consolas" pitchFamily="34" charset="-122"/>
+                <a:cs typeface="Consolas" pitchFamily="34" charset="-120"/>
+              </a:rPr>
+              <a:t> </a:t>
+            </a:r>
+            <a:r>
+              <a:rPr lang="en-US" sz="1500" dirty="0">
+                <a:solidFill>
+                  <a:srgbClr val="D9E6DF"/>
+                </a:solidFill>
+                <a:latin typeface="Consolas" pitchFamily="34" charset="0"/>
+                <a:ea typeface="Consolas" pitchFamily="34" charset="-122"/>
+                <a:cs typeface="Consolas" pitchFamily="34" charset="-120"/>
+              </a:rPr>
+              <a:t>bangun</a:t>
+            </a:r>
+            <a:r>
+              <a:rPr lang="en-US" sz="1500" dirty="0">
+                <a:solidFill>
+                  <a:srgbClr val="D9E6DF"/>
+                </a:solidFill>
+                <a:latin typeface="Consolas" pitchFamily="34" charset="0"/>
+                <a:ea typeface="Consolas" pitchFamily="34" charset="-122"/>
+                <a:cs typeface="Consolas" pitchFamily="34" charset="-120"/>
+              </a:rPr>
+              <a:t> </a:t>
+            </a:r>
+            <a:r>
+              <a:rPr lang="en-US" sz="1500" dirty="0">
+                <a:solidFill>
+                  <a:srgbClr val="B8C9C0"/>
+                </a:solidFill>
+                <a:latin typeface="Consolas" pitchFamily="34" charset="0"/>
+                <a:ea typeface="Consolas" pitchFamily="34" charset="-122"/>
+                <a:cs typeface="Consolas" pitchFamily="34" charset="-120"/>
+              </a:rPr>
+              <a:t>=</a:t>
+            </a:r>
+            <a:r>
+              <a:rPr lang="en-US" sz="1500" dirty="0">
+                <a:solidFill>
+                  <a:srgbClr val="D9E6DF"/>
+                </a:solidFill>
+                <a:latin typeface="Consolas" pitchFamily="34" charset="0"/>
+                <a:ea typeface="Consolas" pitchFamily="34" charset="-122"/>
+                <a:cs typeface="Consolas" pitchFamily="34" charset="-120"/>
+              </a:rPr>
+              <a:t> </a:t>
+            </a:r>
+            <a:r>
+              <a:rPr lang="en-US" sz="1500" dirty="0">
+                <a:solidFill>
+                  <a:srgbClr val="E8DC9A"/>
+                </a:solidFill>
+                <a:latin typeface="Consolas" pitchFamily="34" charset="0"/>
+                <a:ea typeface="Consolas" pitchFamily="34" charset="-122"/>
+                <a:cs typeface="Consolas" pitchFamily="34" charset="-120"/>
+              </a:rPr>
+              <a:t>xTaskGetTickCount</a:t>
+            </a:r>
+            <a:r>
+              <a:rPr lang="en-US" sz="1500" dirty="0">
+                <a:solidFill>
+                  <a:srgbClr val="B8C9C0"/>
+                </a:solidFill>
+                <a:latin typeface="Consolas" pitchFamily="34" charset="0"/>
+                <a:ea typeface="Consolas" pitchFamily="34" charset="-122"/>
+                <a:cs typeface="Consolas" pitchFamily="34" charset="-120"/>
+              </a:rPr>
+              <a:t>(</a:t>
+            </a:r>
+            <a:r>
+              <a:rPr lang="en-US" sz="1500" dirty="0">
+                <a:solidFill>
+                  <a:srgbClr val="B8C9C0"/>
+                </a:solidFill>
+                <a:latin typeface="Consolas" pitchFamily="34" charset="0"/>
+                <a:ea typeface="Consolas" pitchFamily="34" charset="-122"/>
+                <a:cs typeface="Consolas" pitchFamily="34" charset="-120"/>
+              </a:rPr>
+              <a:t>)</a:t>
+            </a:r>
+            <a:r>
+              <a:rPr lang="en-US" sz="1500" dirty="0">
+                <a:solidFill>
+                  <a:srgbClr val="B8C9C0"/>
+                </a:solidFill>
+                <a:latin typeface="Consolas" pitchFamily="34" charset="0"/>
+                <a:ea typeface="Consolas" pitchFamily="34" charset="-122"/>
+                <a:cs typeface="Consolas" pitchFamily="34" charset="-120"/>
+              </a:rPr>
+              <a:t>;</a:t>
+            </a:r>
+            <a:endParaRPr lang="en-US" sz="1500" dirty="0"/>
+          </a:p>
+          <a:p>
+            <a:pPr indent="0" marL="0">
+              <a:lnSpc>
+                <a:spcPct val="105000"/>
+              </a:lnSpc>
+              <a:buNone/>
+            </a:pPr>
+            <a:r>
+              <a:rPr lang="en-US" sz="1500" dirty="0">
+                <a:solidFill>
+                  <a:srgbClr val="D7A6F2"/>
+                </a:solidFill>
+                <a:latin typeface="Consolas" pitchFamily="34" charset="0"/>
+                <a:ea typeface="Consolas" pitchFamily="34" charset="-122"/>
+                <a:cs typeface="Consolas" pitchFamily="34" charset="-120"/>
+              </a:rPr>
+              <a:t>for</a:t>
+            </a:r>
+            <a:r>
+              <a:rPr lang="en-US" sz="1500" dirty="0">
+                <a:solidFill>
+                  <a:srgbClr val="D9E6DF"/>
+                </a:solidFill>
+                <a:latin typeface="Consolas" pitchFamily="34" charset="0"/>
+                <a:ea typeface="Consolas" pitchFamily="34" charset="-122"/>
+                <a:cs typeface="Consolas" pitchFamily="34" charset="-120"/>
+              </a:rPr>
+              <a:t> </a:t>
+            </a:r>
+            <a:r>
+              <a:rPr lang="en-US" sz="1500" dirty="0">
+                <a:solidFill>
+                  <a:srgbClr val="B8C9C0"/>
+                </a:solidFill>
+                <a:latin typeface="Consolas" pitchFamily="34" charset="0"/>
+                <a:ea typeface="Consolas" pitchFamily="34" charset="-122"/>
+                <a:cs typeface="Consolas" pitchFamily="34" charset="-120"/>
+              </a:rPr>
+              <a:t>(</a:t>
+            </a:r>
+            <a:r>
+              <a:rPr lang="en-US" sz="1500" dirty="0">
+                <a:solidFill>
+                  <a:srgbClr val="B8C9C0"/>
+                </a:solidFill>
+                <a:latin typeface="Consolas" pitchFamily="34" charset="0"/>
+                <a:ea typeface="Consolas" pitchFamily="34" charset="-122"/>
+                <a:cs typeface="Consolas" pitchFamily="34" charset="-120"/>
+              </a:rPr>
+              <a:t>;</a:t>
+            </a:r>
+            <a:r>
+              <a:rPr lang="en-US" sz="1500" dirty="0">
+                <a:solidFill>
+                  <a:srgbClr val="B8C9C0"/>
+                </a:solidFill>
+                <a:latin typeface="Consolas" pitchFamily="34" charset="0"/>
+                <a:ea typeface="Consolas" pitchFamily="34" charset="-122"/>
+                <a:cs typeface="Consolas" pitchFamily="34" charset="-120"/>
+              </a:rPr>
+              <a:t>;</a:t>
+            </a:r>
+            <a:r>
+              <a:rPr lang="en-US" sz="1500" dirty="0">
+                <a:solidFill>
+                  <a:srgbClr val="B8C9C0"/>
+                </a:solidFill>
+                <a:latin typeface="Consolas" pitchFamily="34" charset="0"/>
+                <a:ea typeface="Consolas" pitchFamily="34" charset="-122"/>
+                <a:cs typeface="Consolas" pitchFamily="34" charset="-120"/>
+              </a:rPr>
+              <a:t>)</a:t>
+            </a:r>
+            <a:r>
+              <a:rPr lang="en-US" sz="1500" dirty="0">
+                <a:solidFill>
+                  <a:srgbClr val="D9E6DF"/>
+                </a:solidFill>
+                <a:latin typeface="Consolas" pitchFamily="34" charset="0"/>
+                <a:ea typeface="Consolas" pitchFamily="34" charset="-122"/>
+                <a:cs typeface="Consolas" pitchFamily="34" charset="-120"/>
+              </a:rPr>
+              <a:t> </a:t>
+            </a:r>
+            <a:r>
+              <a:rPr lang="en-US" sz="1500" dirty="0">
+                <a:solidFill>
+                  <a:srgbClr val="B8C9C0"/>
+                </a:solidFill>
+                <a:latin typeface="Consolas" pitchFamily="34" charset="0"/>
+                <a:ea typeface="Consolas" pitchFamily="34" charset="-122"/>
+                <a:cs typeface="Consolas" pitchFamily="34" charset="-120"/>
+              </a:rPr>
+              <a:t>{</a:t>
+            </a:r>
+            <a:endParaRPr lang="en-US" sz="1500" dirty="0"/>
+          </a:p>
+          <a:p>
+            <a:pPr indent="0" marL="0">
+              <a:lnSpc>
+                <a:spcPct val="105000"/>
+              </a:lnSpc>
+              <a:buNone/>
+            </a:pPr>
+            <a:r>
+              <a:rPr lang="en-US" sz="1500" dirty="0">
+                <a:solidFill>
+                  <a:srgbClr val="D9E6DF"/>
+                </a:solidFill>
+                <a:latin typeface="Consolas" pitchFamily="34" charset="0"/>
+                <a:ea typeface="Consolas" pitchFamily="34" charset="-122"/>
+                <a:cs typeface="Consolas" pitchFamily="34" charset="-120"/>
+              </a:rPr>
+              <a:t>  </a:t>
+            </a:r>
+            <a:r>
+              <a:rPr lang="en-US" sz="1500" dirty="0">
+                <a:solidFill>
+                  <a:srgbClr val="E8DC9A"/>
+                </a:solidFill>
+                <a:latin typeface="Consolas" pitchFamily="34" charset="0"/>
+                <a:ea typeface="Consolas" pitchFamily="34" charset="-122"/>
+                <a:cs typeface="Consolas" pitchFamily="34" charset="-120"/>
+              </a:rPr>
+              <a:t>bacaSensor</a:t>
+            </a:r>
+            <a:r>
+              <a:rPr lang="en-US" sz="1500" dirty="0">
+                <a:solidFill>
+                  <a:srgbClr val="B8C9C0"/>
+                </a:solidFill>
+                <a:latin typeface="Consolas" pitchFamily="34" charset="0"/>
+                <a:ea typeface="Consolas" pitchFamily="34" charset="-122"/>
+                <a:cs typeface="Consolas" pitchFamily="34" charset="-120"/>
+              </a:rPr>
+              <a:t>(</a:t>
+            </a:r>
+            <a:r>
+              <a:rPr lang="en-US" sz="1500" dirty="0">
+                <a:solidFill>
+                  <a:srgbClr val="B8C9C0"/>
+                </a:solidFill>
+                <a:latin typeface="Consolas" pitchFamily="34" charset="0"/>
+                <a:ea typeface="Consolas" pitchFamily="34" charset="-122"/>
+                <a:cs typeface="Consolas" pitchFamily="34" charset="-120"/>
+              </a:rPr>
+              <a:t>)</a:t>
+            </a:r>
+            <a:r>
+              <a:rPr lang="en-US" sz="1500" dirty="0">
+                <a:solidFill>
+                  <a:srgbClr val="B8C9C0"/>
+                </a:solidFill>
+                <a:latin typeface="Consolas" pitchFamily="34" charset="0"/>
+                <a:ea typeface="Consolas" pitchFamily="34" charset="-122"/>
+                <a:cs typeface="Consolas" pitchFamily="34" charset="-120"/>
+              </a:rPr>
+              <a:t>;</a:t>
+            </a:r>
+            <a:endParaRPr lang="en-US" sz="1500" dirty="0"/>
+          </a:p>
+          <a:p>
+            <a:pPr indent="0" marL="0">
+              <a:lnSpc>
+                <a:spcPct val="105000"/>
+              </a:lnSpc>
+              <a:buNone/>
+            </a:pPr>
+            <a:r>
+              <a:rPr lang="en-US" sz="1500" dirty="0">
+                <a:solidFill>
+                  <a:srgbClr val="D9E6DF"/>
+                </a:solidFill>
+                <a:latin typeface="Consolas" pitchFamily="34" charset="0"/>
+                <a:ea typeface="Consolas" pitchFamily="34" charset="-122"/>
+                <a:cs typeface="Consolas" pitchFamily="34" charset="-120"/>
+              </a:rPr>
+              <a:t>  </a:t>
+            </a:r>
+            <a:r>
+              <a:rPr lang="en-US" sz="1500" dirty="0">
+                <a:solidFill>
+                  <a:srgbClr val="E8DC9A"/>
+                </a:solidFill>
+                <a:latin typeface="Consolas" pitchFamily="34" charset="0"/>
+                <a:ea typeface="Consolas" pitchFamily="34" charset="-122"/>
+                <a:cs typeface="Consolas" pitchFamily="34" charset="-120"/>
+              </a:rPr>
+              <a:t>xTaskDelayUntil</a:t>
+            </a:r>
+            <a:r>
+              <a:rPr lang="en-US" sz="1500" dirty="0">
+                <a:solidFill>
+                  <a:srgbClr val="B8C9C0"/>
+                </a:solidFill>
+                <a:latin typeface="Consolas" pitchFamily="34" charset="0"/>
+                <a:ea typeface="Consolas" pitchFamily="34" charset="-122"/>
+                <a:cs typeface="Consolas" pitchFamily="34" charset="-120"/>
+              </a:rPr>
+              <a:t>(</a:t>
+            </a:r>
+            <a:r>
+              <a:rPr lang="en-US" sz="1500" dirty="0">
+                <a:solidFill>
+                  <a:srgbClr val="B8C9C0"/>
+                </a:solidFill>
+                <a:latin typeface="Consolas" pitchFamily="34" charset="0"/>
+                <a:ea typeface="Consolas" pitchFamily="34" charset="-122"/>
+                <a:cs typeface="Consolas" pitchFamily="34" charset="-120"/>
+              </a:rPr>
+              <a:t>&amp;</a:t>
+            </a:r>
+            <a:r>
+              <a:rPr lang="en-US" sz="1500" dirty="0">
+                <a:solidFill>
+                  <a:srgbClr val="D9E6DF"/>
+                </a:solidFill>
+                <a:latin typeface="Consolas" pitchFamily="34" charset="0"/>
+                <a:ea typeface="Consolas" pitchFamily="34" charset="-122"/>
+                <a:cs typeface="Consolas" pitchFamily="34" charset="-120"/>
+              </a:rPr>
+              <a:t>bangun</a:t>
+            </a:r>
+            <a:r>
+              <a:rPr lang="en-US" sz="1500" dirty="0">
+                <a:solidFill>
+                  <a:srgbClr val="B8C9C0"/>
+                </a:solidFill>
+                <a:latin typeface="Consolas" pitchFamily="34" charset="0"/>
+                <a:ea typeface="Consolas" pitchFamily="34" charset="-122"/>
+                <a:cs typeface="Consolas" pitchFamily="34" charset="-120"/>
+              </a:rPr>
+              <a:t>,</a:t>
+            </a:r>
+            <a:r>
+              <a:rPr lang="en-US" sz="1500" dirty="0">
+                <a:solidFill>
+                  <a:srgbClr val="D9E6DF"/>
+                </a:solidFill>
+                <a:latin typeface="Consolas" pitchFamily="34" charset="0"/>
+                <a:ea typeface="Consolas" pitchFamily="34" charset="-122"/>
+                <a:cs typeface="Consolas" pitchFamily="34" charset="-120"/>
+              </a:rPr>
+              <a:t> </a:t>
+            </a:r>
+            <a:r>
+              <a:rPr lang="en-US" sz="1500" dirty="0">
+                <a:solidFill>
+                  <a:srgbClr val="E8DC9A"/>
+                </a:solidFill>
+                <a:latin typeface="Consolas" pitchFamily="34" charset="0"/>
+                <a:ea typeface="Consolas" pitchFamily="34" charset="-122"/>
+                <a:cs typeface="Consolas" pitchFamily="34" charset="-120"/>
+              </a:rPr>
+              <a:t>pdMS_TO_TICKS</a:t>
+            </a:r>
+            <a:r>
+              <a:rPr lang="en-US" sz="1500" dirty="0">
+                <a:solidFill>
+                  <a:srgbClr val="B8C9C0"/>
+                </a:solidFill>
+                <a:latin typeface="Consolas" pitchFamily="34" charset="0"/>
+                <a:ea typeface="Consolas" pitchFamily="34" charset="-122"/>
+                <a:cs typeface="Consolas" pitchFamily="34" charset="-120"/>
+              </a:rPr>
+              <a:t>(</a:t>
+            </a:r>
+            <a:r>
+              <a:rPr lang="en-US" sz="1500" dirty="0">
+                <a:solidFill>
+                  <a:srgbClr val="B9DDB0"/>
+                </a:solidFill>
+                <a:latin typeface="Consolas" pitchFamily="34" charset="0"/>
+                <a:ea typeface="Consolas" pitchFamily="34" charset="-122"/>
+                <a:cs typeface="Consolas" pitchFamily="34" charset="-120"/>
+              </a:rPr>
+              <a:t>500</a:t>
+            </a:r>
+            <a:r>
+              <a:rPr lang="en-US" sz="1500" dirty="0">
+                <a:solidFill>
+                  <a:srgbClr val="B8C9C0"/>
+                </a:solidFill>
+                <a:latin typeface="Consolas" pitchFamily="34" charset="0"/>
+                <a:ea typeface="Consolas" pitchFamily="34" charset="-122"/>
+                <a:cs typeface="Consolas" pitchFamily="34" charset="-120"/>
+              </a:rPr>
+              <a:t>)</a:t>
+            </a:r>
+            <a:r>
+              <a:rPr lang="en-US" sz="1500" dirty="0">
+                <a:solidFill>
+                  <a:srgbClr val="B8C9C0"/>
+                </a:solidFill>
+                <a:latin typeface="Consolas" pitchFamily="34" charset="0"/>
+                <a:ea typeface="Consolas" pitchFamily="34" charset="-122"/>
+                <a:cs typeface="Consolas" pitchFamily="34" charset="-120"/>
+              </a:rPr>
+              <a:t>)</a:t>
+            </a:r>
+            <a:r>
+              <a:rPr lang="en-US" sz="1500" dirty="0">
+                <a:solidFill>
+                  <a:srgbClr val="B8C9C0"/>
+                </a:solidFill>
+                <a:latin typeface="Consolas" pitchFamily="34" charset="0"/>
+                <a:ea typeface="Consolas" pitchFamily="34" charset="-122"/>
+                <a:cs typeface="Consolas" pitchFamily="34" charset="-120"/>
+              </a:rPr>
+              <a:t>;</a:t>
+            </a:r>
+            <a:endParaRPr lang="en-US" sz="1500" dirty="0"/>
+          </a:p>
+          <a:p>
+            <a:pPr indent="0" marL="0">
+              <a:lnSpc>
+                <a:spcPct val="105000"/>
+              </a:lnSpc>
+              <a:buNone/>
+            </a:pPr>
+            <a:r>
+              <a:rPr lang="en-US" sz="1500" dirty="0">
+                <a:solidFill>
+                  <a:srgbClr val="B8C9C0"/>
+                </a:solidFill>
+                <a:latin typeface="Consolas" pitchFamily="34" charset="0"/>
+                <a:ea typeface="Consolas" pitchFamily="34" charset="-122"/>
+                <a:cs typeface="Consolas" pitchFamily="34" charset="-120"/>
+              </a:rPr>
+              <a:t>}</a:t>
+            </a:r>
+            <a:endParaRPr lang="en-US" sz="1500" dirty="0"/>
+          </a:p>
+          <a:p>
+            <a:pPr indent="0" marL="0">
+              <a:lnSpc>
+                <a:spcPct val="105000"/>
+              </a:lnSpc>
+              <a:buNone/>
+            </a:pPr>
+            <a:r>
+              <a:rPr lang="en-US" sz="1500" dirty="0">
+                <a:solidFill>
+                  <a:srgbClr val="D9E6DF"/>
+                </a:solidFill>
+                <a:latin typeface="Consolas" pitchFamily="34" charset="0"/>
+                <a:ea typeface="Consolas" pitchFamily="34" charset="-122"/>
+                <a:cs typeface="Consolas" pitchFamily="34" charset="-120"/>
+              </a:rPr>
+              <a:t> </a:t>
+            </a:r>
+            <a:endParaRPr lang="en-US" sz="1500" dirty="0"/>
+          </a:p>
+          <a:p>
+            <a:pPr indent="0" marL="0">
+              <a:lnSpc>
+                <a:spcPct val="105000"/>
+              </a:lnSpc>
+              <a:buNone/>
+            </a:pPr>
+            <a:r>
+              <a:rPr lang="en-US" sz="1500" i="1" dirty="0">
+                <a:solidFill>
+                  <a:srgbClr val="86B596"/>
+                </a:solidFill>
+                <a:latin typeface="Consolas" pitchFamily="34" charset="0"/>
+                <a:ea typeface="Consolas" pitchFamily="34" charset="-122"/>
+                <a:cs typeface="Consolas" pitchFamily="34" charset="-120"/>
+              </a:rPr>
+              <a:t>// Sisa stack paling sedikit (byte)</a:t>
+            </a:r>
+            <a:endParaRPr lang="en-US" sz="1500" dirty="0"/>
+          </a:p>
+          <a:p>
+            <a:pPr indent="0" marL="0">
+              <a:lnSpc>
+                <a:spcPct val="105000"/>
+              </a:lnSpc>
+              <a:buNone/>
+            </a:pPr>
+            <a:r>
+              <a:rPr lang="en-US" sz="1500" dirty="0">
+                <a:solidFill>
+                  <a:srgbClr val="5FD3BC"/>
+                </a:solidFill>
+                <a:latin typeface="Consolas" pitchFamily="34" charset="0"/>
+                <a:ea typeface="Consolas" pitchFamily="34" charset="-122"/>
+                <a:cs typeface="Consolas" pitchFamily="34" charset="-120"/>
+              </a:rPr>
+              <a:t>UBaseType_t</a:t>
+            </a:r>
+            <a:r>
+              <a:rPr lang="en-US" sz="1500" dirty="0">
+                <a:solidFill>
+                  <a:srgbClr val="D9E6DF"/>
+                </a:solidFill>
+                <a:latin typeface="Consolas" pitchFamily="34" charset="0"/>
+                <a:ea typeface="Consolas" pitchFamily="34" charset="-122"/>
+                <a:cs typeface="Consolas" pitchFamily="34" charset="-120"/>
+              </a:rPr>
+              <a:t> </a:t>
+            </a:r>
+            <a:r>
+              <a:rPr lang="en-US" sz="1500" dirty="0">
+                <a:solidFill>
+                  <a:srgbClr val="D9E6DF"/>
+                </a:solidFill>
+                <a:latin typeface="Consolas" pitchFamily="34" charset="0"/>
+                <a:ea typeface="Consolas" pitchFamily="34" charset="-122"/>
+                <a:cs typeface="Consolas" pitchFamily="34" charset="-120"/>
+              </a:rPr>
+              <a:t>sisa</a:t>
+            </a:r>
+            <a:r>
+              <a:rPr lang="en-US" sz="1500" dirty="0">
+                <a:solidFill>
+                  <a:srgbClr val="D9E6DF"/>
+                </a:solidFill>
+                <a:latin typeface="Consolas" pitchFamily="34" charset="0"/>
+                <a:ea typeface="Consolas" pitchFamily="34" charset="-122"/>
+                <a:cs typeface="Consolas" pitchFamily="34" charset="-120"/>
+              </a:rPr>
+              <a:t> </a:t>
+            </a:r>
+            <a:r>
+              <a:rPr lang="en-US" sz="1500" dirty="0">
+                <a:solidFill>
+                  <a:srgbClr val="B8C9C0"/>
+                </a:solidFill>
+                <a:latin typeface="Consolas" pitchFamily="34" charset="0"/>
+                <a:ea typeface="Consolas" pitchFamily="34" charset="-122"/>
+                <a:cs typeface="Consolas" pitchFamily="34" charset="-120"/>
+              </a:rPr>
+              <a:t>=</a:t>
+            </a:r>
+            <a:endParaRPr lang="en-US" sz="1500" dirty="0"/>
+          </a:p>
+          <a:p>
+            <a:pPr indent="0" marL="0">
+              <a:lnSpc>
+                <a:spcPct val="105000"/>
+              </a:lnSpc>
+              <a:buNone/>
+            </a:pPr>
+            <a:r>
+              <a:rPr lang="en-US" sz="1500" dirty="0">
+                <a:solidFill>
+                  <a:srgbClr val="D9E6DF"/>
+                </a:solidFill>
+                <a:latin typeface="Consolas" pitchFamily="34" charset="0"/>
+                <a:ea typeface="Consolas" pitchFamily="34" charset="-122"/>
+                <a:cs typeface="Consolas" pitchFamily="34" charset="-120"/>
+              </a:rPr>
+              <a:t>    </a:t>
+            </a:r>
+            <a:r>
+              <a:rPr lang="en-US" sz="1500" dirty="0">
+                <a:solidFill>
+                  <a:srgbClr val="E8DC9A"/>
+                </a:solidFill>
+                <a:latin typeface="Consolas" pitchFamily="34" charset="0"/>
+                <a:ea typeface="Consolas" pitchFamily="34" charset="-122"/>
+                <a:cs typeface="Consolas" pitchFamily="34" charset="-120"/>
+              </a:rPr>
+              <a:t>uxTaskGetStackHighWaterMark</a:t>
+            </a:r>
+            <a:r>
+              <a:rPr lang="en-US" sz="1500" dirty="0">
+                <a:solidFill>
+                  <a:srgbClr val="B8C9C0"/>
+                </a:solidFill>
+                <a:latin typeface="Consolas" pitchFamily="34" charset="0"/>
+                <a:ea typeface="Consolas" pitchFamily="34" charset="-122"/>
+                <a:cs typeface="Consolas" pitchFamily="34" charset="-120"/>
+              </a:rPr>
+              <a:t>(</a:t>
+            </a:r>
+            <a:r>
+              <a:rPr lang="en-US" sz="1500" dirty="0">
+                <a:solidFill>
+                  <a:srgbClr val="7CC8FF"/>
+                </a:solidFill>
+                <a:latin typeface="Consolas" pitchFamily="34" charset="0"/>
+                <a:ea typeface="Consolas" pitchFamily="34" charset="-122"/>
+                <a:cs typeface="Consolas" pitchFamily="34" charset="-120"/>
+              </a:rPr>
+              <a:t>NULL</a:t>
+            </a:r>
+            <a:r>
+              <a:rPr lang="en-US" sz="1500" dirty="0">
+                <a:solidFill>
+                  <a:srgbClr val="B8C9C0"/>
+                </a:solidFill>
+                <a:latin typeface="Consolas" pitchFamily="34" charset="0"/>
+                <a:ea typeface="Consolas" pitchFamily="34" charset="-122"/>
+                <a:cs typeface="Consolas" pitchFamily="34" charset="-120"/>
+              </a:rPr>
+              <a:t>)</a:t>
+            </a:r>
+            <a:r>
+              <a:rPr lang="en-US" sz="1500" dirty="0">
+                <a:solidFill>
+                  <a:srgbClr val="B8C9C0"/>
+                </a:solidFill>
+                <a:latin typeface="Consolas" pitchFamily="34" charset="0"/>
+                <a:ea typeface="Consolas" pitchFamily="34" charset="-122"/>
+                <a:cs typeface="Consolas" pitchFamily="34" charset="-120"/>
+              </a:rPr>
+              <a:t>;</a:t>
+            </a:r>
+            <a:endParaRPr lang="en-US" sz="1500" dirty="0"/>
+          </a:p>
+        </p:txBody>
+      </p:sp>
+      <p:sp>
+        <p:nvSpPr>
+          <p:cNvPr id="6" name="daftar-poin"/>
+          <p:cNvSpPr txBox="1"/>
+          <p:nvPr/>
+        </p:nvSpPr>
+        <p:spPr>
+          <a:xfrm>
+            <a:off x="7571049" y="1325880"/>
+            <a:ext cx="4072006" cy="4846320"/>
           </a:xfrm>
           <a:prstGeom prst="rect">
             <a:avLst/>
@@ -5824,21 +5733,203 @@
           <a:ln/>
         </p:spPr>
         <p:txBody>
-          <a:bodyPr wrap="square" lIns="0" tIns="0" rIns="0" bIns="0" rtlCol="0" anchor="t"/>
+          <a:bodyPr wrap="square" lIns="25400" tIns="25400" rIns="50800" bIns="25400" rtlCol="0" anchor="t"/>
           <a:lstStyle/>
           <a:p>
-            <a:pPr indent="0" marL="0">
-              <a:buNone/>
+            <a:pPr marL="279400" indent="-279400">
+              <a:spcAft>
+                <a:spcPts val="1000"/>
+              </a:spcAft>
+              <a:buSzPct val="100000"/>
+              <a:buChar char="•"/>
             </a:pPr>
             <a:r>
-              <a:rPr lang="en-US" sz="1800" dirty="0">
-                <a:solidFill>
-                  <a:srgbClr val="CFE6DA"/>
-                </a:solidFill>
-              </a:rPr>
-              <a:t>Berbagi data dan sumber daya dengan aman</a:t>
-            </a:r>
-            <a:endParaRPr lang="en-US" sz="1800" dirty="0"/>
+              <a:rPr lang="en-US" sz="1700" dirty="0">
+                <a:solidFill>
+                  <a:srgbClr val="A35F14"/>
+                </a:solidFill>
+                <a:latin typeface="Consolas" pitchFamily="34" charset="0"/>
+                <a:ea typeface="Consolas" pitchFamily="34" charset="-122"/>
+                <a:cs typeface="Consolas" pitchFamily="34" charset="-120"/>
+              </a:rPr>
+              <a:t>delay()</a:t>
+            </a:r>
+            <a:r>
+              <a:rPr lang="en-US" sz="1700" dirty="0">
+                <a:solidFill>
+                  <a:schemeClr val="tx1"/>
+                </a:solidFill>
+              </a:rPr>
+              <a:t> di ESP32 = </a:t>
+            </a:r>
+            <a:r>
+              <a:rPr lang="en-US" sz="1700" dirty="0">
+                <a:solidFill>
+                  <a:srgbClr val="A35F14"/>
+                </a:solidFill>
+                <a:latin typeface="Consolas" pitchFamily="34" charset="0"/>
+                <a:ea typeface="Consolas" pitchFamily="34" charset="-122"/>
+                <a:cs typeface="Consolas" pitchFamily="34" charset="-120"/>
+              </a:rPr>
+              <a:t>vTaskDelay()</a:t>
+            </a:r>
+            <a:endParaRPr lang="en-US" sz="1700" dirty="0"/>
+          </a:p>
+          <a:p>
+            <a:pPr marL="279400" indent="-279400">
+              <a:spcAft>
+                <a:spcPts val="1000"/>
+              </a:spcAft>
+              <a:buSzPct val="100000"/>
+              <a:buChar char="•"/>
+            </a:pPr>
+            <a:r>
+              <a:rPr lang="en-US" sz="1700" dirty="0">
+                <a:solidFill>
+                  <a:schemeClr val="tx1"/>
+                </a:solidFill>
+              </a:rPr>
+              <a:t>Busy-wait </a:t>
+            </a:r>
+            <a:r>
+              <a:rPr lang="en-US" sz="1700" dirty="0">
+                <a:solidFill>
+                  <a:srgbClr val="A35F14"/>
+                </a:solidFill>
+                <a:latin typeface="Consolas" pitchFamily="34" charset="0"/>
+                <a:ea typeface="Consolas" pitchFamily="34" charset="-122"/>
+                <a:cs typeface="Consolas" pitchFamily="34" charset="-120"/>
+              </a:rPr>
+              <a:t>while (millis() ...)</a:t>
+            </a:r>
+            <a:r>
+              <a:rPr lang="en-US" sz="1700" dirty="0">
+                <a:solidFill>
+                  <a:schemeClr val="tx1"/>
+                </a:solidFill>
+              </a:rPr>
+              <a:t> memonopoli CPU → hindari</a:t>
+            </a:r>
+            <a:endParaRPr lang="en-US" sz="1700" dirty="0"/>
+          </a:p>
+          <a:p>
+            <a:pPr marL="279400" indent="-279400">
+              <a:spcAft>
+                <a:spcPts val="1000"/>
+              </a:spcAft>
+              <a:buSzPct val="100000"/>
+              <a:buChar char="•"/>
+            </a:pPr>
+            <a:r>
+              <a:rPr lang="en-US" sz="1700" dirty="0">
+                <a:solidFill>
+                  <a:srgbClr val="A35F14"/>
+                </a:solidFill>
+                <a:latin typeface="Consolas" pitchFamily="34" charset="0"/>
+                <a:ea typeface="Consolas" pitchFamily="34" charset="-122"/>
+                <a:cs typeface="Consolas" pitchFamily="34" charset="-120"/>
+              </a:rPr>
+              <a:t>xTaskDelayUntil()</a:t>
+            </a:r>
+            <a:r>
+              <a:rPr lang="en-US" sz="1700" dirty="0">
+                <a:solidFill>
+                  <a:schemeClr val="tx1"/>
+                </a:solidFill>
+              </a:rPr>
+              <a:t>: periode tidak bergeser</a:t>
+            </a:r>
+            <a:endParaRPr lang="en-US" sz="1700" dirty="0"/>
+          </a:p>
+          <a:p>
+            <a:pPr marL="279400" indent="-279400">
+              <a:spcAft>
+                <a:spcPts val="1000"/>
+              </a:spcAft>
+              <a:buSzPct val="100000"/>
+              <a:buChar char="•"/>
+            </a:pPr>
+            <a:r>
+              <a:rPr lang="en-US" sz="1700" dirty="0">
+                <a:solidFill>
+                  <a:schemeClr val="tx1"/>
+                </a:solidFill>
+              </a:rPr>
+              <a:t>Satu panggilan </a:t>
+            </a:r>
+            <a:r>
+              <a:rPr lang="en-US" sz="1700" dirty="0">
+                <a:solidFill>
+                  <a:srgbClr val="A35F14"/>
+                </a:solidFill>
+                <a:latin typeface="Consolas" pitchFamily="34" charset="0"/>
+                <a:ea typeface="Consolas" pitchFamily="34" charset="-122"/>
+                <a:cs typeface="Consolas" pitchFamily="34" charset="-120"/>
+              </a:rPr>
+              <a:t>Serial.printf()</a:t>
+            </a:r>
+            <a:r>
+              <a:rPr lang="en-US" sz="1700" dirty="0">
+                <a:solidFill>
+                  <a:schemeClr val="tx1"/>
+                </a:solidFill>
+              </a:rPr>
+              <a:t> saja bisa memakai ±900 byte </a:t>
+            </a:r>
+            <a:r>
+              <a:rPr lang="en-US" sz="1700" i="1" dirty="0">
+                <a:solidFill>
+                  <a:schemeClr val="tx1"/>
+                </a:solidFill>
+              </a:rPr>
+              <a:t>stack</a:t>
+            </a:r>
+            <a:endParaRPr lang="en-US" sz="1700" dirty="0"/>
+          </a:p>
+        </p:txBody>
+      </p:sp>
+      <p:sp>
+        <p:nvSpPr>
+          <p:cNvPr id="25" name="Slide Number Placeholder 0"/>
+          <p:cNvSpPr>
+            <a:spLocks noGrp="1"/>
+          </p:cNvSpPr>
+          <p:nvPr>
+            <p:ph type="sldNum" sz="quarter" idx="4294967295"/>
+          </p:nvPr>
+        </p:nvSpPr>
+        <p:spPr>
+          <a:xfrm>
+            <a:off x="11094415" y="6400800"/>
+            <a:ext cx="548640" cy="274320"/>
+          </a:xfrm>
+          <a:prstGeom prst="rect">
+            <a:avLst/>
+          </a:prstGeom>
+          <a:extLst>
+            <a:ext uri="{C572A759-6A51-4108-AA02-DFA0A04FC94B}">
+              <ma14:wrappingTextBoxFlag xmlns:ma14="http://schemas.microsoft.com/office/mac/drawingml/2011/main" val="0"/>
+            </a:ext>
+          </a:extLst>
+        </p:spPr>
+        <p:txBody>
+          <a:bodyPr/>
+          <a:lstStyle>
+            <a:lvl1pPr>
+              <a:defRPr sz="1000">
+                <a:solidFill>
+                  <a:srgbClr val="5F6F67"/>
+                </a:solidFill>
+              </a:defRPr>
+            </a:lvl1pPr>
+          </a:lstStyle>
+          <a:p>
+            <a:pPr algn="r"/>
+            <a:fld id="{F7021451-1387-4CA6-816F-3879F97B5CBC}" type="slidenum">
+              <a:rPr b="0" lang="en-US"/>
+              <a:t>14</a:t>
+            </a:fld>
+            <a:endParaRPr lang="en-US"/>
           </a:p>
         </p:txBody>
       </p:sp>
@@ -5872,13 +5963,13 @@
           <p:cNvPr id="2" name="Text 0"/>
           <p:cNvSpPr/>
           <p:nvPr>
-            <p:ph idx="100" type="title" hasCustomPrompt="1"/>
+            <p:ph idx="101" type="body" hasCustomPrompt="1"/>
           </p:nvPr>
         </p:nvSpPr>
         <p:spPr>
           <a:xfrm>
-            <a:off x="548640" y="320040"/>
-            <a:ext cx="11094415" cy="777240"/>
+            <a:off x="548640" y="1828800"/>
+            <a:ext cx="2743200" cy="1097280"/>
           </a:xfrm>
           <a:prstGeom prst="rect">
             <a:avLst/>
@@ -5887,90 +5978,97 @@
           <a:ln/>
         </p:spPr>
         <p:txBody>
-          <a:bodyPr wrap="square" lIns="0" tIns="0" rIns="0" bIns="0" rtlCol="0" anchor="ctr"/>
+          <a:bodyPr wrap="square" lIns="0" tIns="0" rIns="0" bIns="0" rtlCol="0"/>
+          <a:lstStyle/>
+          <a:p>
+            <a:pPr indent="0" marL="0">
+              <a:buNone/>
+            </a:pPr>
+            <a:r>
+              <a:rPr lang="en-US" sz="6000" b="1" dirty="0">
+                <a:solidFill>
+                  <a:schemeClr val="accent2"/>
+                </a:solidFill>
+              </a:rPr>
+              <a:t>03</a:t>
+            </a:r>
+            <a:endParaRPr lang="en-US" sz="6000" dirty="0"/>
+          </a:p>
+        </p:txBody>
+      </p:sp>
+      <p:sp>
+        <p:nvSpPr>
+          <p:cNvPr id="3" name="Text 0"/>
+          <p:cNvSpPr/>
+          <p:nvPr>
+            <p:ph idx="102" type="title" hasCustomPrompt="1"/>
+          </p:nvPr>
+        </p:nvSpPr>
+        <p:spPr>
+          <a:xfrm>
+            <a:off x="548640" y="2971800"/>
+            <a:ext cx="7315200" cy="1280160"/>
+          </a:xfrm>
+          <a:prstGeom prst="rect">
+            <a:avLst/>
+          </a:prstGeom>
+          <a:noFill/>
+          <a:ln/>
+        </p:spPr>
+        <p:txBody>
+          <a:bodyPr wrap="square" lIns="0" tIns="0" rIns="0" bIns="0" rtlCol="0" anchor="t"/>
           <a:lstStyle/>
           <a:p>
             <a:pPr algn="l" indent="0" marL="0">
               <a:buNone/>
             </a:pPr>
             <a:r>
-              <a:rPr lang="en-US" sz="3000" b="1" dirty="0">
-                <a:solidFill>
-                  <a:schemeClr val="tx2"/>
-                </a:solidFill>
-              </a:rPr>
-              <a:t>Antrean (Queue): Produsen–Konsumen</a:t>
-            </a:r>
-            <a:endParaRPr lang="en-US" sz="3000" dirty="0"/>
-          </a:p>
-        </p:txBody>
-      </p:sp>
-      <p:pic>
-        <p:nvPicPr>
-          <p:cNvPr id="3" name="gambar" descr="/home/claude/work/slides/img/p12/p12-queue-produsen-konsumen.png">    </p:cNvPr>
-          <p:cNvPicPr>
-            <a:picLocks noChangeAspect="1"/>
-          </p:cNvPicPr>
-          <p:nvPr/>
-        </p:nvPicPr>
-        <p:blipFill>
-          <a:blip r:embed="rId1"/>
-          <a:stretch>
-            <a:fillRect/>
-          </a:stretch>
-        </p:blipFill>
-        <p:spPr>
-          <a:xfrm>
-            <a:off x="548640" y="1376467"/>
-            <a:ext cx="11094415" cy="4699427"/>
-          </a:xfrm>
-          <a:prstGeom prst="rect">
-            <a:avLst/>
-          </a:prstGeom>
-        </p:spPr>
-      </p:pic>
-      <p:sp>
-        <p:nvSpPr>
-          <p:cNvPr id="25" name="Slide Number Placeholder 0"/>
-          <p:cNvSpPr>
-            <a:spLocks noGrp="1"/>
-          </p:cNvSpPr>
+              <a:rPr lang="en-US" sz="3800" b="1" dirty="0">
+                <a:solidFill>
+                  <a:schemeClr val="bg1"/>
+                </a:solidFill>
+              </a:rPr>
+              <a:t>Antrean dan Mutex</a:t>
+            </a:r>
+            <a:endParaRPr lang="en-US" sz="3800" dirty="0"/>
+          </a:p>
+        </p:txBody>
+      </p:sp>
+      <p:sp>
+        <p:nvSpPr>
+          <p:cNvPr id="4" name="Text 0"/>
+          <p:cNvSpPr/>
           <p:nvPr>
-            <p:ph type="sldNum" sz="quarter" idx="4294967295"/>
+            <p:ph idx="103" type="body" hasCustomPrompt="1"/>
           </p:nvPr>
         </p:nvSpPr>
         <p:spPr>
           <a:xfrm>
-            <a:off x="11094415" y="6400800"/>
-            <a:ext cx="548640" cy="274320"/>
-          </a:xfrm>
-          <a:prstGeom prst="rect">
-            <a:avLst/>
-          </a:prstGeom>
-          <a:extLst>
-            <a:ext uri="{C572A759-6A51-4108-AA02-DFA0A04FC94B}">
-              <ma14:wrappingTextBoxFlag xmlns:ma14="http://schemas.microsoft.com/office/mac/drawingml/2011/main" val="0"/>
-            </a:ext>
-          </a:extLst>
-        </p:spPr>
-        <p:txBody>
-          <a:bodyPr/>
-          <a:lstStyle>
-            <a:lvl1pPr>
-              <a:defRPr sz="1000">
-                <a:solidFill>
-                  <a:srgbClr val="5F6F67"/>
-                </a:solidFill>
-              </a:defRPr>
-            </a:lvl1pPr>
-          </a:lstStyle>
-          <a:p>
-            <a:pPr algn="r"/>
-            <a:fld id="{F7021451-1387-4CA6-816F-3879F97B5CBC}" type="slidenum">
-              <a:rPr b="0" lang="en-US"/>
-              <a:t>15</a:t>
-            </a:fld>
-            <a:endParaRPr lang="en-US"/>
+            <a:off x="548640" y="4297680"/>
+            <a:ext cx="7315200" cy="914400"/>
+          </a:xfrm>
+          <a:prstGeom prst="rect">
+            <a:avLst/>
+          </a:prstGeom>
+          <a:noFill/>
+          <a:ln/>
+        </p:spPr>
+        <p:txBody>
+          <a:bodyPr wrap="square" lIns="0" tIns="0" rIns="0" bIns="0" rtlCol="0" anchor="t"/>
+          <a:lstStyle/>
+          <a:p>
+            <a:pPr indent="0" marL="0">
+              <a:buNone/>
+            </a:pPr>
+            <a:r>
+              <a:rPr lang="en-US" sz="1800" dirty="0">
+                <a:solidFill>
+                  <a:srgbClr val="CFE6DA"/>
+                </a:solidFill>
+              </a:rPr>
+              <a:t>Berbagi data dan sumber daya dengan aman</a:t>
+            </a:r>
+            <a:endParaRPr lang="en-US" sz="1800" dirty="0"/>
           </a:p>
         </p:txBody>
       </p:sp>
@@ -6031,7 +6129,7 @@
                   <a:schemeClr val="tx2"/>
                 </a:solidFill>
               </a:rPr>
-              <a:t>Race Condition</a:t>
+              <a:t>Antrean (Queue): Produsen–Konsumen</a:t>
             </a:r>
             <a:endParaRPr lang="en-US" sz="3000" dirty="0"/>
           </a:p>
@@ -6039,7 +6137,7 @@
       </p:sp>
       <p:pic>
         <p:nvPicPr>
-          <p:cNvPr id="3" name="gambar" descr="/home/claude/work/slides/img/p12/p12-race-condition.png">    </p:cNvPr>
+          <p:cNvPr id="3" name="gambar" descr="/home/claude/work/slides/img/p12/p12-queue-produsen-konsumen.png">    </p:cNvPr>
           <p:cNvPicPr>
             <a:picLocks noChangeAspect="1"/>
           </p:cNvPicPr>
@@ -6053,8 +6151,8 @@
         </p:blipFill>
         <p:spPr>
           <a:xfrm>
-            <a:off x="727771" y="1280160"/>
-            <a:ext cx="10736154" cy="4892040"/>
+            <a:off x="548640" y="1376467"/>
+            <a:ext cx="11094415" cy="4699427"/>
           </a:xfrm>
           <a:prstGeom prst="rect">
             <a:avLst/>
@@ -6163,7 +6261,7 @@
                   <a:schemeClr val="tx2"/>
                 </a:solidFill>
               </a:rPr>
-              <a:t>Mutex: Kunci Kamar Mandi</a:t>
+              <a:t>Race Condition</a:t>
             </a:r>
             <a:endParaRPr lang="en-US" sz="3000" dirty="0"/>
           </a:p>
@@ -6171,7 +6269,7 @@
       </p:sp>
       <p:pic>
         <p:nvPicPr>
-          <p:cNvPr id="3" name="gambar" descr="/home/claude/work/slides/img/p12/p12-mutex-kunci.png">    </p:cNvPr>
+          <p:cNvPr id="3" name="gambar" descr="/home/claude/work/slides/img/p12/p12-race-condition.png">    </p:cNvPr>
           <p:cNvPicPr>
             <a:picLocks noChangeAspect="1"/>
           </p:cNvPicPr>
@@ -6185,8 +6283,8 @@
         </p:blipFill>
         <p:spPr>
           <a:xfrm>
-            <a:off x="555717" y="1280160"/>
-            <a:ext cx="11080262" cy="4892040"/>
+            <a:off x="727771" y="1280160"/>
+            <a:ext cx="10736154" cy="4892040"/>
           </a:xfrm>
           <a:prstGeom prst="rect">
             <a:avLst/>
@@ -6295,6 +6393,138 @@
                   <a:schemeClr val="tx2"/>
                 </a:solidFill>
               </a:rPr>
+              <a:t>Mutex: Kunci Kamar Mandi</a:t>
+            </a:r>
+            <a:endParaRPr lang="en-US" sz="3000" dirty="0"/>
+          </a:p>
+        </p:txBody>
+      </p:sp>
+      <p:pic>
+        <p:nvPicPr>
+          <p:cNvPr id="3" name="gambar" descr="/home/claude/work/slides/img/p12/p12-mutex-kunci.png">    </p:cNvPr>
+          <p:cNvPicPr>
+            <a:picLocks noChangeAspect="1"/>
+          </p:cNvPicPr>
+          <p:nvPr/>
+        </p:nvPicPr>
+        <p:blipFill>
+          <a:blip r:embed="rId1"/>
+          <a:stretch>
+            <a:fillRect/>
+          </a:stretch>
+        </p:blipFill>
+        <p:spPr>
+          <a:xfrm>
+            <a:off x="555717" y="1280160"/>
+            <a:ext cx="11080262" cy="4892040"/>
+          </a:xfrm>
+          <a:prstGeom prst="rect">
+            <a:avLst/>
+          </a:prstGeom>
+        </p:spPr>
+      </p:pic>
+      <p:sp>
+        <p:nvSpPr>
+          <p:cNvPr id="25" name="Slide Number Placeholder 0"/>
+          <p:cNvSpPr>
+            <a:spLocks noGrp="1"/>
+          </p:cNvSpPr>
+          <p:nvPr>
+            <p:ph type="sldNum" sz="quarter" idx="4294967295"/>
+          </p:nvPr>
+        </p:nvSpPr>
+        <p:spPr>
+          <a:xfrm>
+            <a:off x="11094415" y="6400800"/>
+            <a:ext cx="548640" cy="274320"/>
+          </a:xfrm>
+          <a:prstGeom prst="rect">
+            <a:avLst/>
+          </a:prstGeom>
+          <a:extLst>
+            <a:ext uri="{C572A759-6A51-4108-AA02-DFA0A04FC94B}">
+              <ma14:wrappingTextBoxFlag xmlns:ma14="http://schemas.microsoft.com/office/mac/drawingml/2011/main" val="0"/>
+            </a:ext>
+          </a:extLst>
+        </p:spPr>
+        <p:txBody>
+          <a:bodyPr/>
+          <a:lstStyle>
+            <a:lvl1pPr>
+              <a:defRPr sz="1000">
+                <a:solidFill>
+                  <a:srgbClr val="5F6F67"/>
+                </a:solidFill>
+              </a:defRPr>
+            </a:lvl1pPr>
+          </a:lstStyle>
+          <a:p>
+            <a:pPr algn="r"/>
+            <a:fld id="{F7021451-1387-4CA6-816F-3879F97B5CBC}" type="slidenum">
+              <a:rPr b="0" lang="en-US"/>
+              <a:t>18</a:t>
+            </a:fld>
+            <a:endParaRPr lang="en-US"/>
+          </a:p>
+        </p:txBody>
+      </p:sp>
+    </p:spTree>
+  </p:cSld>
+  <p:clrMapOvr>
+    <a:masterClrMapping/>
+  </p:clrMapOvr>
+</p:sld>
+</file>
+
+<file path=ppt/slides/slide19.xml><?xml version="1.0" encoding="utf-8"?>
+<p:sld xmlns:a="http://schemas.openxmlformats.org/drawingml/2006/main" xmlns:r="http://schemas.openxmlformats.org/officeDocument/2006/relationships" xmlns:p="http://schemas.openxmlformats.org/presentationml/2006/main">
+  <p:cSld name="Slide 19">
+    <p:spTree>
+      <p:nvGrpSpPr>
+        <p:cNvPr id="1" name=""/>
+        <p:cNvGrpSpPr/>
+        <p:nvPr/>
+      </p:nvGrpSpPr>
+      <p:grpSpPr>
+        <a:xfrm>
+          <a:off x="0" y="0"/>
+          <a:ext cx="0" cy="0"/>
+          <a:chOff x="0" y="0"/>
+          <a:chExt cx="0" cy="0"/>
+        </a:xfrm>
+      </p:grpSpPr>
+      <p:sp>
+        <p:nvSpPr>
+          <p:cNvPr id="2" name="Text 0"/>
+          <p:cNvSpPr/>
+          <p:nvPr>
+            <p:ph idx="100" type="title" hasCustomPrompt="1"/>
+          </p:nvPr>
+        </p:nvSpPr>
+        <p:spPr>
+          <a:xfrm>
+            <a:off x="548640" y="320040"/>
+            <a:ext cx="11094415" cy="777240"/>
+          </a:xfrm>
+          <a:prstGeom prst="rect">
+            <a:avLst/>
+          </a:prstGeom>
+          <a:noFill/>
+          <a:ln/>
+        </p:spPr>
+        <p:txBody>
+          <a:bodyPr wrap="square" lIns="0" tIns="0" rIns="0" bIns="0" rtlCol="0" anchor="ctr"/>
+          <a:lstStyle/>
+          <a:p>
+            <a:pPr algn="l" indent="0" marL="0">
+              <a:buNone/>
+            </a:pPr>
+            <a:r>
+              <a:rPr lang="en-US" sz="3000" b="1" dirty="0">
+                <a:solidFill>
+                  <a:schemeClr val="tx2"/>
+                </a:solidFill>
+              </a:rPr>
               <a:t>Semaphore Biner vs Mutex</a:t>
             </a:r>
             <a:endParaRPr lang="en-US" sz="3000" dirty="0"/>
@@ -6303,7 +6533,7 @@
       </p:sp>
       <p:graphicFrame>
         <p:nvGraphicFramePr>
-          <p:cNvPr id="19" name="tabel"/>
+          <p:cNvPr id="20" name="tabel"/>
           <p:cNvGraphicFramePr>
             <a:graphicFrameLocks noGrp="1"/>
           </p:cNvGraphicFramePr>
@@ -7473,7 +7703,7 @@
             <a:pPr algn="r"/>
             <a:fld id="{F7021451-1387-4CA6-816F-3879F97B5CBC}" type="slidenum">
               <a:rPr b="0" lang="en-US"/>
-              <a:t>18</a:t>
+              <a:t>19</a:t>
             </a:fld>
             <a:endParaRPr lang="en-US"/>
           </a:p>
@@ -7487,9 +7717,9 @@
 </p:sld>
 </file>
 
-<file path=ppt/slides/slide19.xml><?xml version="1.0" encoding="utf-8"?>
+<file path=ppt/slides/slide2.xml><?xml version="1.0" encoding="utf-8"?>
 <p:sld xmlns:a="http://schemas.openxmlformats.org/drawingml/2006/main" xmlns:r="http://schemas.openxmlformats.org/officeDocument/2006/relationships" xmlns:p="http://schemas.openxmlformats.org/presentationml/2006/main">
-  <p:cSld name="Slide 19">
+  <p:cSld name="Slide 2">
     <p:spTree>
       <p:nvGrpSpPr>
         <p:cNvPr id="1" name=""/>
@@ -7536,6 +7766,630 @@
                   <a:schemeClr val="tx2"/>
                 </a:solidFill>
               </a:rPr>
+              <a:t>Tujuan Pembelajaran</a:t>
+            </a:r>
+            <a:endParaRPr lang="en-US" sz="3000" dirty="0"/>
+          </a:p>
+        </p:txBody>
+      </p:sp>
+      <p:sp>
+        <p:nvSpPr>
+          <p:cNvPr id="3" name="pad"/>
+          <p:cNvSpPr/>
+          <p:nvPr/>
+        </p:nvSpPr>
+        <p:spPr>
+          <a:xfrm>
+            <a:off x="548640" y="1499616"/>
+            <a:ext cx="566928" cy="566928"/>
+          </a:xfrm>
+          <a:prstGeom prst="ellipse">
+            <a:avLst/>
+          </a:prstGeom>
+          <a:solidFill>
+            <a:schemeClr val="bg1"/>
+          </a:solidFill>
+          <a:ln w="28575">
+            <a:solidFill>
+              <a:schemeClr val="accent2"/>
+            </a:solidFill>
+            <a:prstDash val="solid"/>
+          </a:ln>
+        </p:spPr>
+      </p:sp>
+      <p:pic>
+        <p:nvPicPr>
+          <p:cNvPr id="4" name="ikon-sync" descr="preencoded.png">    </p:cNvPr>
+          <p:cNvPicPr>
+            <a:picLocks noChangeAspect="1"/>
+          </p:cNvPicPr>
+          <p:nvPr/>
+        </p:nvPicPr>
+        <p:blipFill>
+          <a:blip r:embed="rId1"/>
+          <a:stretch>
+            <a:fillRect/>
+          </a:stretch>
+        </p:blipFill>
+        <p:spPr>
+          <a:xfrm>
+            <a:off x="690372" y="1641348"/>
+            <a:ext cx="283464" cy="283464"/>
+          </a:xfrm>
+          <a:prstGeom prst="rect">
+            <a:avLst/>
+          </a:prstGeom>
+        </p:spPr>
+      </p:pic>
+      <p:sp>
+        <p:nvSpPr>
+          <p:cNvPr id="5" name="Text 2"/>
+          <p:cNvSpPr txBox="1"/>
+          <p:nvPr/>
+        </p:nvSpPr>
+        <p:spPr>
+          <a:xfrm>
+            <a:off x="1325880" y="1325880"/>
+            <a:ext cx="10317175" cy="914400"/>
+          </a:xfrm>
+          <a:prstGeom prst="rect">
+            <a:avLst/>
+          </a:prstGeom>
+          <a:noFill/>
+          <a:ln/>
+        </p:spPr>
+        <p:txBody>
+          <a:bodyPr wrap="square" lIns="0" tIns="0" rIns="0" bIns="0" rtlCol="0" anchor="ctr"/>
+          <a:lstStyle/>
+          <a:p>
+            <a:pPr indent="0" marL="0">
+              <a:buNone/>
+            </a:pPr>
+            <a:r>
+              <a:rPr lang="en-US" sz="2000" dirty="0">
+                <a:solidFill>
+                  <a:schemeClr val="tx1"/>
+                </a:solidFill>
+              </a:rPr>
+              <a:t>Membedakan </a:t>
+            </a:r>
+            <a:r>
+              <a:rPr lang="en-US" sz="2000" b="1" dirty="0">
+                <a:solidFill>
+                  <a:schemeClr val="tx1"/>
+                </a:solidFill>
+              </a:rPr>
+              <a:t>super-loop</a:t>
+            </a:r>
+            <a:r>
+              <a:rPr lang="en-US" sz="2000" dirty="0">
+                <a:solidFill>
+                  <a:schemeClr val="tx1"/>
+                </a:solidFill>
+              </a:rPr>
+              <a:t> dan </a:t>
+            </a:r>
+            <a:r>
+              <a:rPr lang="en-US" sz="2000" b="1" dirty="0">
+                <a:solidFill>
+                  <a:schemeClr val="tx1"/>
+                </a:solidFill>
+              </a:rPr>
+              <a:t>multitasking</a:t>
+            </a:r>
+            <a:r>
+              <a:rPr lang="en-US" sz="2000" dirty="0">
+                <a:solidFill>
+                  <a:schemeClr val="tx1"/>
+                </a:solidFill>
+              </a:rPr>
+              <a:t>, serta waktu nyata keras dan lunak</a:t>
+            </a:r>
+            <a:endParaRPr lang="en-US" sz="2000" dirty="0"/>
+          </a:p>
+        </p:txBody>
+      </p:sp>
+      <p:sp>
+        <p:nvSpPr>
+          <p:cNvPr id="6" name="pad"/>
+          <p:cNvSpPr/>
+          <p:nvPr/>
+        </p:nvSpPr>
+        <p:spPr>
+          <a:xfrm>
+            <a:off x="548640" y="2414016"/>
+            <a:ext cx="566928" cy="566928"/>
+          </a:xfrm>
+          <a:prstGeom prst="ellipse">
+            <a:avLst/>
+          </a:prstGeom>
+          <a:solidFill>
+            <a:schemeClr val="bg1"/>
+          </a:solidFill>
+          <a:ln w="28575">
+            <a:solidFill>
+              <a:schemeClr val="accent2"/>
+            </a:solidFill>
+            <a:prstDash val="solid"/>
+          </a:ln>
+        </p:spPr>
+      </p:sp>
+      <p:pic>
+        <p:nvPicPr>
+          <p:cNvPr id="7" name="ikon-tasks" descr="preencoded.png">    </p:cNvPr>
+          <p:cNvPicPr>
+            <a:picLocks noChangeAspect="1"/>
+          </p:cNvPicPr>
+          <p:nvPr/>
+        </p:nvPicPr>
+        <p:blipFill>
+          <a:blip r:embed="rId2"/>
+          <a:stretch>
+            <a:fillRect/>
+          </a:stretch>
+        </p:blipFill>
+        <p:spPr>
+          <a:xfrm>
+            <a:off x="690372" y="2555748"/>
+            <a:ext cx="283464" cy="283464"/>
+          </a:xfrm>
+          <a:prstGeom prst="rect">
+            <a:avLst/>
+          </a:prstGeom>
+        </p:spPr>
+      </p:pic>
+      <p:sp>
+        <p:nvSpPr>
+          <p:cNvPr id="8" name="Text 4"/>
+          <p:cNvSpPr txBox="1"/>
+          <p:nvPr/>
+        </p:nvSpPr>
+        <p:spPr>
+          <a:xfrm>
+            <a:off x="1325880" y="2240280"/>
+            <a:ext cx="10317175" cy="914400"/>
+          </a:xfrm>
+          <a:prstGeom prst="rect">
+            <a:avLst/>
+          </a:prstGeom>
+          <a:noFill/>
+          <a:ln/>
+        </p:spPr>
+        <p:txBody>
+          <a:bodyPr wrap="square" lIns="0" tIns="0" rIns="0" bIns="0" rtlCol="0" anchor="ctr"/>
+          <a:lstStyle/>
+          <a:p>
+            <a:pPr indent="0" marL="0">
+              <a:buNone/>
+            </a:pPr>
+            <a:r>
+              <a:rPr lang="en-US" sz="2000" dirty="0">
+                <a:solidFill>
+                  <a:schemeClr val="tx1"/>
+                </a:solidFill>
+              </a:rPr>
+              <a:t>Menjelaskan </a:t>
+            </a:r>
+            <a:r>
+              <a:rPr lang="en-US" sz="2000" b="1" dirty="0">
+                <a:solidFill>
+                  <a:schemeClr val="tx1"/>
+                </a:solidFill>
+              </a:rPr>
+              <a:t>task</a:t>
+            </a:r>
+            <a:r>
+              <a:rPr lang="en-US" sz="2000" dirty="0">
+                <a:solidFill>
+                  <a:schemeClr val="tx1"/>
+                </a:solidFill>
+              </a:rPr>
+              <a:t>, keadaan task, prioritas, dan penjadwal di ESP32 dua inti</a:t>
+            </a:r>
+            <a:endParaRPr lang="en-US" sz="2000" dirty="0"/>
+          </a:p>
+        </p:txBody>
+      </p:sp>
+      <p:sp>
+        <p:nvSpPr>
+          <p:cNvPr id="9" name="pad"/>
+          <p:cNvSpPr/>
+          <p:nvPr/>
+        </p:nvSpPr>
+        <p:spPr>
+          <a:xfrm>
+            <a:off x="548640" y="3328416"/>
+            <a:ext cx="566928" cy="566928"/>
+          </a:xfrm>
+          <a:prstGeom prst="ellipse">
+            <a:avLst/>
+          </a:prstGeom>
+          <a:solidFill>
+            <a:schemeClr val="bg1"/>
+          </a:solidFill>
+          <a:ln w="28575">
+            <a:solidFill>
+              <a:schemeClr val="accent2"/>
+            </a:solidFill>
+            <a:prstDash val="solid"/>
+          </a:ln>
+        </p:spPr>
+      </p:sp>
+      <p:pic>
+        <p:nvPicPr>
+          <p:cNvPr id="10" name="ikon-code" descr="preencoded.png">    </p:cNvPr>
+          <p:cNvPicPr>
+            <a:picLocks noChangeAspect="1"/>
+          </p:cNvPicPr>
+          <p:nvPr/>
+        </p:nvPicPr>
+        <p:blipFill>
+          <a:blip r:embed="rId3"/>
+          <a:stretch>
+            <a:fillRect/>
+          </a:stretch>
+        </p:blipFill>
+        <p:spPr>
+          <a:xfrm>
+            <a:off x="690372" y="3470148"/>
+            <a:ext cx="283464" cy="283464"/>
+          </a:xfrm>
+          <a:prstGeom prst="rect">
+            <a:avLst/>
+          </a:prstGeom>
+        </p:spPr>
+      </p:pic>
+      <p:sp>
+        <p:nvSpPr>
+          <p:cNvPr id="11" name="Text 6"/>
+          <p:cNvSpPr txBox="1"/>
+          <p:nvPr/>
+        </p:nvSpPr>
+        <p:spPr>
+          <a:xfrm>
+            <a:off x="1325880" y="3154680"/>
+            <a:ext cx="10317175" cy="914400"/>
+          </a:xfrm>
+          <a:prstGeom prst="rect">
+            <a:avLst/>
+          </a:prstGeom>
+          <a:noFill/>
+          <a:ln/>
+        </p:spPr>
+        <p:txBody>
+          <a:bodyPr wrap="square" lIns="0" tIns="0" rIns="0" bIns="0" rtlCol="0" anchor="ctr"/>
+          <a:lstStyle/>
+          <a:p>
+            <a:pPr indent="0" marL="0">
+              <a:buNone/>
+            </a:pPr>
+            <a:r>
+              <a:rPr lang="en-US" sz="2000" dirty="0">
+                <a:solidFill>
+                  <a:schemeClr val="tx1"/>
+                </a:solidFill>
+              </a:rPr>
+              <a:t>Membuat task dengan </a:t>
+            </a:r>
+            <a:r>
+              <a:rPr lang="en-US" sz="2000" dirty="0">
+                <a:solidFill>
+                  <a:srgbClr val="A35F14"/>
+                </a:solidFill>
+                <a:latin typeface="Consolas" pitchFamily="34" charset="0"/>
+                <a:ea typeface="Consolas" pitchFamily="34" charset="-122"/>
+                <a:cs typeface="Consolas" pitchFamily="34" charset="-120"/>
+              </a:rPr>
+              <a:t>xTaskCreatePinnedToCore()</a:t>
+            </a:r>
+            <a:r>
+              <a:rPr lang="en-US" sz="2000" dirty="0">
+                <a:solidFill>
+                  <a:schemeClr val="tx1"/>
+                </a:solidFill>
+              </a:rPr>
+              <a:t> dan memberi jeda yang benar</a:t>
+            </a:r>
+            <a:endParaRPr lang="en-US" sz="2000" dirty="0"/>
+          </a:p>
+        </p:txBody>
+      </p:sp>
+      <p:sp>
+        <p:nvSpPr>
+          <p:cNvPr id="12" name="pad"/>
+          <p:cNvSpPr/>
+          <p:nvPr/>
+        </p:nvSpPr>
+        <p:spPr>
+          <a:xfrm>
+            <a:off x="548640" y="4242816"/>
+            <a:ext cx="566928" cy="566928"/>
+          </a:xfrm>
+          <a:prstGeom prst="ellipse">
+            <a:avLst/>
+          </a:prstGeom>
+          <a:solidFill>
+            <a:schemeClr val="bg1"/>
+          </a:solidFill>
+          <a:ln w="28575">
+            <a:solidFill>
+              <a:schemeClr val="accent2"/>
+            </a:solidFill>
+            <a:prstDash val="solid"/>
+          </a:ln>
+        </p:spPr>
+      </p:sp>
+      <p:pic>
+        <p:nvPicPr>
+          <p:cNvPr id="13" name="ikon-route" descr="preencoded.png">    </p:cNvPr>
+          <p:cNvPicPr>
+            <a:picLocks noChangeAspect="1"/>
+          </p:cNvPicPr>
+          <p:nvPr/>
+        </p:nvPicPr>
+        <p:blipFill>
+          <a:blip r:embed="rId4"/>
+          <a:stretch>
+            <a:fillRect/>
+          </a:stretch>
+        </p:blipFill>
+        <p:spPr>
+          <a:xfrm>
+            <a:off x="690372" y="4384548"/>
+            <a:ext cx="283464" cy="283464"/>
+          </a:xfrm>
+          <a:prstGeom prst="rect">
+            <a:avLst/>
+          </a:prstGeom>
+        </p:spPr>
+      </p:pic>
+      <p:sp>
+        <p:nvSpPr>
+          <p:cNvPr id="14" name="Text 8"/>
+          <p:cNvSpPr txBox="1"/>
+          <p:nvPr/>
+        </p:nvSpPr>
+        <p:spPr>
+          <a:xfrm>
+            <a:off x="1325880" y="4069080"/>
+            <a:ext cx="10317175" cy="914400"/>
+          </a:xfrm>
+          <a:prstGeom prst="rect">
+            <a:avLst/>
+          </a:prstGeom>
+          <a:noFill/>
+          <a:ln/>
+        </p:spPr>
+        <p:txBody>
+          <a:bodyPr wrap="square" lIns="0" tIns="0" rIns="0" bIns="0" rtlCol="0" anchor="ctr"/>
+          <a:lstStyle/>
+          <a:p>
+            <a:pPr indent="0" marL="0">
+              <a:buNone/>
+            </a:pPr>
+            <a:r>
+              <a:rPr lang="en-US" sz="2000" dirty="0">
+                <a:solidFill>
+                  <a:schemeClr val="tx1"/>
+                </a:solidFill>
+              </a:rPr>
+              <a:t>Mengirim data dengan </a:t>
+            </a:r>
+            <a:r>
+              <a:rPr lang="en-US" sz="2000" b="1" dirty="0">
+                <a:solidFill>
+                  <a:schemeClr val="tx1"/>
+                </a:solidFill>
+              </a:rPr>
+              <a:t>antrean</a:t>
+            </a:r>
+            <a:r>
+              <a:rPr lang="en-US" sz="2000" dirty="0">
+                <a:solidFill>
+                  <a:schemeClr val="tx1"/>
+                </a:solidFill>
+              </a:rPr>
+              <a:t> dan melindungi sumber daya dengan </a:t>
+            </a:r>
+            <a:r>
+              <a:rPr lang="en-US" sz="2000" b="1" dirty="0">
+                <a:solidFill>
+                  <a:schemeClr val="tx1"/>
+                </a:solidFill>
+              </a:rPr>
+              <a:t>mutex</a:t>
+            </a:r>
+            <a:endParaRPr lang="en-US" sz="2000" dirty="0"/>
+          </a:p>
+        </p:txBody>
+      </p:sp>
+      <p:sp>
+        <p:nvSpPr>
+          <p:cNvPr id="15" name="pad"/>
+          <p:cNvSpPr/>
+          <p:nvPr/>
+        </p:nvSpPr>
+        <p:spPr>
+          <a:xfrm>
+            <a:off x="548640" y="5157216"/>
+            <a:ext cx="566928" cy="566928"/>
+          </a:xfrm>
+          <a:prstGeom prst="ellipse">
+            <a:avLst/>
+          </a:prstGeom>
+          <a:solidFill>
+            <a:schemeClr val="bg1"/>
+          </a:solidFill>
+          <a:ln w="28575">
+            <a:solidFill>
+              <a:schemeClr val="accent2"/>
+            </a:solidFill>
+            <a:prstDash val="solid"/>
+          </a:ln>
+        </p:spPr>
+      </p:sp>
+      <p:pic>
+        <p:nvPicPr>
+          <p:cNvPr id="16" name="ikon-bug" descr="preencoded.png">    </p:cNvPr>
+          <p:cNvPicPr>
+            <a:picLocks noChangeAspect="1"/>
+          </p:cNvPicPr>
+          <p:nvPr/>
+        </p:nvPicPr>
+        <p:blipFill>
+          <a:blip r:embed="rId5"/>
+          <a:stretch>
+            <a:fillRect/>
+          </a:stretch>
+        </p:blipFill>
+        <p:spPr>
+          <a:xfrm>
+            <a:off x="690372" y="5298948"/>
+            <a:ext cx="283464" cy="283464"/>
+          </a:xfrm>
+          <a:prstGeom prst="rect">
+            <a:avLst/>
+          </a:prstGeom>
+        </p:spPr>
+      </p:pic>
+      <p:sp>
+        <p:nvSpPr>
+          <p:cNvPr id="17" name="Text 10"/>
+          <p:cNvSpPr txBox="1"/>
+          <p:nvPr/>
+        </p:nvSpPr>
+        <p:spPr>
+          <a:xfrm>
+            <a:off x="1325880" y="4983480"/>
+            <a:ext cx="10317175" cy="914400"/>
+          </a:xfrm>
+          <a:prstGeom prst="rect">
+            <a:avLst/>
+          </a:prstGeom>
+          <a:noFill/>
+          <a:ln/>
+        </p:spPr>
+        <p:txBody>
+          <a:bodyPr wrap="square" lIns="0" tIns="0" rIns="0" bIns="0" rtlCol="0" anchor="ctr"/>
+          <a:lstStyle/>
+          <a:p>
+            <a:pPr indent="0" marL="0">
+              <a:buNone/>
+            </a:pPr>
+            <a:r>
+              <a:rPr lang="en-US" sz="2000" dirty="0">
+                <a:solidFill>
+                  <a:schemeClr val="tx1"/>
+                </a:solidFill>
+              </a:rPr>
+              <a:t>Mengenali kesalahan umum: stack kekecilan, watchdog, dan API di ISR</a:t>
+            </a:r>
+            <a:endParaRPr lang="en-US" sz="2000" dirty="0"/>
+          </a:p>
+        </p:txBody>
+      </p:sp>
+      <p:sp>
+        <p:nvSpPr>
+          <p:cNvPr id="25" name="Slide Number Placeholder 0"/>
+          <p:cNvSpPr>
+            <a:spLocks noGrp="1"/>
+          </p:cNvSpPr>
+          <p:nvPr>
+            <p:ph type="sldNum" sz="quarter" idx="4294967295"/>
+          </p:nvPr>
+        </p:nvSpPr>
+        <p:spPr>
+          <a:xfrm>
+            <a:off x="11094415" y="6400800"/>
+            <a:ext cx="548640" cy="274320"/>
+          </a:xfrm>
+          <a:prstGeom prst="rect">
+            <a:avLst/>
+          </a:prstGeom>
+          <a:extLst>
+            <a:ext uri="{C572A759-6A51-4108-AA02-DFA0A04FC94B}">
+              <ma14:wrappingTextBoxFlag xmlns:ma14="http://schemas.microsoft.com/office/mac/drawingml/2011/main" val="0"/>
+            </a:ext>
+          </a:extLst>
+        </p:spPr>
+        <p:txBody>
+          <a:bodyPr/>
+          <a:lstStyle>
+            <a:lvl1pPr>
+              <a:defRPr sz="1000">
+                <a:solidFill>
+                  <a:srgbClr val="5F6F67"/>
+                </a:solidFill>
+              </a:defRPr>
+            </a:lvl1pPr>
+          </a:lstStyle>
+          <a:p>
+            <a:pPr algn="r"/>
+            <a:fld id="{F7021451-1387-4CA6-816F-3879F97B5CBC}" type="slidenum">
+              <a:rPr b="0" lang="en-US"/>
+              <a:t>2</a:t>
+            </a:fld>
+            <a:endParaRPr lang="en-US"/>
+          </a:p>
+        </p:txBody>
+      </p:sp>
+    </p:spTree>
+  </p:cSld>
+  <p:clrMapOvr>
+    <a:masterClrMapping/>
+  </p:clrMapOvr>
+</p:sld>
+</file>
+
+<file path=ppt/slides/slide20.xml><?xml version="1.0" encoding="utf-8"?>
+<p:sld xmlns:a="http://schemas.openxmlformats.org/drawingml/2006/main" xmlns:r="http://schemas.openxmlformats.org/officeDocument/2006/relationships" xmlns:p="http://schemas.openxmlformats.org/presentationml/2006/main">
+  <p:cSld name="Slide 20">
+    <p:spTree>
+      <p:nvGrpSpPr>
+        <p:cNvPr id="1" name=""/>
+        <p:cNvGrpSpPr/>
+        <p:nvPr/>
+      </p:nvGrpSpPr>
+      <p:grpSpPr>
+        <a:xfrm>
+          <a:off x="0" y="0"/>
+          <a:ext cx="0" cy="0"/>
+          <a:chOff x="0" y="0"/>
+          <a:chExt cx="0" cy="0"/>
+        </a:xfrm>
+      </p:grpSpPr>
+      <p:sp>
+        <p:nvSpPr>
+          <p:cNvPr id="2" name="Text 0"/>
+          <p:cNvSpPr/>
+          <p:nvPr>
+            <p:ph idx="100" type="title" hasCustomPrompt="1"/>
+          </p:nvPr>
+        </p:nvSpPr>
+        <p:spPr>
+          <a:xfrm>
+            <a:off x="548640" y="320040"/>
+            <a:ext cx="11094415" cy="777240"/>
+          </a:xfrm>
+          <a:prstGeom prst="rect">
+            <a:avLst/>
+          </a:prstGeom>
+          <a:noFill/>
+          <a:ln/>
+        </p:spPr>
+        <p:txBody>
+          <a:bodyPr wrap="square" lIns="0" tIns="0" rIns="0" bIns="0" rtlCol="0" anchor="ctr"/>
+          <a:lstStyle/>
+          <a:p>
+            <a:pPr algn="l" indent="0" marL="0">
+              <a:buNone/>
+            </a:pPr>
+            <a:r>
+              <a:rPr lang="en-US" sz="3000" b="1" dirty="0">
+                <a:solidFill>
+                  <a:schemeClr val="tx2"/>
+                </a:solidFill>
+              </a:rPr>
               <a:t>Kesalahan yang Sering Terjadi</a:t>
             </a:r>
             <a:endParaRPr lang="en-US" sz="3000" dirty="0"/>
@@ -7544,7 +8398,7 @@
       </p:sp>
       <p:graphicFrame>
         <p:nvGraphicFramePr>
-          <p:cNvPr id="20" name="tabel"/>
+          <p:cNvPr id="21" name="tabel"/>
           <p:cNvGraphicFramePr>
             <a:graphicFrameLocks noGrp="1"/>
           </p:cNvGraphicFramePr>
@@ -8722,988 +9576,6 @@
             <a:pPr algn="r"/>
             <a:fld id="{F7021451-1387-4CA6-816F-3879F97B5CBC}" type="slidenum">
               <a:rPr b="0" lang="en-US"/>
-              <a:t>19</a:t>
-            </a:fld>
-            <a:endParaRPr lang="en-US"/>
-          </a:p>
-        </p:txBody>
-      </p:sp>
-    </p:spTree>
-  </p:cSld>
-  <p:clrMapOvr>
-    <a:masterClrMapping/>
-  </p:clrMapOvr>
-</p:sld>
-</file>
-
-<file path=ppt/slides/slide2.xml><?xml version="1.0" encoding="utf-8"?>
-<p:sld xmlns:a="http://schemas.openxmlformats.org/drawingml/2006/main" xmlns:r="http://schemas.openxmlformats.org/officeDocument/2006/relationships" xmlns:p="http://schemas.openxmlformats.org/presentationml/2006/main">
-  <p:cSld name="Slide 2">
-    <p:spTree>
-      <p:nvGrpSpPr>
-        <p:cNvPr id="1" name=""/>
-        <p:cNvGrpSpPr/>
-        <p:nvPr/>
-      </p:nvGrpSpPr>
-      <p:grpSpPr>
-        <a:xfrm>
-          <a:off x="0" y="0"/>
-          <a:ext cx="0" cy="0"/>
-          <a:chOff x="0" y="0"/>
-          <a:chExt cx="0" cy="0"/>
-        </a:xfrm>
-      </p:grpSpPr>
-      <p:sp>
-        <p:nvSpPr>
-          <p:cNvPr id="2" name="Text 0"/>
-          <p:cNvSpPr/>
-          <p:nvPr>
-            <p:ph idx="100" type="title" hasCustomPrompt="1"/>
-          </p:nvPr>
-        </p:nvSpPr>
-        <p:spPr>
-          <a:xfrm>
-            <a:off x="548640" y="320040"/>
-            <a:ext cx="11094415" cy="777240"/>
-          </a:xfrm>
-          <a:prstGeom prst="rect">
-            <a:avLst/>
-          </a:prstGeom>
-          <a:noFill/>
-          <a:ln/>
-        </p:spPr>
-        <p:txBody>
-          <a:bodyPr wrap="square" lIns="0" tIns="0" rIns="0" bIns="0" rtlCol="0" anchor="ctr"/>
-          <a:lstStyle/>
-          <a:p>
-            <a:pPr algn="l" indent="0" marL="0">
-              <a:buNone/>
-            </a:pPr>
-            <a:r>
-              <a:rPr lang="en-US" sz="3000" b="1" dirty="0">
-                <a:solidFill>
-                  <a:schemeClr val="tx2"/>
-                </a:solidFill>
-              </a:rPr>
-              <a:t>Tujuan Pembelajaran</a:t>
-            </a:r>
-            <a:endParaRPr lang="en-US" sz="3000" dirty="0"/>
-          </a:p>
-        </p:txBody>
-      </p:sp>
-      <p:sp>
-        <p:nvSpPr>
-          <p:cNvPr id="3" name="pad"/>
-          <p:cNvSpPr/>
-          <p:nvPr/>
-        </p:nvSpPr>
-        <p:spPr>
-          <a:xfrm>
-            <a:off x="548640" y="1499616"/>
-            <a:ext cx="566928" cy="566928"/>
-          </a:xfrm>
-          <a:prstGeom prst="ellipse">
-            <a:avLst/>
-          </a:prstGeom>
-          <a:solidFill>
-            <a:schemeClr val="bg1"/>
-          </a:solidFill>
-          <a:ln w="28575">
-            <a:solidFill>
-              <a:schemeClr val="accent2"/>
-            </a:solidFill>
-            <a:prstDash val="solid"/>
-          </a:ln>
-        </p:spPr>
-      </p:sp>
-      <p:pic>
-        <p:nvPicPr>
-          <p:cNvPr id="4" name="ikon-sync" descr="preencoded.png">    </p:cNvPr>
-          <p:cNvPicPr>
-            <a:picLocks noChangeAspect="1"/>
-          </p:cNvPicPr>
-          <p:nvPr/>
-        </p:nvPicPr>
-        <p:blipFill>
-          <a:blip r:embed="rId1"/>
-          <a:stretch>
-            <a:fillRect/>
-          </a:stretch>
-        </p:blipFill>
-        <p:spPr>
-          <a:xfrm>
-            <a:off x="690372" y="1641348"/>
-            <a:ext cx="283464" cy="283464"/>
-          </a:xfrm>
-          <a:prstGeom prst="rect">
-            <a:avLst/>
-          </a:prstGeom>
-        </p:spPr>
-      </p:pic>
-      <p:sp>
-        <p:nvSpPr>
-          <p:cNvPr id="5" name="Text 2"/>
-          <p:cNvSpPr txBox="1"/>
-          <p:nvPr/>
-        </p:nvSpPr>
-        <p:spPr>
-          <a:xfrm>
-            <a:off x="1325880" y="1325880"/>
-            <a:ext cx="10317175" cy="914400"/>
-          </a:xfrm>
-          <a:prstGeom prst="rect">
-            <a:avLst/>
-          </a:prstGeom>
-          <a:noFill/>
-          <a:ln/>
-        </p:spPr>
-        <p:txBody>
-          <a:bodyPr wrap="square" lIns="0" tIns="0" rIns="0" bIns="0" rtlCol="0" anchor="ctr"/>
-          <a:lstStyle/>
-          <a:p>
-            <a:pPr indent="0" marL="0">
-              <a:buNone/>
-            </a:pPr>
-            <a:r>
-              <a:rPr lang="en-US" sz="2000" dirty="0">
-                <a:solidFill>
-                  <a:schemeClr val="tx1"/>
-                </a:solidFill>
-              </a:rPr>
-              <a:t>Membedakan </a:t>
-            </a:r>
-            <a:r>
-              <a:rPr lang="en-US" sz="2000" b="1" dirty="0">
-                <a:solidFill>
-                  <a:schemeClr val="tx1"/>
-                </a:solidFill>
-              </a:rPr>
-              <a:t>super-loop</a:t>
-            </a:r>
-            <a:r>
-              <a:rPr lang="en-US" sz="2000" dirty="0">
-                <a:solidFill>
-                  <a:schemeClr val="tx1"/>
-                </a:solidFill>
-              </a:rPr>
-              <a:t> dan </a:t>
-            </a:r>
-            <a:r>
-              <a:rPr lang="en-US" sz="2000" b="1" dirty="0">
-                <a:solidFill>
-                  <a:schemeClr val="tx1"/>
-                </a:solidFill>
-              </a:rPr>
-              <a:t>multitasking</a:t>
-            </a:r>
-            <a:r>
-              <a:rPr lang="en-US" sz="2000" dirty="0">
-                <a:solidFill>
-                  <a:schemeClr val="tx1"/>
-                </a:solidFill>
-              </a:rPr>
-              <a:t>, serta waktu nyata keras dan lunak</a:t>
-            </a:r>
-            <a:endParaRPr lang="en-US" sz="2000" dirty="0"/>
-          </a:p>
-        </p:txBody>
-      </p:sp>
-      <p:sp>
-        <p:nvSpPr>
-          <p:cNvPr id="6" name="pad"/>
-          <p:cNvSpPr/>
-          <p:nvPr/>
-        </p:nvSpPr>
-        <p:spPr>
-          <a:xfrm>
-            <a:off x="548640" y="2414016"/>
-            <a:ext cx="566928" cy="566928"/>
-          </a:xfrm>
-          <a:prstGeom prst="ellipse">
-            <a:avLst/>
-          </a:prstGeom>
-          <a:solidFill>
-            <a:schemeClr val="bg1"/>
-          </a:solidFill>
-          <a:ln w="28575">
-            <a:solidFill>
-              <a:schemeClr val="accent2"/>
-            </a:solidFill>
-            <a:prstDash val="solid"/>
-          </a:ln>
-        </p:spPr>
-      </p:sp>
-      <p:pic>
-        <p:nvPicPr>
-          <p:cNvPr id="7" name="ikon-tasks" descr="preencoded.png">    </p:cNvPr>
-          <p:cNvPicPr>
-            <a:picLocks noChangeAspect="1"/>
-          </p:cNvPicPr>
-          <p:nvPr/>
-        </p:nvPicPr>
-        <p:blipFill>
-          <a:blip r:embed="rId2"/>
-          <a:stretch>
-            <a:fillRect/>
-          </a:stretch>
-        </p:blipFill>
-        <p:spPr>
-          <a:xfrm>
-            <a:off x="690372" y="2555748"/>
-            <a:ext cx="283464" cy="283464"/>
-          </a:xfrm>
-          <a:prstGeom prst="rect">
-            <a:avLst/>
-          </a:prstGeom>
-        </p:spPr>
-      </p:pic>
-      <p:sp>
-        <p:nvSpPr>
-          <p:cNvPr id="8" name="Text 4"/>
-          <p:cNvSpPr txBox="1"/>
-          <p:nvPr/>
-        </p:nvSpPr>
-        <p:spPr>
-          <a:xfrm>
-            <a:off x="1325880" y="2240280"/>
-            <a:ext cx="10317175" cy="914400"/>
-          </a:xfrm>
-          <a:prstGeom prst="rect">
-            <a:avLst/>
-          </a:prstGeom>
-          <a:noFill/>
-          <a:ln/>
-        </p:spPr>
-        <p:txBody>
-          <a:bodyPr wrap="square" lIns="0" tIns="0" rIns="0" bIns="0" rtlCol="0" anchor="ctr"/>
-          <a:lstStyle/>
-          <a:p>
-            <a:pPr indent="0" marL="0">
-              <a:buNone/>
-            </a:pPr>
-            <a:r>
-              <a:rPr lang="en-US" sz="2000" dirty="0">
-                <a:solidFill>
-                  <a:schemeClr val="tx1"/>
-                </a:solidFill>
-              </a:rPr>
-              <a:t>Menjelaskan </a:t>
-            </a:r>
-            <a:r>
-              <a:rPr lang="en-US" sz="2000" b="1" dirty="0">
-                <a:solidFill>
-                  <a:schemeClr val="tx1"/>
-                </a:solidFill>
-              </a:rPr>
-              <a:t>task</a:t>
-            </a:r>
-            <a:r>
-              <a:rPr lang="en-US" sz="2000" dirty="0">
-                <a:solidFill>
-                  <a:schemeClr val="tx1"/>
-                </a:solidFill>
-              </a:rPr>
-              <a:t>, keadaan task, prioritas, dan penjadwal di ESP32 dua inti</a:t>
-            </a:r>
-            <a:endParaRPr lang="en-US" sz="2000" dirty="0"/>
-          </a:p>
-        </p:txBody>
-      </p:sp>
-      <p:sp>
-        <p:nvSpPr>
-          <p:cNvPr id="9" name="pad"/>
-          <p:cNvSpPr/>
-          <p:nvPr/>
-        </p:nvSpPr>
-        <p:spPr>
-          <a:xfrm>
-            <a:off x="548640" y="3328416"/>
-            <a:ext cx="566928" cy="566928"/>
-          </a:xfrm>
-          <a:prstGeom prst="ellipse">
-            <a:avLst/>
-          </a:prstGeom>
-          <a:solidFill>
-            <a:schemeClr val="bg1"/>
-          </a:solidFill>
-          <a:ln w="28575">
-            <a:solidFill>
-              <a:schemeClr val="accent2"/>
-            </a:solidFill>
-            <a:prstDash val="solid"/>
-          </a:ln>
-        </p:spPr>
-      </p:sp>
-      <p:pic>
-        <p:nvPicPr>
-          <p:cNvPr id="10" name="ikon-code" descr="preencoded.png">    </p:cNvPr>
-          <p:cNvPicPr>
-            <a:picLocks noChangeAspect="1"/>
-          </p:cNvPicPr>
-          <p:nvPr/>
-        </p:nvPicPr>
-        <p:blipFill>
-          <a:blip r:embed="rId3"/>
-          <a:stretch>
-            <a:fillRect/>
-          </a:stretch>
-        </p:blipFill>
-        <p:spPr>
-          <a:xfrm>
-            <a:off x="690372" y="3470148"/>
-            <a:ext cx="283464" cy="283464"/>
-          </a:xfrm>
-          <a:prstGeom prst="rect">
-            <a:avLst/>
-          </a:prstGeom>
-        </p:spPr>
-      </p:pic>
-      <p:sp>
-        <p:nvSpPr>
-          <p:cNvPr id="11" name="Text 6"/>
-          <p:cNvSpPr txBox="1"/>
-          <p:nvPr/>
-        </p:nvSpPr>
-        <p:spPr>
-          <a:xfrm>
-            <a:off x="1325880" y="3154680"/>
-            <a:ext cx="10317175" cy="914400"/>
-          </a:xfrm>
-          <a:prstGeom prst="rect">
-            <a:avLst/>
-          </a:prstGeom>
-          <a:noFill/>
-          <a:ln/>
-        </p:spPr>
-        <p:txBody>
-          <a:bodyPr wrap="square" lIns="0" tIns="0" rIns="0" bIns="0" rtlCol="0" anchor="ctr"/>
-          <a:lstStyle/>
-          <a:p>
-            <a:pPr indent="0" marL="0">
-              <a:buNone/>
-            </a:pPr>
-            <a:r>
-              <a:rPr lang="en-US" sz="2000" dirty="0">
-                <a:solidFill>
-                  <a:schemeClr val="tx1"/>
-                </a:solidFill>
-              </a:rPr>
-              <a:t>Membuat task dengan </a:t>
-            </a:r>
-            <a:r>
-              <a:rPr lang="en-US" sz="2000" dirty="0">
-                <a:solidFill>
-                  <a:srgbClr val="A35F14"/>
-                </a:solidFill>
-                <a:latin typeface="Consolas" pitchFamily="34" charset="0"/>
-                <a:ea typeface="Consolas" pitchFamily="34" charset="-122"/>
-                <a:cs typeface="Consolas" pitchFamily="34" charset="-120"/>
-              </a:rPr>
-              <a:t>xTaskCreatePinnedToCore()</a:t>
-            </a:r>
-            <a:r>
-              <a:rPr lang="en-US" sz="2000" dirty="0">
-                <a:solidFill>
-                  <a:schemeClr val="tx1"/>
-                </a:solidFill>
-              </a:rPr>
-              <a:t> dan memberi jeda yang benar</a:t>
-            </a:r>
-            <a:endParaRPr lang="en-US" sz="2000" dirty="0"/>
-          </a:p>
-        </p:txBody>
-      </p:sp>
-      <p:sp>
-        <p:nvSpPr>
-          <p:cNvPr id="12" name="pad"/>
-          <p:cNvSpPr/>
-          <p:nvPr/>
-        </p:nvSpPr>
-        <p:spPr>
-          <a:xfrm>
-            <a:off x="548640" y="4242816"/>
-            <a:ext cx="566928" cy="566928"/>
-          </a:xfrm>
-          <a:prstGeom prst="ellipse">
-            <a:avLst/>
-          </a:prstGeom>
-          <a:solidFill>
-            <a:schemeClr val="bg1"/>
-          </a:solidFill>
-          <a:ln w="28575">
-            <a:solidFill>
-              <a:schemeClr val="accent2"/>
-            </a:solidFill>
-            <a:prstDash val="solid"/>
-          </a:ln>
-        </p:spPr>
-      </p:sp>
-      <p:pic>
-        <p:nvPicPr>
-          <p:cNvPr id="13" name="ikon-route" descr="preencoded.png">    </p:cNvPr>
-          <p:cNvPicPr>
-            <a:picLocks noChangeAspect="1"/>
-          </p:cNvPicPr>
-          <p:nvPr/>
-        </p:nvPicPr>
-        <p:blipFill>
-          <a:blip r:embed="rId4"/>
-          <a:stretch>
-            <a:fillRect/>
-          </a:stretch>
-        </p:blipFill>
-        <p:spPr>
-          <a:xfrm>
-            <a:off x="690372" y="4384548"/>
-            <a:ext cx="283464" cy="283464"/>
-          </a:xfrm>
-          <a:prstGeom prst="rect">
-            <a:avLst/>
-          </a:prstGeom>
-        </p:spPr>
-      </p:pic>
-      <p:sp>
-        <p:nvSpPr>
-          <p:cNvPr id="14" name="Text 8"/>
-          <p:cNvSpPr txBox="1"/>
-          <p:nvPr/>
-        </p:nvSpPr>
-        <p:spPr>
-          <a:xfrm>
-            <a:off x="1325880" y="4069080"/>
-            <a:ext cx="10317175" cy="914400"/>
-          </a:xfrm>
-          <a:prstGeom prst="rect">
-            <a:avLst/>
-          </a:prstGeom>
-          <a:noFill/>
-          <a:ln/>
-        </p:spPr>
-        <p:txBody>
-          <a:bodyPr wrap="square" lIns="0" tIns="0" rIns="0" bIns="0" rtlCol="0" anchor="ctr"/>
-          <a:lstStyle/>
-          <a:p>
-            <a:pPr indent="0" marL="0">
-              <a:buNone/>
-            </a:pPr>
-            <a:r>
-              <a:rPr lang="en-US" sz="2000" dirty="0">
-                <a:solidFill>
-                  <a:schemeClr val="tx1"/>
-                </a:solidFill>
-              </a:rPr>
-              <a:t>Mengirim data dengan </a:t>
-            </a:r>
-            <a:r>
-              <a:rPr lang="en-US" sz="2000" b="1" dirty="0">
-                <a:solidFill>
-                  <a:schemeClr val="tx1"/>
-                </a:solidFill>
-              </a:rPr>
-              <a:t>antrean</a:t>
-            </a:r>
-            <a:r>
-              <a:rPr lang="en-US" sz="2000" dirty="0">
-                <a:solidFill>
-                  <a:schemeClr val="tx1"/>
-                </a:solidFill>
-              </a:rPr>
-              <a:t> dan melindungi sumber daya dengan </a:t>
-            </a:r>
-            <a:r>
-              <a:rPr lang="en-US" sz="2000" b="1" dirty="0">
-                <a:solidFill>
-                  <a:schemeClr val="tx1"/>
-                </a:solidFill>
-              </a:rPr>
-              <a:t>mutex</a:t>
-            </a:r>
-            <a:endParaRPr lang="en-US" sz="2000" dirty="0"/>
-          </a:p>
-        </p:txBody>
-      </p:sp>
-      <p:sp>
-        <p:nvSpPr>
-          <p:cNvPr id="15" name="pad"/>
-          <p:cNvSpPr/>
-          <p:nvPr/>
-        </p:nvSpPr>
-        <p:spPr>
-          <a:xfrm>
-            <a:off x="548640" y="5157216"/>
-            <a:ext cx="566928" cy="566928"/>
-          </a:xfrm>
-          <a:prstGeom prst="ellipse">
-            <a:avLst/>
-          </a:prstGeom>
-          <a:solidFill>
-            <a:schemeClr val="bg1"/>
-          </a:solidFill>
-          <a:ln w="28575">
-            <a:solidFill>
-              <a:schemeClr val="accent2"/>
-            </a:solidFill>
-            <a:prstDash val="solid"/>
-          </a:ln>
-        </p:spPr>
-      </p:sp>
-      <p:pic>
-        <p:nvPicPr>
-          <p:cNvPr id="16" name="ikon-bug" descr="preencoded.png">    </p:cNvPr>
-          <p:cNvPicPr>
-            <a:picLocks noChangeAspect="1"/>
-          </p:cNvPicPr>
-          <p:nvPr/>
-        </p:nvPicPr>
-        <p:blipFill>
-          <a:blip r:embed="rId5"/>
-          <a:stretch>
-            <a:fillRect/>
-          </a:stretch>
-        </p:blipFill>
-        <p:spPr>
-          <a:xfrm>
-            <a:off x="690372" y="5298948"/>
-            <a:ext cx="283464" cy="283464"/>
-          </a:xfrm>
-          <a:prstGeom prst="rect">
-            <a:avLst/>
-          </a:prstGeom>
-        </p:spPr>
-      </p:pic>
-      <p:sp>
-        <p:nvSpPr>
-          <p:cNvPr id="17" name="Text 10"/>
-          <p:cNvSpPr txBox="1"/>
-          <p:nvPr/>
-        </p:nvSpPr>
-        <p:spPr>
-          <a:xfrm>
-            <a:off x="1325880" y="4983480"/>
-            <a:ext cx="10317175" cy="914400"/>
-          </a:xfrm>
-          <a:prstGeom prst="rect">
-            <a:avLst/>
-          </a:prstGeom>
-          <a:noFill/>
-          <a:ln/>
-        </p:spPr>
-        <p:txBody>
-          <a:bodyPr wrap="square" lIns="0" tIns="0" rIns="0" bIns="0" rtlCol="0" anchor="ctr"/>
-          <a:lstStyle/>
-          <a:p>
-            <a:pPr indent="0" marL="0">
-              <a:buNone/>
-            </a:pPr>
-            <a:r>
-              <a:rPr lang="en-US" sz="2000" dirty="0">
-                <a:solidFill>
-                  <a:schemeClr val="tx1"/>
-                </a:solidFill>
-              </a:rPr>
-              <a:t>Mengenali kesalahan umum: stack kekecilan, watchdog, dan API di ISR</a:t>
-            </a:r>
-            <a:endParaRPr lang="en-US" sz="2000" dirty="0"/>
-          </a:p>
-        </p:txBody>
-      </p:sp>
-      <p:sp>
-        <p:nvSpPr>
-          <p:cNvPr id="25" name="Slide Number Placeholder 0"/>
-          <p:cNvSpPr>
-            <a:spLocks noGrp="1"/>
-          </p:cNvSpPr>
-          <p:nvPr>
-            <p:ph type="sldNum" sz="quarter" idx="4294967295"/>
-          </p:nvPr>
-        </p:nvSpPr>
-        <p:spPr>
-          <a:xfrm>
-            <a:off x="11094415" y="6400800"/>
-            <a:ext cx="548640" cy="274320"/>
-          </a:xfrm>
-          <a:prstGeom prst="rect">
-            <a:avLst/>
-          </a:prstGeom>
-          <a:extLst>
-            <a:ext uri="{C572A759-6A51-4108-AA02-DFA0A04FC94B}">
-              <ma14:wrappingTextBoxFlag xmlns:ma14="http://schemas.microsoft.com/office/mac/drawingml/2011/main" val="0"/>
-            </a:ext>
-          </a:extLst>
-        </p:spPr>
-        <p:txBody>
-          <a:bodyPr/>
-          <a:lstStyle>
-            <a:lvl1pPr>
-              <a:defRPr sz="1000">
-                <a:solidFill>
-                  <a:srgbClr val="5F6F67"/>
-                </a:solidFill>
-              </a:defRPr>
-            </a:lvl1pPr>
-          </a:lstStyle>
-          <a:p>
-            <a:pPr algn="r"/>
-            <a:fld id="{F7021451-1387-4CA6-816F-3879F97B5CBC}" type="slidenum">
-              <a:rPr b="0" lang="en-US"/>
-              <a:t>2</a:t>
-            </a:fld>
-            <a:endParaRPr lang="en-US"/>
-          </a:p>
-        </p:txBody>
-      </p:sp>
-    </p:spTree>
-  </p:cSld>
-  <p:clrMapOvr>
-    <a:masterClrMapping/>
-  </p:clrMapOvr>
-</p:sld>
-</file>
-
-<file path=ppt/slides/slide20.xml><?xml version="1.0" encoding="utf-8"?>
-<p:sld xmlns:a="http://schemas.openxmlformats.org/drawingml/2006/main" xmlns:r="http://schemas.openxmlformats.org/officeDocument/2006/relationships" xmlns:p="http://schemas.openxmlformats.org/presentationml/2006/main">
-  <p:cSld name="Slide 20">
-    <p:spTree>
-      <p:nvGrpSpPr>
-        <p:cNvPr id="1" name=""/>
-        <p:cNvGrpSpPr/>
-        <p:nvPr/>
-      </p:nvGrpSpPr>
-      <p:grpSpPr>
-        <a:xfrm>
-          <a:off x="0" y="0"/>
-          <a:ext cx="0" cy="0"/>
-          <a:chOff x="0" y="0"/>
-          <a:chExt cx="0" cy="0"/>
-        </a:xfrm>
-      </p:grpSpPr>
-      <p:sp>
-        <p:nvSpPr>
-          <p:cNvPr id="2" name="Text 0"/>
-          <p:cNvSpPr/>
-          <p:nvPr>
-            <p:ph idx="100" type="title" hasCustomPrompt="1"/>
-          </p:nvPr>
-        </p:nvSpPr>
-        <p:spPr>
-          <a:xfrm>
-            <a:off x="548640" y="320040"/>
-            <a:ext cx="11094415" cy="777240"/>
-          </a:xfrm>
-          <a:prstGeom prst="rect">
-            <a:avLst/>
-          </a:prstGeom>
-          <a:noFill/>
-          <a:ln/>
-        </p:spPr>
-        <p:txBody>
-          <a:bodyPr wrap="square" lIns="0" tIns="0" rIns="0" bIns="0" rtlCol="0" anchor="ctr"/>
-          <a:lstStyle/>
-          <a:p>
-            <a:pPr algn="l" indent="0" marL="0">
-              <a:buNone/>
-            </a:pPr>
-            <a:r>
-              <a:rPr lang="en-US" sz="3000" b="1" dirty="0">
-                <a:solidFill>
-                  <a:schemeClr val="tx2"/>
-                </a:solidFill>
-              </a:rPr>
-              <a:t>Praktikum 1: Dua Task di Dua Inti</a:t>
-            </a:r>
-            <a:endParaRPr lang="en-US" sz="3000" dirty="0"/>
-          </a:p>
-        </p:txBody>
-      </p:sp>
-      <p:sp>
-        <p:nvSpPr>
-          <p:cNvPr id="3" name="daftar-poin"/>
-          <p:cNvSpPr txBox="1"/>
-          <p:nvPr/>
-        </p:nvSpPr>
-        <p:spPr>
-          <a:xfrm>
-            <a:off x="548640" y="1325880"/>
-            <a:ext cx="5403336" cy="4846320"/>
-          </a:xfrm>
-          <a:prstGeom prst="rect">
-            <a:avLst/>
-          </a:prstGeom>
-          <a:noFill/>
-          <a:ln/>
-        </p:spPr>
-        <p:txBody>
-          <a:bodyPr wrap="square" lIns="25400" tIns="25400" rIns="50800" bIns="25400" rtlCol="0" anchor="t"/>
-          <a:lstStyle/>
-          <a:p>
-            <a:pPr marL="279400" indent="-279400">
-              <a:spcAft>
-                <a:spcPts val="1000"/>
-              </a:spcAft>
-              <a:buSzPct val="100000"/>
-              <a:buChar char="•"/>
-            </a:pPr>
-            <a:r>
-              <a:rPr lang="en-US" sz="2000" dirty="0">
-                <a:solidFill>
-                  <a:schemeClr val="tx1"/>
-                </a:solidFill>
-              </a:rPr>
-              <a:t>LED + resistor 220 Ω di </a:t>
-            </a:r>
-            <a:r>
-              <a:rPr lang="en-US" sz="2000" b="1" dirty="0">
-                <a:solidFill>
-                  <a:schemeClr val="tx1"/>
-                </a:solidFill>
-              </a:rPr>
-              <a:t>GPIO 23</a:t>
-            </a:r>
-            <a:endParaRPr lang="en-US" sz="2000" dirty="0"/>
-          </a:p>
-          <a:p>
-            <a:pPr marL="279400" indent="-279400">
-              <a:spcAft>
-                <a:spcPts val="1000"/>
-              </a:spcAft>
-              <a:buSzPct val="100000"/>
-              <a:buChar char="•"/>
-            </a:pPr>
-            <a:r>
-              <a:rPr lang="en-US" sz="2000" dirty="0">
-                <a:solidFill>
-                  <a:schemeClr val="tx1"/>
-                </a:solidFill>
-              </a:rPr>
-              <a:t>Task </a:t>
-            </a:r>
-            <a:r>
-              <a:rPr lang="en-US" sz="2000" b="1" dirty="0">
-                <a:solidFill>
-                  <a:schemeClr val="tx1"/>
-                </a:solidFill>
-              </a:rPr>
-              <a:t>Kedip</a:t>
-            </a:r>
-            <a:r>
-              <a:rPr lang="en-US" sz="2000" dirty="0">
-                <a:solidFill>
-                  <a:schemeClr val="tx1"/>
-                </a:solidFill>
-              </a:rPr>
-              <a:t> (inti 0): kedip tiap 0,5 s</a:t>
-            </a:r>
-            <a:endParaRPr lang="en-US" sz="2000" dirty="0"/>
-          </a:p>
-          <a:p>
-            <a:pPr marL="279400" indent="-279400">
-              <a:spcAft>
-                <a:spcPts val="1000"/>
-              </a:spcAft>
-              <a:buSzPct val="100000"/>
-              <a:buChar char="•"/>
-            </a:pPr>
-            <a:r>
-              <a:rPr lang="en-US" sz="2000" dirty="0">
-                <a:solidFill>
-                  <a:schemeClr val="tx1"/>
-                </a:solidFill>
-              </a:rPr>
-              <a:t>Task </a:t>
-            </a:r>
-            <a:r>
-              <a:rPr lang="en-US" sz="2000" b="1" dirty="0">
-                <a:solidFill>
-                  <a:schemeClr val="tx1"/>
-                </a:solidFill>
-              </a:rPr>
-              <a:t>Lapor</a:t>
-            </a:r>
-            <a:r>
-              <a:rPr lang="en-US" sz="2000" dirty="0">
-                <a:solidFill>
-                  <a:schemeClr val="tx1"/>
-                </a:solidFill>
-              </a:rPr>
-              <a:t> (inti 1): laporan tiap 2 s</a:t>
-            </a:r>
-            <a:endParaRPr lang="en-US" sz="2000" dirty="0"/>
-          </a:p>
-          <a:p>
-            <a:pPr marL="279400" indent="-279400">
-              <a:spcAft>
-                <a:spcPts val="1000"/>
-              </a:spcAft>
-              <a:buSzPct val="100000"/>
-              <a:buChar char="•"/>
-            </a:pPr>
-            <a:r>
-              <a:rPr lang="en-US" sz="2000" dirty="0">
-                <a:solidFill>
-                  <a:schemeClr val="tx1"/>
-                </a:solidFill>
-              </a:rPr>
-              <a:t>Hasil: </a:t>
-            </a:r>
-            <a:r>
-              <a:rPr lang="en-US" sz="2000" dirty="0">
-                <a:solidFill>
-                  <a:srgbClr val="A35F14"/>
-                </a:solidFill>
-                <a:latin typeface="Consolas" pitchFamily="34" charset="0"/>
-                <a:ea typeface="Consolas" pitchFamily="34" charset="-122"/>
-                <a:cs typeface="Consolas" pitchFamily="34" charset="-120"/>
-              </a:rPr>
-              <a:t>setup()</a:t>
-            </a:r>
-            <a:r>
-              <a:rPr lang="en-US" sz="2000" dirty="0">
-                <a:solidFill>
-                  <a:schemeClr val="tx1"/>
-                </a:solidFill>
-              </a:rPr>
-              <a:t> berjalan di </a:t>
-            </a:r>
-            <a:r>
-              <a:rPr lang="en-US" sz="2000" dirty="0">
-                <a:solidFill>
-                  <a:srgbClr val="A35F14"/>
-                </a:solidFill>
-                <a:latin typeface="Consolas" pitchFamily="34" charset="0"/>
-                <a:ea typeface="Consolas" pitchFamily="34" charset="-122"/>
-                <a:cs typeface="Consolas" pitchFamily="34" charset="-120"/>
-              </a:rPr>
-              <a:t>loopTask</a:t>
-            </a:r>
-            <a:r>
-              <a:rPr lang="en-US" sz="2000" dirty="0">
-                <a:solidFill>
-                  <a:schemeClr val="tx1"/>
-                </a:solidFill>
-              </a:rPr>
-              <a:t>, inti 1, prioritas 1</a:t>
-            </a:r>
-            <a:endParaRPr lang="en-US" sz="2000" dirty="0"/>
-          </a:p>
-          <a:p>
-            <a:pPr marL="279400" indent="-279400">
-              <a:spcAft>
-                <a:spcPts val="1000"/>
-              </a:spcAft>
-              <a:buSzPct val="100000"/>
-              <a:buChar char="•"/>
-            </a:pPr>
-            <a:r>
-              <a:rPr lang="en-US" sz="2000" dirty="0">
-                <a:solidFill>
-                  <a:schemeClr val="tx1"/>
-                </a:solidFill>
-              </a:rPr>
-              <a:t>Eksperimen: ganti jeda dengan busy-wait → watchdog</a:t>
-            </a:r>
-            <a:endParaRPr lang="en-US" sz="2000" dirty="0"/>
-          </a:p>
-        </p:txBody>
-      </p:sp>
-      <p:pic>
-        <p:nvPicPr>
-          <p:cNvPr id="4" name="gambar" descr="/home/claude/repo/pertemuan-12-freertos/gambar/p12-rangkaian-dua-task.png">    </p:cNvPr>
-          <p:cNvPicPr>
-            <a:picLocks noChangeAspect="1"/>
-          </p:cNvPicPr>
-          <p:nvPr/>
-        </p:nvPicPr>
-        <p:blipFill>
-          <a:blip r:embed="rId1"/>
-          <a:stretch>
-            <a:fillRect/>
-          </a:stretch>
-        </p:blipFill>
-        <p:spPr>
-          <a:xfrm>
-            <a:off x="6317736" y="2252293"/>
-            <a:ext cx="5325319" cy="2673454"/>
-          </a:xfrm>
-          <a:prstGeom prst="rect">
-            <a:avLst/>
-          </a:prstGeom>
-        </p:spPr>
-      </p:pic>
-      <p:sp>
-        <p:nvSpPr>
-          <p:cNvPr id="5" name="Text 2"/>
-          <p:cNvSpPr txBox="1"/>
-          <p:nvPr/>
-        </p:nvSpPr>
-        <p:spPr>
-          <a:xfrm>
-            <a:off x="6317736" y="4971467"/>
-            <a:ext cx="5325319" cy="274320"/>
-          </a:xfrm>
-          <a:prstGeom prst="rect">
-            <a:avLst/>
-          </a:prstGeom>
-          <a:noFill/>
-          <a:ln/>
-        </p:spPr>
-        <p:txBody>
-          <a:bodyPr wrap="square" lIns="0" tIns="0" rIns="0" bIns="0" rtlCol="0" anchor="t"/>
-          <a:lstStyle/>
-          <a:p>
-            <a:pPr indent="0" marL="0">
-              <a:buNone/>
-            </a:pPr>
-            <a:r>
-              <a:rPr lang="en-US" sz="1000" i="1" dirty="0">
-                <a:solidFill>
-                  <a:schemeClr val="accent5"/>
-                </a:solidFill>
-              </a:rPr>
-              <a:t>Gambar: @wokwi/elements (MIT)</a:t>
-            </a:r>
-            <a:endParaRPr lang="en-US" sz="1000" dirty="0"/>
-          </a:p>
-        </p:txBody>
-      </p:sp>
-      <p:sp>
-        <p:nvSpPr>
-          <p:cNvPr id="25" name="Slide Number Placeholder 0"/>
-          <p:cNvSpPr>
-            <a:spLocks noGrp="1"/>
-          </p:cNvSpPr>
-          <p:nvPr>
-            <p:ph type="sldNum" sz="quarter" idx="4294967295"/>
-          </p:nvPr>
-        </p:nvSpPr>
-        <p:spPr>
-          <a:xfrm>
-            <a:off x="11094415" y="6400800"/>
-            <a:ext cx="548640" cy="274320"/>
-          </a:xfrm>
-          <a:prstGeom prst="rect">
-            <a:avLst/>
-          </a:prstGeom>
-          <a:extLst>
-            <a:ext uri="{C572A759-6A51-4108-AA02-DFA0A04FC94B}">
-              <ma14:wrappingTextBoxFlag xmlns:ma14="http://schemas.microsoft.com/office/mac/drawingml/2011/main" val="0"/>
-            </a:ext>
-          </a:extLst>
-        </p:spPr>
-        <p:txBody>
-          <a:bodyPr/>
-          <a:lstStyle>
-            <a:lvl1pPr>
-              <a:defRPr sz="1000">
-                <a:solidFill>
-                  <a:srgbClr val="5F6F67"/>
-                </a:solidFill>
-              </a:defRPr>
-            </a:lvl1pPr>
-          </a:lstStyle>
-          <a:p>
-            <a:pPr algn="r"/>
-            <a:fld id="{F7021451-1387-4CA6-816F-3879F97B5CBC}" type="slidenum">
-              <a:rPr b="0" lang="en-US"/>
               <a:t>20</a:t>
             </a:fld>
             <a:endParaRPr lang="en-US"/>
@@ -9767,7 +9639,7 @@
                   <a:schemeClr val="tx2"/>
                 </a:solidFill>
               </a:rPr>
-              <a:t>Praktikum 2: Antrean Sensor ke Tampilan</a:t>
+              <a:t>Praktikum 1: Dua Task di Dua Inti</a:t>
             </a:r>
             <a:endParaRPr lang="en-US" sz="3000" dirty="0"/>
           </a:p>
@@ -9807,7 +9679,7 @@
                   <a:schemeClr val="tx1"/>
                 </a:solidFill>
               </a:rPr>
-              <a:t>Potensiometer 10 kΩ di </a:t>
+              <a:t>LED + resistor 220 Ω di </a:t>
             </a:r>
             <a:r>
               <a:rPr lang="en-US" sz="2000" b="1" dirty="0">
@@ -9815,15 +9687,7 @@
                   <a:schemeClr val="tx1"/>
                 </a:solidFill>
               </a:rPr>
-              <a:t>GPIO 34</a:t>
-            </a:r>
-            <a:r>
-              <a:rPr lang="en-US" sz="2000" dirty="0">
-                <a:solidFill>
-                  <a:schemeClr val="tx1"/>
-                </a:solidFill>
-              </a:rPr>
-              <a:t>, VCC ke 3V3</a:t>
+              <a:t>GPIO 23</a:t>
             </a:r>
             <a:endParaRPr lang="en-US" sz="2000" dirty="0"/>
           </a:p>
@@ -9849,7 +9713,7 @@
                   <a:schemeClr val="tx1"/>
                 </a:solidFill>
               </a:rPr>
-              <a:t>Baca</a:t>
+              <a:t>Kedip</a:t>
             </a:r>
             <a:r>
               <a:rPr lang="en-US" sz="2000" dirty="0">
@@ -9857,7 +9721,7 @@
                   <a:schemeClr val="tx1"/>
                 </a:solidFill>
               </a:rPr>
-              <a:t> (produsen, prioritas 2) tepat tiap 500 ms</a:t>
+              <a:t> (inti 0): kedip tiap 0,5 s</a:t>
             </a:r>
             <a:endParaRPr lang="en-US" sz="2000" dirty="0"/>
           </a:p>
@@ -9883,7 +9747,7 @@
                   <a:schemeClr val="tx1"/>
                 </a:solidFill>
               </a:rPr>
-              <a:t>Tampil</a:t>
+              <a:t>Lapor</a:t>
             </a:r>
             <a:r>
               <a:rPr lang="en-US" sz="2000" dirty="0">
@@ -9891,18 +9755,7 @@
                   <a:schemeClr val="tx1"/>
                 </a:solidFill>
               </a:rPr>
-              <a:t> (konsumen) menunggu dengan </a:t>
-            </a:r>
-            <a:r>
-              <a:rPr lang="en-US" sz="2000" dirty="0">
-                <a:solidFill>
-                  <a:srgbClr val="A35F14"/>
-                </a:solidFill>
-                <a:latin typeface="Consolas" pitchFamily="34" charset="0"/>
-                <a:ea typeface="Consolas" pitchFamily="34" charset="-122"/>
-                <a:cs typeface="Consolas" pitchFamily="34" charset="-120"/>
-              </a:rPr>
-              <a:t>portMAX_DELAY</a:t>
+              <a:t> (inti 1): laporan tiap 2 s</a:t>
             </a:r>
             <a:endParaRPr lang="en-US" sz="2000" dirty="0"/>
           </a:p>
@@ -9920,7 +9773,63 @@
                   <a:schemeClr val="tx1"/>
                 </a:solidFill>
               </a:rPr>
-              <a:t>Eksperimen: konsumen lambat → antrean penuh</a:t>
+              <a:t>Hasil: </a:t>
+            </a:r>
+            <a:r>
+              <a:rPr lang="en-US" sz="2000" dirty="0">
+                <a:solidFill>
+                  <a:srgbClr val="A35F14"/>
+                </a:solidFill>
+                <a:latin typeface="Consolas" pitchFamily="34" charset="0"/>
+                <a:ea typeface="Consolas" pitchFamily="34" charset="-122"/>
+                <a:cs typeface="Consolas" pitchFamily="34" charset="-120"/>
+              </a:rPr>
+              <a:t>setup()</a:t>
+            </a:r>
+            <a:r>
+              <a:rPr lang="en-US" sz="2000" dirty="0">
+                <a:solidFill>
+                  <a:schemeClr val="tx1"/>
+                </a:solidFill>
+              </a:rPr>
+              <a:t> berjalan di </a:t>
+            </a:r>
+            <a:r>
+              <a:rPr lang="en-US" sz="2000" dirty="0">
+                <a:solidFill>
+                  <a:srgbClr val="A35F14"/>
+                </a:solidFill>
+                <a:latin typeface="Consolas" pitchFamily="34" charset="0"/>
+                <a:ea typeface="Consolas" pitchFamily="34" charset="-122"/>
+                <a:cs typeface="Consolas" pitchFamily="34" charset="-120"/>
+              </a:rPr>
+              <a:t>loopTask</a:t>
+            </a:r>
+            <a:r>
+              <a:rPr lang="en-US" sz="2000" dirty="0">
+                <a:solidFill>
+                  <a:schemeClr val="tx1"/>
+                </a:solidFill>
+              </a:rPr>
+              <a:t>, inti 1, prioritas 1</a:t>
+            </a:r>
+            <a:endParaRPr lang="en-US" sz="2000" dirty="0"/>
+          </a:p>
+          <a:p>
+            <a:pPr marL="279400" indent="-279400">
+              <a:spcAft>
+                <a:spcPts val="1000"/>
+              </a:spcAft>
+              <a:buSzPct val="100000"/>
+              <a:buChar char="•"/>
+            </a:pPr>
+            <a:r>
+              <a:rPr lang="en-US" sz="2000" dirty="0">
+                <a:solidFill>
+                  <a:schemeClr val="tx1"/>
+                </a:solidFill>
+              </a:rPr>
+              <a:t>Eksperimen: ganti jeda dengan busy-wait → watchdog</a:t>
             </a:r>
             <a:endParaRPr lang="en-US" sz="2000" dirty="0"/>
           </a:p>
@@ -9928,7 +9837,7 @@
       </p:sp>
       <p:pic>
         <p:nvPicPr>
-          <p:cNvPr id="4" name="gambar" descr="/home/claude/repo/pertemuan-12-freertos/gambar/p12-rangkaian-queue-sensor.png">    </p:cNvPr>
+          <p:cNvPr id="4" name="gambar" descr="/home/claude/repo/pertemuan-12-freertos/gambar/p12-rangkaian-dua-task.png">    </p:cNvPr>
           <p:cNvPicPr>
             <a:picLocks noChangeAspect="1"/>
           </p:cNvPicPr>
@@ -9942,8 +9851,8 @@
         </p:blipFill>
         <p:spPr>
           <a:xfrm>
-            <a:off x="6317736" y="2200223"/>
-            <a:ext cx="5325319" cy="2777595"/>
+            <a:off x="6317736" y="2252293"/>
+            <a:ext cx="5325319" cy="2673454"/>
           </a:xfrm>
           <a:prstGeom prst="rect">
             <a:avLst/>
@@ -9958,7 +9867,7 @@
         </p:nvSpPr>
         <p:spPr>
           <a:xfrm>
-            <a:off x="6317736" y="5023537"/>
+            <a:off x="6317736" y="4971467"/>
             <a:ext cx="5325319" cy="274320"/>
           </a:xfrm>
           <a:prstGeom prst="rect">
@@ -10088,7 +9997,7 @@
                   <a:schemeClr val="tx2"/>
                 </a:solidFill>
               </a:rPr>
-              <a:t>Praktikum 3: Tanpa vs Dengan Mutex</a:t>
+              <a:t>Praktikum 2: Antrean Sensor ke Tampilan</a:t>
             </a:r>
             <a:endParaRPr lang="en-US" sz="3000" dirty="0"/>
           </a:p>
@@ -10096,59 +10005,160 @@
       </p:sp>
       <p:sp>
         <p:nvSpPr>
-          <p:cNvPr id="3" name="kartu"/>
-          <p:cNvSpPr/>
+          <p:cNvPr id="3" name="daftar-poin"/>
+          <p:cNvSpPr txBox="1"/>
           <p:nvPr/>
         </p:nvSpPr>
         <p:spPr>
           <a:xfrm>
-            <a:off x="548640" y="2423160"/>
-            <a:ext cx="5364328" cy="2377440"/>
-          </a:xfrm>
-          <a:prstGeom prst="roundRect">
-            <a:avLst>
-              <a:gd name="adj" fmla="val 4615"/>
-            </a:avLst>
-          </a:prstGeom>
-          <a:solidFill>
-            <a:srgbClr val="F3F5F4"/>
-          </a:solidFill>
-          <a:ln w="9525">
-            <a:solidFill>
-              <a:schemeClr val="bg2"/>
-            </a:solidFill>
-            <a:prstDash val="solid"/>
-          </a:ln>
-        </p:spPr>
-      </p:sp>
-      <p:sp>
-        <p:nvSpPr>
-          <p:cNvPr id="4" name="pad"/>
-          <p:cNvSpPr/>
-          <p:nvPr/>
-        </p:nvSpPr>
-        <p:spPr>
-          <a:xfrm>
-            <a:off x="822960" y="2651760"/>
-            <a:ext cx="566928" cy="566928"/>
-          </a:xfrm>
-          <a:prstGeom prst="ellipse">
-            <a:avLst/>
-          </a:prstGeom>
-          <a:solidFill>
-            <a:schemeClr val="bg1"/>
-          </a:solidFill>
-          <a:ln w="28575">
-            <a:solidFill>
-              <a:schemeClr val="accent2"/>
-            </a:solidFill>
-            <a:prstDash val="solid"/>
-          </a:ln>
-        </p:spPr>
+            <a:off x="548640" y="1325880"/>
+            <a:ext cx="5403336" cy="4846320"/>
+          </a:xfrm>
+          <a:prstGeom prst="rect">
+            <a:avLst/>
+          </a:prstGeom>
+          <a:noFill/>
+          <a:ln/>
+        </p:spPr>
+        <p:txBody>
+          <a:bodyPr wrap="square" lIns="25400" tIns="25400" rIns="50800" bIns="25400" rtlCol="0" anchor="t"/>
+          <a:lstStyle/>
+          <a:p>
+            <a:pPr marL="279400" indent="-279400">
+              <a:spcAft>
+                <a:spcPts val="1000"/>
+              </a:spcAft>
+              <a:buSzPct val="100000"/>
+              <a:buChar char="•"/>
+            </a:pPr>
+            <a:r>
+              <a:rPr lang="en-US" sz="2000" dirty="0">
+                <a:solidFill>
+                  <a:schemeClr val="tx1"/>
+                </a:solidFill>
+              </a:rPr>
+              <a:t>Potensiometer 10 kΩ di </a:t>
+            </a:r>
+            <a:r>
+              <a:rPr lang="en-US" sz="2000" b="1" dirty="0">
+                <a:solidFill>
+                  <a:schemeClr val="tx1"/>
+                </a:solidFill>
+              </a:rPr>
+              <a:t>GPIO 34</a:t>
+            </a:r>
+            <a:r>
+              <a:rPr lang="en-US" sz="2000" dirty="0">
+                <a:solidFill>
+                  <a:schemeClr val="tx1"/>
+                </a:solidFill>
+              </a:rPr>
+              <a:t>, VCC ke 3V3</a:t>
+            </a:r>
+            <a:endParaRPr lang="en-US" sz="2000" dirty="0"/>
+          </a:p>
+          <a:p>
+            <a:pPr marL="279400" indent="-279400">
+              <a:spcAft>
+                <a:spcPts val="1000"/>
+              </a:spcAft>
+              <a:buSzPct val="100000"/>
+              <a:buChar char="•"/>
+            </a:pPr>
+            <a:r>
+              <a:rPr lang="en-US" sz="2000" dirty="0">
+                <a:solidFill>
+                  <a:schemeClr val="tx1"/>
+                </a:solidFill>
+              </a:rPr>
+              <a:t>Task </a:t>
+            </a:r>
+            <a:r>
+              <a:rPr lang="en-US" sz="2000" b="1" dirty="0">
+                <a:solidFill>
+                  <a:schemeClr val="tx1"/>
+                </a:solidFill>
+              </a:rPr>
+              <a:t>Baca</a:t>
+            </a:r>
+            <a:r>
+              <a:rPr lang="en-US" sz="2000" dirty="0">
+                <a:solidFill>
+                  <a:schemeClr val="tx1"/>
+                </a:solidFill>
+              </a:rPr>
+              <a:t> (produsen, prioritas 2) tepat tiap 500 ms</a:t>
+            </a:r>
+            <a:endParaRPr lang="en-US" sz="2000" dirty="0"/>
+          </a:p>
+          <a:p>
+            <a:pPr marL="279400" indent="-279400">
+              <a:spcAft>
+                <a:spcPts val="1000"/>
+              </a:spcAft>
+              <a:buSzPct val="100000"/>
+              <a:buChar char="•"/>
+            </a:pPr>
+            <a:r>
+              <a:rPr lang="en-US" sz="2000" dirty="0">
+                <a:solidFill>
+                  <a:schemeClr val="tx1"/>
+                </a:solidFill>
+              </a:rPr>
+              <a:t>Task </a:t>
+            </a:r>
+            <a:r>
+              <a:rPr lang="en-US" sz="2000" b="1" dirty="0">
+                <a:solidFill>
+                  <a:schemeClr val="tx1"/>
+                </a:solidFill>
+              </a:rPr>
+              <a:t>Tampil</a:t>
+            </a:r>
+            <a:r>
+              <a:rPr lang="en-US" sz="2000" dirty="0">
+                <a:solidFill>
+                  <a:schemeClr val="tx1"/>
+                </a:solidFill>
+              </a:rPr>
+              <a:t> (konsumen) menunggu dengan </a:t>
+            </a:r>
+            <a:r>
+              <a:rPr lang="en-US" sz="2000" dirty="0">
+                <a:solidFill>
+                  <a:srgbClr val="A35F14"/>
+                </a:solidFill>
+                <a:latin typeface="Consolas" pitchFamily="34" charset="0"/>
+                <a:ea typeface="Consolas" pitchFamily="34" charset="-122"/>
+                <a:cs typeface="Consolas" pitchFamily="34" charset="-120"/>
+              </a:rPr>
+              <a:t>portMAX_DELAY</a:t>
+            </a:r>
+            <a:endParaRPr lang="en-US" sz="2000" dirty="0"/>
+          </a:p>
+          <a:p>
+            <a:pPr marL="279400" indent="-279400">
+              <a:spcAft>
+                <a:spcPts val="1000"/>
+              </a:spcAft>
+              <a:buSzPct val="100000"/>
+              <a:buChar char="•"/>
+            </a:pPr>
+            <a:r>
+              <a:rPr lang="en-US" sz="2000" dirty="0">
+                <a:solidFill>
+                  <a:schemeClr val="tx1"/>
+                </a:solidFill>
+              </a:rPr>
+              <a:t>Eksperimen: konsumen lambat → antrean penuh</a:t>
+            </a:r>
+            <a:endParaRPr lang="en-US" sz="2000" dirty="0"/>
+          </a:p>
+        </p:txBody>
       </p:sp>
       <p:pic>
         <p:nvPicPr>
-          <p:cNvPr id="5" name="ikon-random" descr="preencoded.png">    </p:cNvPr>
+          <p:cNvPr id="4" name="gambar" descr="/home/claude/repo/pertemuan-12-freertos/gambar/p12-rangkaian-queue-sensor.png">    </p:cNvPr>
           <p:cNvPicPr>
             <a:picLocks noChangeAspect="1"/>
           </p:cNvPicPr>
@@ -10162,8 +10172,8 @@
         </p:blipFill>
         <p:spPr>
           <a:xfrm>
-            <a:off x="964692" y="2793492"/>
-            <a:ext cx="283464" cy="283464"/>
+            <a:off x="6317736" y="2200223"/>
+            <a:ext cx="5325319" cy="2777595"/>
           </a:xfrm>
           <a:prstGeom prst="rect">
             <a:avLst/>
@@ -10172,14 +10182,14 @@
       </p:pic>
       <p:sp>
         <p:nvSpPr>
-          <p:cNvPr id="6" name="Text 3"/>
+          <p:cNvPr id="5" name="Text 2"/>
           <p:cNvSpPr txBox="1"/>
           <p:nvPr/>
         </p:nvSpPr>
         <p:spPr>
           <a:xfrm>
-            <a:off x="1554480" y="2651760"/>
-            <a:ext cx="4084168" cy="566928"/>
+            <a:off x="6317736" y="5023537"/>
+            <a:ext cx="5325319" cy="274320"/>
           </a:xfrm>
           <a:prstGeom prst="rect">
             <a:avLst/>
@@ -10188,296 +10198,21 @@
           <a:ln/>
         </p:spPr>
         <p:txBody>
-          <a:bodyPr wrap="square" lIns="0" tIns="0" rIns="0" bIns="0" rtlCol="0" anchor="ctr"/>
+          <a:bodyPr wrap="square" lIns="0" tIns="0" rIns="0" bIns="0" rtlCol="0" anchor="t"/>
           <a:lstStyle/>
           <a:p>
             <a:pPr indent="0" marL="0">
               <a:buNone/>
             </a:pPr>
             <a:r>
-              <a:rPr lang="en-US" sz="2200" b="1" dirty="0">
-                <a:solidFill>
-                  <a:schemeClr val="tx2"/>
-                </a:solidFill>
-              </a:rPr>
-              <a:t>PAKAI_MUTEX = false</a:t>
-            </a:r>
-            <a:endParaRPr lang="en-US" sz="2200" dirty="0"/>
-          </a:p>
-        </p:txBody>
-      </p:sp>
-      <p:sp>
-        <p:nvSpPr>
-          <p:cNvPr id="7" name="daftar-poin"/>
-          <p:cNvSpPr txBox="1"/>
-          <p:nvPr/>
-        </p:nvSpPr>
-        <p:spPr>
-          <a:xfrm>
-            <a:off x="822960" y="3383280"/>
-            <a:ext cx="4815688" cy="1280160"/>
-          </a:xfrm>
-          <a:prstGeom prst="rect">
-            <a:avLst/>
-          </a:prstGeom>
-          <a:noFill/>
-          <a:ln/>
-        </p:spPr>
-        <p:txBody>
-          <a:bodyPr wrap="square" lIns="25400" tIns="25400" rIns="50800" bIns="25400" rtlCol="0" anchor="t"/>
-          <a:lstStyle/>
-          <a:p>
-            <a:pPr marL="279400" indent="-279400">
-              <a:spcAft>
-                <a:spcPts val="1000"/>
-              </a:spcAft>
-              <a:buSzPct val="100000"/>
-              <a:buChar char="•"/>
-            </a:pPr>
-            <a:r>
-              <a:rPr lang="en-US" sz="1800" dirty="0">
-                <a:solidFill>
-                  <a:schemeClr val="tx1"/>
-                </a:solidFill>
-              </a:rPr>
-              <a:t>Dua task mencetak huruf demi huruf</a:t>
-            </a:r>
-            <a:endParaRPr lang="en-US" sz="1800" dirty="0"/>
-          </a:p>
-          <a:p>
-            <a:pPr marL="279400" indent="-279400">
-              <a:spcAft>
-                <a:spcPts val="1000"/>
-              </a:spcAft>
-              <a:buSzPct val="100000"/>
-              <a:buChar char="•"/>
-            </a:pPr>
-            <a:r>
-              <a:rPr lang="en-US" sz="1800" dirty="0">
-                <a:solidFill>
-                  <a:schemeClr val="tx1"/>
-                </a:solidFill>
-              </a:rPr>
-              <a:t>Contoh: </a:t>
-            </a:r>
-            <a:r>
-              <a:rPr lang="en-US" sz="1800" dirty="0">
-                <a:solidFill>
-                  <a:srgbClr val="A35F14"/>
-                </a:solidFill>
-                <a:latin typeface="Consolas" pitchFamily="34" charset="0"/>
-                <a:ea typeface="Consolas" pitchFamily="34" charset="-122"/>
-                <a:cs typeface="Consolas" pitchFamily="34" charset="-120"/>
-              </a:rPr>
-              <a:t>[A0[1] TaBs0k 1A ]m ...</a:t>
-            </a:r>
-            <a:endParaRPr lang="en-US" sz="1800" dirty="0"/>
-          </a:p>
-          <a:p>
-            <a:pPr marL="279400" indent="-279400">
-              <a:spcAft>
-                <a:spcPts val="1000"/>
-              </a:spcAft>
-              <a:buSzPct val="100000"/>
-              <a:buChar char="•"/>
-            </a:pPr>
-            <a:r>
-              <a:rPr lang="en-US" sz="1800" dirty="0">
-                <a:solidFill>
-                  <a:schemeClr val="tx1"/>
-                </a:solidFill>
-              </a:rPr>
-              <a:t>Pola campuran berubah tiap kali</a:t>
-            </a:r>
-            <a:endParaRPr lang="en-US" sz="1800" dirty="0"/>
-          </a:p>
-        </p:txBody>
-      </p:sp>
-      <p:sp>
-        <p:nvSpPr>
-          <p:cNvPr id="8" name="kartu"/>
-          <p:cNvSpPr/>
-          <p:nvPr/>
-        </p:nvSpPr>
-        <p:spPr>
-          <a:xfrm>
-            <a:off x="6278728" y="2423160"/>
-            <a:ext cx="5364328" cy="2377440"/>
-          </a:xfrm>
-          <a:prstGeom prst="roundRect">
-            <a:avLst>
-              <a:gd name="adj" fmla="val 4615"/>
-            </a:avLst>
-          </a:prstGeom>
-          <a:solidFill>
-            <a:srgbClr val="EEF5F1"/>
-          </a:solidFill>
-          <a:ln w="9525">
-            <a:solidFill>
-              <a:schemeClr val="bg2"/>
-            </a:solidFill>
-            <a:prstDash val="solid"/>
-          </a:ln>
-        </p:spPr>
-      </p:sp>
-      <p:sp>
-        <p:nvSpPr>
-          <p:cNvPr id="9" name="pad"/>
-          <p:cNvSpPr/>
-          <p:nvPr/>
-        </p:nvSpPr>
-        <p:spPr>
-          <a:xfrm>
-            <a:off x="6553048" y="2651760"/>
-            <a:ext cx="566928" cy="566928"/>
-          </a:xfrm>
-          <a:prstGeom prst="ellipse">
-            <a:avLst/>
-          </a:prstGeom>
-          <a:solidFill>
-            <a:schemeClr val="bg1"/>
-          </a:solidFill>
-          <a:ln w="28575">
-            <a:solidFill>
-              <a:schemeClr val="accent2"/>
-            </a:solidFill>
-            <a:prstDash val="solid"/>
-          </a:ln>
-        </p:spPr>
-      </p:sp>
-      <p:pic>
-        <p:nvPicPr>
-          <p:cNvPr id="10" name="ikon-lock" descr="preencoded.png">    </p:cNvPr>
-          <p:cNvPicPr>
-            <a:picLocks noChangeAspect="1"/>
-          </p:cNvPicPr>
-          <p:nvPr/>
-        </p:nvPicPr>
-        <p:blipFill>
-          <a:blip r:embed="rId2"/>
-          <a:stretch>
-            <a:fillRect/>
-          </a:stretch>
-        </p:blipFill>
-        <p:spPr>
-          <a:xfrm>
-            <a:off x="6694780" y="2793492"/>
-            <a:ext cx="283464" cy="283464"/>
-          </a:xfrm>
-          <a:prstGeom prst="rect">
-            <a:avLst/>
-          </a:prstGeom>
-        </p:spPr>
-      </p:pic>
-      <p:sp>
-        <p:nvSpPr>
-          <p:cNvPr id="11" name="Text 7"/>
-          <p:cNvSpPr txBox="1"/>
-          <p:nvPr/>
-        </p:nvSpPr>
-        <p:spPr>
-          <a:xfrm>
-            <a:off x="7284568" y="2651760"/>
-            <a:ext cx="4084168" cy="566928"/>
-          </a:xfrm>
-          <a:prstGeom prst="rect">
-            <a:avLst/>
-          </a:prstGeom>
-          <a:noFill/>
-          <a:ln/>
-        </p:spPr>
-        <p:txBody>
-          <a:bodyPr wrap="square" lIns="0" tIns="0" rIns="0" bIns="0" rtlCol="0" anchor="ctr"/>
-          <a:lstStyle/>
-          <a:p>
-            <a:pPr indent="0" marL="0">
-              <a:buNone/>
-            </a:pPr>
-            <a:r>
-              <a:rPr lang="en-US" sz="2200" b="1" dirty="0">
-                <a:solidFill>
-                  <a:schemeClr val="tx2"/>
-                </a:solidFill>
-              </a:rPr>
-              <a:t>PAKAI_MUTEX = true</a:t>
-            </a:r>
-            <a:endParaRPr lang="en-US" sz="2200" dirty="0"/>
-          </a:p>
-        </p:txBody>
-      </p:sp>
-      <p:sp>
-        <p:nvSpPr>
-          <p:cNvPr id="12" name="daftar-poin"/>
-          <p:cNvSpPr txBox="1"/>
-          <p:nvPr/>
-        </p:nvSpPr>
-        <p:spPr>
-          <a:xfrm>
-            <a:off x="6553048" y="3383280"/>
-            <a:ext cx="4815688" cy="1280160"/>
-          </a:xfrm>
-          <a:prstGeom prst="rect">
-            <a:avLst/>
-          </a:prstGeom>
-          <a:noFill/>
-          <a:ln/>
-        </p:spPr>
-        <p:txBody>
-          <a:bodyPr wrap="square" lIns="25400" tIns="25400" rIns="50800" bIns="25400" rtlCol="0" anchor="t"/>
-          <a:lstStyle/>
-          <a:p>
-            <a:pPr marL="279400" indent="-279400">
-              <a:spcAft>
-                <a:spcPts val="1000"/>
-              </a:spcAft>
-              <a:buSzPct val="100000"/>
-              <a:buChar char="•"/>
-            </a:pPr>
-            <a:r>
-              <a:rPr lang="en-US" sz="1800" dirty="0">
-                <a:solidFill>
-                  <a:schemeClr val="tx1"/>
-                </a:solidFill>
-              </a:rPr>
-              <a:t>Ambil kunci sebelum mencetak</a:t>
-            </a:r>
-            <a:endParaRPr lang="en-US" sz="1800" dirty="0"/>
-          </a:p>
-          <a:p>
-            <a:pPr marL="279400" indent="-279400">
-              <a:spcAft>
-                <a:spcPts val="1000"/>
-              </a:spcAft>
-              <a:buSzPct val="100000"/>
-              <a:buChar char="•"/>
-            </a:pPr>
-            <a:r>
-              <a:rPr lang="en-US" sz="1800" dirty="0">
-                <a:solidFill>
-                  <a:schemeClr val="tx1"/>
-                </a:solidFill>
-              </a:rPr>
-              <a:t>Setiap baris utuh</a:t>
-            </a:r>
-            <a:endParaRPr lang="en-US" sz="1800" dirty="0"/>
-          </a:p>
-          <a:p>
-            <a:pPr marL="279400" indent="-279400">
-              <a:spcAft>
-                <a:spcPts val="1000"/>
-              </a:spcAft>
-              <a:buSzPct val="100000"/>
-              <a:buChar char="•"/>
-            </a:pPr>
-            <a:r>
-              <a:rPr lang="en-US" sz="1800" dirty="0">
-                <a:solidFill>
-                  <a:schemeClr val="tx1"/>
-                </a:solidFill>
-              </a:rPr>
-              <a:t>Urutan baris A dan B boleh bertukar</a:t>
-            </a:r>
-            <a:endParaRPr lang="en-US" sz="1800" dirty="0"/>
+              <a:rPr lang="en-US" sz="1000" i="1" dirty="0">
+                <a:solidFill>
+                  <a:schemeClr val="accent5"/>
+                </a:solidFill>
+              </a:rPr>
+              <a:t>Gambar: @wokwi/elements (MIT)</a:t>
+            </a:r>
+            <a:endParaRPr lang="en-US" sz="1000" dirty="0"/>
           </a:p>
         </p:txBody>
       </p:sp>
@@ -10583,7 +10318,7 @@
                   <a:schemeClr val="tx2"/>
                 </a:solidFill>
               </a:rPr>
-              <a:t>Kuis Cepat</a:t>
+              <a:t>Praktikum 3: Tanpa vs Dengan Mutex</a:t>
             </a:r>
             <a:endParaRPr lang="en-US" sz="3000" dirty="0"/>
           </a:p>
@@ -10591,14 +10326,41 @@
       </p:sp>
       <p:sp>
         <p:nvSpPr>
-          <p:cNvPr id="3" name="pad"/>
+          <p:cNvPr id="3" name="kartu"/>
           <p:cNvSpPr/>
           <p:nvPr/>
         </p:nvSpPr>
         <p:spPr>
           <a:xfrm>
-            <a:off x="548640" y="1371600"/>
-            <a:ext cx="685800" cy="685800"/>
+            <a:off x="548640" y="2423160"/>
+            <a:ext cx="5364328" cy="2377440"/>
+          </a:xfrm>
+          <a:prstGeom prst="roundRect">
+            <a:avLst>
+              <a:gd name="adj" fmla="val 4615"/>
+            </a:avLst>
+          </a:prstGeom>
+          <a:solidFill>
+            <a:srgbClr val="F3F5F4"/>
+          </a:solidFill>
+          <a:ln w="9525">
+            <a:solidFill>
+              <a:schemeClr val="bg2"/>
+            </a:solidFill>
+            <a:prstDash val="solid"/>
+          </a:ln>
+        </p:spPr>
+      </p:sp>
+      <p:sp>
+        <p:nvSpPr>
+          <p:cNvPr id="4" name="pad"/>
+          <p:cNvSpPr/>
+          <p:nvPr/>
+        </p:nvSpPr>
+        <p:spPr>
+          <a:xfrm>
+            <a:off x="822960" y="2651760"/>
+            <a:ext cx="566928" cy="566928"/>
           </a:xfrm>
           <a:prstGeom prst="ellipse">
             <a:avLst/>
@@ -10616,7 +10378,7 @@
       </p:sp>
       <p:pic>
         <p:nvPicPr>
-          <p:cNvPr id="4" name="ikon-question" descr="preencoded.png">    </p:cNvPr>
+          <p:cNvPr id="5" name="ikon-random" descr="preencoded.png">    </p:cNvPr>
           <p:cNvPicPr>
             <a:picLocks noChangeAspect="1"/>
           </p:cNvPicPr>
@@ -10630,8 +10392,8 @@
         </p:blipFill>
         <p:spPr>
           <a:xfrm>
-            <a:off x="720090" y="1543050"/>
-            <a:ext cx="342900" cy="342900"/>
+            <a:off x="964692" y="2793492"/>
+            <a:ext cx="283464" cy="283464"/>
           </a:xfrm>
           <a:prstGeom prst="rect">
             <a:avLst/>
@@ -10640,14 +10402,14 @@
       </p:pic>
       <p:sp>
         <p:nvSpPr>
-          <p:cNvPr id="5" name="Text 2"/>
+          <p:cNvPr id="6" name="Text 3"/>
           <p:cNvSpPr txBox="1"/>
           <p:nvPr/>
         </p:nvSpPr>
         <p:spPr>
           <a:xfrm>
-            <a:off x="1463040" y="1325880"/>
-            <a:ext cx="10180015" cy="914400"/>
+            <a:off x="1554480" y="2651760"/>
+            <a:ext cx="4084168" cy="566928"/>
           </a:xfrm>
           <a:prstGeom prst="rect">
             <a:avLst/>
@@ -10665,33 +10427,120 @@
             <a:r>
               <a:rPr lang="en-US" sz="2200" b="1" dirty="0">
                 <a:solidFill>
+                  <a:schemeClr val="tx2"/>
+                </a:solidFill>
+              </a:rPr>
+              <a:t>PAKAI_MUTEX = false</a:t>
+            </a:r>
+            <a:endParaRPr lang="en-US" sz="2200" dirty="0"/>
+          </a:p>
+        </p:txBody>
+      </p:sp>
+      <p:sp>
+        <p:nvSpPr>
+          <p:cNvPr id="7" name="daftar-poin"/>
+          <p:cNvSpPr txBox="1"/>
+          <p:nvPr/>
+        </p:nvSpPr>
+        <p:spPr>
+          <a:xfrm>
+            <a:off x="822960" y="3383280"/>
+            <a:ext cx="4815688" cy="1280160"/>
+          </a:xfrm>
+          <a:prstGeom prst="rect">
+            <a:avLst/>
+          </a:prstGeom>
+          <a:noFill/>
+          <a:ln/>
+        </p:spPr>
+        <p:txBody>
+          <a:bodyPr wrap="square" lIns="25400" tIns="25400" rIns="50800" bIns="25400" rtlCol="0" anchor="t"/>
+          <a:lstStyle/>
+          <a:p>
+            <a:pPr marL="279400" indent="-279400">
+              <a:spcAft>
+                <a:spcPts val="1000"/>
+              </a:spcAft>
+              <a:buSzPct val="100000"/>
+              <a:buChar char="•"/>
+            </a:pPr>
+            <a:r>
+              <a:rPr lang="en-US" sz="1800" dirty="0">
+                <a:solidFill>
                   <a:schemeClr val="tx1"/>
                 </a:solidFill>
               </a:rPr>
-              <a:t>Task A (prioritas 1) sedang berjalan, lalu Task B (prioritas 3) di inti yang sama menjadi Ready. Apa yang terjadi?</a:t>
-            </a:r>
-            <a:endParaRPr lang="en-US" sz="2200" dirty="0"/>
-          </a:p>
-        </p:txBody>
-      </p:sp>
-      <p:sp>
-        <p:nvSpPr>
-          <p:cNvPr id="6" name="kartu"/>
+              <a:t>Dua task mencetak huruf demi huruf</a:t>
+            </a:r>
+            <a:endParaRPr lang="en-US" sz="1800" dirty="0"/>
+          </a:p>
+          <a:p>
+            <a:pPr marL="279400" indent="-279400">
+              <a:spcAft>
+                <a:spcPts val="1000"/>
+              </a:spcAft>
+              <a:buSzPct val="100000"/>
+              <a:buChar char="•"/>
+            </a:pPr>
+            <a:r>
+              <a:rPr lang="en-US" sz="1800" dirty="0">
+                <a:solidFill>
+                  <a:schemeClr val="tx1"/>
+                </a:solidFill>
+              </a:rPr>
+              <a:t>Contoh: </a:t>
+            </a:r>
+            <a:r>
+              <a:rPr lang="en-US" sz="1800" dirty="0">
+                <a:solidFill>
+                  <a:srgbClr val="A35F14"/>
+                </a:solidFill>
+                <a:latin typeface="Consolas" pitchFamily="34" charset="0"/>
+                <a:ea typeface="Consolas" pitchFamily="34" charset="-122"/>
+                <a:cs typeface="Consolas" pitchFamily="34" charset="-120"/>
+              </a:rPr>
+              <a:t>[A0[1] TaBs0k 1A ]m ...</a:t>
+            </a:r>
+            <a:endParaRPr lang="en-US" sz="1800" dirty="0"/>
+          </a:p>
+          <a:p>
+            <a:pPr marL="279400" indent="-279400">
+              <a:spcAft>
+                <a:spcPts val="1000"/>
+              </a:spcAft>
+              <a:buSzPct val="100000"/>
+              <a:buChar char="•"/>
+            </a:pPr>
+            <a:r>
+              <a:rPr lang="en-US" sz="1800" dirty="0">
+                <a:solidFill>
+                  <a:schemeClr val="tx1"/>
+                </a:solidFill>
+              </a:rPr>
+              <a:t>Pola campuran berubah tiap kali</a:t>
+            </a:r>
+            <a:endParaRPr lang="en-US" sz="1800" dirty="0"/>
+          </a:p>
+        </p:txBody>
+      </p:sp>
+      <p:sp>
+        <p:nvSpPr>
+          <p:cNvPr id="8" name="kartu"/>
           <p:cNvSpPr/>
           <p:nvPr/>
         </p:nvSpPr>
         <p:spPr>
           <a:xfrm>
-            <a:off x="548640" y="2514600"/>
-            <a:ext cx="5410048" cy="1143000"/>
+            <a:off x="6278728" y="2423160"/>
+            <a:ext cx="5364328" cy="2377440"/>
           </a:xfrm>
           <a:prstGeom prst="roundRect">
             <a:avLst>
-              <a:gd name="adj" fmla="val 9600"/>
+              <a:gd name="adj" fmla="val 4615"/>
             </a:avLst>
           </a:prstGeom>
           <a:solidFill>
-            <a:schemeClr val="bg2"/>
+            <a:srgbClr val="EEF5F1"/>
           </a:solidFill>
           <a:ln w="9525">
             <a:solidFill>
@@ -10703,14 +10552,63 @@
       </p:sp>
       <p:sp>
         <p:nvSpPr>
-          <p:cNvPr id="7" name="Text 4"/>
+          <p:cNvPr id="9" name="pad"/>
+          <p:cNvSpPr/>
+          <p:nvPr/>
+        </p:nvSpPr>
+        <p:spPr>
+          <a:xfrm>
+            <a:off x="6553048" y="2651760"/>
+            <a:ext cx="566928" cy="566928"/>
+          </a:xfrm>
+          <a:prstGeom prst="ellipse">
+            <a:avLst/>
+          </a:prstGeom>
+          <a:solidFill>
+            <a:schemeClr val="bg1"/>
+          </a:solidFill>
+          <a:ln w="28575">
+            <a:solidFill>
+              <a:schemeClr val="accent2"/>
+            </a:solidFill>
+            <a:prstDash val="solid"/>
+          </a:ln>
+        </p:spPr>
+      </p:sp>
+      <p:pic>
+        <p:nvPicPr>
+          <p:cNvPr id="10" name="ikon-lock" descr="preencoded.png">    </p:cNvPr>
+          <p:cNvPicPr>
+            <a:picLocks noChangeAspect="1"/>
+          </p:cNvPicPr>
+          <p:nvPr/>
+        </p:nvPicPr>
+        <p:blipFill>
+          <a:blip r:embed="rId2"/>
+          <a:stretch>
+            <a:fillRect/>
+          </a:stretch>
+        </p:blipFill>
+        <p:spPr>
+          <a:xfrm>
+            <a:off x="6694780" y="2793492"/>
+            <a:ext cx="283464" cy="283464"/>
+          </a:xfrm>
+          <a:prstGeom prst="rect">
+            <a:avLst/>
+          </a:prstGeom>
+        </p:spPr>
+      </p:pic>
+      <p:sp>
+        <p:nvSpPr>
+          <p:cNvPr id="11" name="Text 7"/>
           <p:cNvSpPr txBox="1"/>
           <p:nvPr/>
         </p:nvSpPr>
         <p:spPr>
           <a:xfrm>
-            <a:off x="731520" y="2514600"/>
-            <a:ext cx="548640" cy="1143000"/>
+            <a:off x="7284568" y="2651760"/>
+            <a:ext cx="4084168" cy="566928"/>
           </a:xfrm>
           <a:prstGeom prst="rect">
             <a:avLst/>
@@ -10726,27 +10624,27 @@
               <a:buNone/>
             </a:pPr>
             <a:r>
-              <a:rPr lang="en-US" sz="2600" b="1" dirty="0">
-                <a:solidFill>
-                  <a:schemeClr val="accent2"/>
-                </a:solidFill>
-              </a:rPr>
-              <a:t>A</a:t>
-            </a:r>
-            <a:endParaRPr lang="en-US" sz="2600" dirty="0"/>
-          </a:p>
-        </p:txBody>
-      </p:sp>
-      <p:sp>
-        <p:nvSpPr>
-          <p:cNvPr id="8" name="Text 5"/>
+              <a:rPr lang="en-US" sz="2200" b="1" dirty="0">
+                <a:solidFill>
+                  <a:schemeClr val="tx2"/>
+                </a:solidFill>
+              </a:rPr>
+              <a:t>PAKAI_MUTEX = true</a:t>
+            </a:r>
+            <a:endParaRPr lang="en-US" sz="2200" dirty="0"/>
+          </a:p>
+        </p:txBody>
+      </p:sp>
+      <p:sp>
+        <p:nvSpPr>
+          <p:cNvPr id="12" name="daftar-poin"/>
           <p:cNvSpPr txBox="1"/>
           <p:nvPr/>
         </p:nvSpPr>
         <p:spPr>
           <a:xfrm>
-            <a:off x="1325880" y="2514600"/>
-            <a:ext cx="4449928" cy="1143000"/>
+            <a:off x="6553048" y="3383280"/>
+            <a:ext cx="4815688" cy="1280160"/>
           </a:xfrm>
           <a:prstGeom prst="rect">
             <a:avLst/>
@@ -10755,11 +10653,15 @@
           <a:ln/>
         </p:spPr>
         <p:txBody>
-          <a:bodyPr wrap="square" lIns="0" tIns="0" rIns="0" bIns="0" rtlCol="0" anchor="ctr"/>
+          <a:bodyPr wrap="square" lIns="25400" tIns="25400" rIns="50800" bIns="25400" rtlCol="0" anchor="t"/>
           <a:lstStyle/>
           <a:p>
-            <a:pPr indent="0" marL="0">
-              <a:buNone/>
+            <a:pPr marL="279400" indent="-279400">
+              <a:spcAft>
+                <a:spcPts val="1000"/>
+              </a:spcAft>
+              <a:buSzPct val="100000"/>
+              <a:buChar char="•"/>
             </a:pPr>
             <a:r>
               <a:rPr lang="en-US" sz="1800" dirty="0">
@@ -10767,98 +10669,35 @@
                   <a:schemeClr val="tx1"/>
                 </a:solidFill>
               </a:rPr>
-              <a:t>B menunggu sampai A selesai</a:t>
+              <a:t>Ambil kunci sebelum mencetak</a:t>
             </a:r>
             <a:endParaRPr lang="en-US" sz="1800" dirty="0"/>
           </a:p>
-        </p:txBody>
-      </p:sp>
-      <p:sp>
-        <p:nvSpPr>
-          <p:cNvPr id="9" name="kartu"/>
-          <p:cNvSpPr/>
-          <p:nvPr/>
-        </p:nvSpPr>
-        <p:spPr>
-          <a:xfrm>
-            <a:off x="6233008" y="2514600"/>
-            <a:ext cx="5410048" cy="1143000"/>
-          </a:xfrm>
-          <a:prstGeom prst="roundRect">
-            <a:avLst>
-              <a:gd name="adj" fmla="val 9600"/>
-            </a:avLst>
-          </a:prstGeom>
-          <a:solidFill>
-            <a:schemeClr val="bg2"/>
-          </a:solidFill>
-          <a:ln w="9525">
-            <a:solidFill>
-              <a:schemeClr val="bg2"/>
-            </a:solidFill>
-            <a:prstDash val="solid"/>
-          </a:ln>
-        </p:spPr>
-      </p:sp>
-      <p:sp>
-        <p:nvSpPr>
-          <p:cNvPr id="10" name="Text 7"/>
-          <p:cNvSpPr txBox="1"/>
-          <p:nvPr/>
-        </p:nvSpPr>
-        <p:spPr>
-          <a:xfrm>
-            <a:off x="6415888" y="2514600"/>
-            <a:ext cx="548640" cy="1143000"/>
-          </a:xfrm>
-          <a:prstGeom prst="rect">
-            <a:avLst/>
-          </a:prstGeom>
-          <a:noFill/>
-          <a:ln/>
-        </p:spPr>
-        <p:txBody>
-          <a:bodyPr wrap="square" lIns="0" tIns="0" rIns="0" bIns="0" rtlCol="0" anchor="ctr"/>
-          <a:lstStyle/>
-          <a:p>
-            <a:pPr indent="0" marL="0">
-              <a:buNone/>
+          <a:p>
+            <a:pPr marL="279400" indent="-279400">
+              <a:spcAft>
+                <a:spcPts val="1000"/>
+              </a:spcAft>
+              <a:buSzPct val="100000"/>
+              <a:buChar char="•"/>
             </a:pPr>
             <a:r>
-              <a:rPr lang="en-US" sz="2600" b="1" dirty="0">
-                <a:solidFill>
-                  <a:schemeClr val="accent2"/>
-                </a:solidFill>
-              </a:rPr>
-              <a:t>B</a:t>
-            </a:r>
-            <a:endParaRPr lang="en-US" sz="2600" dirty="0"/>
-          </a:p>
-        </p:txBody>
-      </p:sp>
-      <p:sp>
-        <p:nvSpPr>
-          <p:cNvPr id="11" name="Text 8"/>
-          <p:cNvSpPr txBox="1"/>
-          <p:nvPr/>
-        </p:nvSpPr>
-        <p:spPr>
-          <a:xfrm>
-            <a:off x="7010248" y="2514600"/>
-            <a:ext cx="4449928" cy="1143000"/>
-          </a:xfrm>
-          <a:prstGeom prst="rect">
-            <a:avLst/>
-          </a:prstGeom>
-          <a:noFill/>
-          <a:ln/>
-        </p:spPr>
-        <p:txBody>
-          <a:bodyPr wrap="square" lIns="0" tIns="0" rIns="0" bIns="0" rtlCol="0" anchor="ctr"/>
-          <a:lstStyle/>
-          <a:p>
-            <a:pPr indent="0" marL="0">
-              <a:buNone/>
+              <a:rPr lang="en-US" sz="1800" dirty="0">
+                <a:solidFill>
+                  <a:schemeClr val="tx1"/>
+                </a:solidFill>
+              </a:rPr>
+              <a:t>Setiap baris utuh</a:t>
+            </a:r>
+            <a:endParaRPr lang="en-US" sz="1800" dirty="0"/>
+          </a:p>
+          <a:p>
+            <a:pPr marL="279400" indent="-279400">
+              <a:spcAft>
+                <a:spcPts val="1000"/>
+              </a:spcAft>
+              <a:buSzPct val="100000"/>
+              <a:buChar char="•"/>
             </a:pPr>
             <a:r>
               <a:rPr lang="en-US" sz="1800" dirty="0">
@@ -10866,205 +10705,7 @@
                   <a:schemeClr val="tx1"/>
                 </a:solidFill>
               </a:rPr>
-              <a:t>B langsung merebut CPU (preemption)</a:t>
-            </a:r>
-            <a:endParaRPr lang="en-US" sz="1800" dirty="0"/>
-          </a:p>
-        </p:txBody>
-      </p:sp>
-      <p:sp>
-        <p:nvSpPr>
-          <p:cNvPr id="12" name="kartu"/>
-          <p:cNvSpPr/>
-          <p:nvPr/>
-        </p:nvSpPr>
-        <p:spPr>
-          <a:xfrm>
-            <a:off x="548640" y="3931920"/>
-            <a:ext cx="5410048" cy="1143000"/>
-          </a:xfrm>
-          <a:prstGeom prst="roundRect">
-            <a:avLst>
-              <a:gd name="adj" fmla="val 9600"/>
-            </a:avLst>
-          </a:prstGeom>
-          <a:solidFill>
-            <a:schemeClr val="bg2"/>
-          </a:solidFill>
-          <a:ln w="9525">
-            <a:solidFill>
-              <a:schemeClr val="bg2"/>
-            </a:solidFill>
-            <a:prstDash val="solid"/>
-          </a:ln>
-        </p:spPr>
-      </p:sp>
-      <p:sp>
-        <p:nvSpPr>
-          <p:cNvPr id="13" name="Text 10"/>
-          <p:cNvSpPr txBox="1"/>
-          <p:nvPr/>
-        </p:nvSpPr>
-        <p:spPr>
-          <a:xfrm>
-            <a:off x="731520" y="3931920"/>
-            <a:ext cx="548640" cy="1143000"/>
-          </a:xfrm>
-          <a:prstGeom prst="rect">
-            <a:avLst/>
-          </a:prstGeom>
-          <a:noFill/>
-          <a:ln/>
-        </p:spPr>
-        <p:txBody>
-          <a:bodyPr wrap="square" lIns="0" tIns="0" rIns="0" bIns="0" rtlCol="0" anchor="ctr"/>
-          <a:lstStyle/>
-          <a:p>
-            <a:pPr indent="0" marL="0">
-              <a:buNone/>
-            </a:pPr>
-            <a:r>
-              <a:rPr lang="en-US" sz="2600" b="1" dirty="0">
-                <a:solidFill>
-                  <a:schemeClr val="accent2"/>
-                </a:solidFill>
-              </a:rPr>
-              <a:t>C</a:t>
-            </a:r>
-            <a:endParaRPr lang="en-US" sz="2600" dirty="0"/>
-          </a:p>
-        </p:txBody>
-      </p:sp>
-      <p:sp>
-        <p:nvSpPr>
-          <p:cNvPr id="14" name="Text 11"/>
-          <p:cNvSpPr txBox="1"/>
-          <p:nvPr/>
-        </p:nvSpPr>
-        <p:spPr>
-          <a:xfrm>
-            <a:off x="1325880" y="3931920"/>
-            <a:ext cx="4449928" cy="1143000"/>
-          </a:xfrm>
-          <a:prstGeom prst="rect">
-            <a:avLst/>
-          </a:prstGeom>
-          <a:noFill/>
-          <a:ln/>
-        </p:spPr>
-        <p:txBody>
-          <a:bodyPr wrap="square" lIns="0" tIns="0" rIns="0" bIns="0" rtlCol="0" anchor="ctr"/>
-          <a:lstStyle/>
-          <a:p>
-            <a:pPr indent="0" marL="0">
-              <a:buNone/>
-            </a:pPr>
-            <a:r>
-              <a:rPr lang="en-US" sz="1800" dirty="0">
-                <a:solidFill>
-                  <a:schemeClr val="tx1"/>
-                </a:solidFill>
-              </a:rPr>
-              <a:t>A dan B bergantian setiap tick</a:t>
-            </a:r>
-            <a:endParaRPr lang="en-US" sz="1800" dirty="0"/>
-          </a:p>
-        </p:txBody>
-      </p:sp>
-      <p:sp>
-        <p:nvSpPr>
-          <p:cNvPr id="15" name="kartu"/>
-          <p:cNvSpPr/>
-          <p:nvPr/>
-        </p:nvSpPr>
-        <p:spPr>
-          <a:xfrm>
-            <a:off x="6233008" y="3931920"/>
-            <a:ext cx="5410048" cy="1143000"/>
-          </a:xfrm>
-          <a:prstGeom prst="roundRect">
-            <a:avLst>
-              <a:gd name="adj" fmla="val 9600"/>
-            </a:avLst>
-          </a:prstGeom>
-          <a:solidFill>
-            <a:schemeClr val="bg2"/>
-          </a:solidFill>
-          <a:ln w="9525">
-            <a:solidFill>
-              <a:schemeClr val="bg2"/>
-            </a:solidFill>
-            <a:prstDash val="solid"/>
-          </a:ln>
-        </p:spPr>
-      </p:sp>
-      <p:sp>
-        <p:nvSpPr>
-          <p:cNvPr id="16" name="Text 13"/>
-          <p:cNvSpPr txBox="1"/>
-          <p:nvPr/>
-        </p:nvSpPr>
-        <p:spPr>
-          <a:xfrm>
-            <a:off x="6415888" y="3931920"/>
-            <a:ext cx="548640" cy="1143000"/>
-          </a:xfrm>
-          <a:prstGeom prst="rect">
-            <a:avLst/>
-          </a:prstGeom>
-          <a:noFill/>
-          <a:ln/>
-        </p:spPr>
-        <p:txBody>
-          <a:bodyPr wrap="square" lIns="0" tIns="0" rIns="0" bIns="0" rtlCol="0" anchor="ctr"/>
-          <a:lstStyle/>
-          <a:p>
-            <a:pPr indent="0" marL="0">
-              <a:buNone/>
-            </a:pPr>
-            <a:r>
-              <a:rPr lang="en-US" sz="2600" b="1" dirty="0">
-                <a:solidFill>
-                  <a:schemeClr val="accent2"/>
-                </a:solidFill>
-              </a:rPr>
-              <a:t>D</a:t>
-            </a:r>
-            <a:endParaRPr lang="en-US" sz="2600" dirty="0"/>
-          </a:p>
-        </p:txBody>
-      </p:sp>
-      <p:sp>
-        <p:nvSpPr>
-          <p:cNvPr id="17" name="Text 14"/>
-          <p:cNvSpPr txBox="1"/>
-          <p:nvPr/>
-        </p:nvSpPr>
-        <p:spPr>
-          <a:xfrm>
-            <a:off x="7010248" y="3931920"/>
-            <a:ext cx="4449928" cy="1143000"/>
-          </a:xfrm>
-          <a:prstGeom prst="rect">
-            <a:avLst/>
-          </a:prstGeom>
-          <a:noFill/>
-          <a:ln/>
-        </p:spPr>
-        <p:txBody>
-          <a:bodyPr wrap="square" lIns="0" tIns="0" rIns="0" bIns="0" rtlCol="0" anchor="ctr"/>
-          <a:lstStyle/>
-          <a:p>
-            <a:pPr indent="0" marL="0">
-              <a:buNone/>
-            </a:pPr>
-            <a:r>
-              <a:rPr lang="en-US" sz="1800" dirty="0">
-                <a:solidFill>
-                  <a:schemeClr val="tx1"/>
-                </a:solidFill>
-              </a:rPr>
-              <a:t>Watchdog me-restart ESP32</a:t>
+              <a:t>Urutan baris A dan B boleh bertukar</a:t>
             </a:r>
             <a:endParaRPr lang="en-US" sz="1800" dirty="0"/>
           </a:p>
@@ -11150,7 +10791,7 @@
         </p:nvSpPr>
         <p:spPr>
           <a:xfrm>
-            <a:off x="548640" y="411480"/>
+            <a:off x="548640" y="320040"/>
             <a:ext cx="11094415" cy="777240"/>
           </a:xfrm>
           <a:prstGeom prst="rect">
@@ -11167,14 +10808,14 @@
               <a:buNone/>
             </a:pPr>
             <a:r>
-              <a:rPr lang="en-US" sz="3200" b="1" dirty="0">
-                <a:solidFill>
-                  <a:schemeClr val="bg1"/>
-                </a:solidFill>
-              </a:rPr>
-              <a:t>Rangkuman</a:t>
-            </a:r>
-            <a:endParaRPr lang="en-US" sz="3200" dirty="0"/>
+              <a:rPr lang="en-US" sz="3000" b="1" dirty="0">
+                <a:solidFill>
+                  <a:schemeClr val="tx2"/>
+                </a:solidFill>
+              </a:rPr>
+              <a:t>Kuis Cepat</a:t>
+            </a:r>
+            <a:endParaRPr lang="en-US" sz="3000" dirty="0"/>
           </a:p>
         </p:txBody>
       </p:sp>
@@ -11186,14 +10827,14 @@
         </p:nvSpPr>
         <p:spPr>
           <a:xfrm>
-            <a:off x="548640" y="1584960"/>
-            <a:ext cx="457200" cy="457200"/>
+            <a:off x="548640" y="1371600"/>
+            <a:ext cx="685800" cy="685800"/>
           </a:xfrm>
           <a:prstGeom prst="ellipse">
             <a:avLst/>
           </a:prstGeom>
           <a:solidFill>
-            <a:schemeClr val="tx2"/>
+            <a:schemeClr val="bg1"/>
           </a:solidFill>
           <a:ln w="28575">
             <a:solidFill>
@@ -11205,7 +10846,7 @@
       </p:sp>
       <p:pic>
         <p:nvPicPr>
-          <p:cNvPr id="4" name="ikon-check" descr="preencoded.png">    </p:cNvPr>
+          <p:cNvPr id="4" name="ikon-question" descr="preencoded.png">    </p:cNvPr>
           <p:cNvPicPr>
             <a:picLocks noChangeAspect="1"/>
           </p:cNvPicPr>
@@ -11219,8 +10860,8 @@
         </p:blipFill>
         <p:spPr>
           <a:xfrm>
-            <a:off x="667512" y="1703832"/>
-            <a:ext cx="219456" cy="219456"/>
+            <a:off x="720090" y="1543050"/>
+            <a:ext cx="342900" cy="342900"/>
           </a:xfrm>
           <a:prstGeom prst="rect">
             <a:avLst/>
@@ -11235,8 +10876,8 @@
         </p:nvSpPr>
         <p:spPr>
           <a:xfrm>
-            <a:off x="1280160" y="1417320"/>
-            <a:ext cx="10362895" cy="792480"/>
+            <a:off x="1463040" y="1325880"/>
+            <a:ext cx="10180015" cy="914400"/>
           </a:xfrm>
           <a:prstGeom prst="rect">
             <a:avLst/>
@@ -11252,92 +10893,54 @@
               <a:buNone/>
             </a:pPr>
             <a:r>
-              <a:rPr lang="en-US" sz="2000" dirty="0">
-                <a:solidFill>
-                  <a:schemeClr val="bg1"/>
-                </a:solidFill>
-              </a:rPr>
-              <a:t>RTOS membagi pekerjaan menjadi </a:t>
-            </a:r>
-            <a:r>
-              <a:rPr lang="en-US" sz="2000" b="1" dirty="0">
-                <a:solidFill>
-                  <a:schemeClr val="bg1"/>
-                </a:solidFill>
-              </a:rPr>
-              <a:t>task</a:t>
-            </a:r>
-            <a:r>
-              <a:rPr lang="en-US" sz="2000" dirty="0">
-                <a:solidFill>
-                  <a:schemeClr val="bg1"/>
-                </a:solidFill>
-              </a:rPr>
-              <a:t> yang dijadwalkan penjadwal</a:t>
-            </a:r>
-            <a:endParaRPr lang="en-US" sz="2000" dirty="0"/>
-          </a:p>
-        </p:txBody>
-      </p:sp>
-      <p:sp>
-        <p:nvSpPr>
-          <p:cNvPr id="6" name="pad"/>
+              <a:rPr lang="en-US" sz="2200" b="1" dirty="0">
+                <a:solidFill>
+                  <a:schemeClr val="tx1"/>
+                </a:solidFill>
+              </a:rPr>
+              <a:t>Task A (prioritas 1) sedang berjalan, lalu Task B (prioritas 3) di inti yang sama menjadi Ready. Apa yang terjadi?</a:t>
+            </a:r>
+            <a:endParaRPr lang="en-US" sz="2200" dirty="0"/>
+          </a:p>
+        </p:txBody>
+      </p:sp>
+      <p:sp>
+        <p:nvSpPr>
+          <p:cNvPr id="6" name="kartu"/>
           <p:cNvSpPr/>
           <p:nvPr/>
         </p:nvSpPr>
         <p:spPr>
           <a:xfrm>
-            <a:off x="548640" y="2377440"/>
-            <a:ext cx="457200" cy="457200"/>
-          </a:xfrm>
-          <a:prstGeom prst="ellipse">
-            <a:avLst/>
+            <a:off x="548640" y="2514600"/>
+            <a:ext cx="5410048" cy="1143000"/>
+          </a:xfrm>
+          <a:prstGeom prst="roundRect">
+            <a:avLst>
+              <a:gd name="adj" fmla="val 9600"/>
+            </a:avLst>
           </a:prstGeom>
           <a:solidFill>
-            <a:schemeClr val="tx2"/>
+            <a:schemeClr val="bg2"/>
           </a:solidFill>
-          <a:ln w="28575">
+          <a:ln w="9525">
             <a:solidFill>
-              <a:schemeClr val="accent2"/>
+              <a:schemeClr val="bg2"/>
             </a:solidFill>
             <a:prstDash val="solid"/>
           </a:ln>
         </p:spPr>
       </p:sp>
-      <p:pic>
-        <p:nvPicPr>
-          <p:cNvPr id="7" name="ikon-check" descr="preencoded.png">    </p:cNvPr>
-          <p:cNvPicPr>
-            <a:picLocks noChangeAspect="1"/>
-          </p:cNvPicPr>
-          <p:nvPr/>
-        </p:nvPicPr>
-        <p:blipFill>
-          <a:blip r:embed="rId2"/>
-          <a:stretch>
-            <a:fillRect/>
-          </a:stretch>
-        </p:blipFill>
-        <p:spPr>
-          <a:xfrm>
-            <a:off x="667512" y="2496312"/>
-            <a:ext cx="219456" cy="219456"/>
-          </a:xfrm>
-          <a:prstGeom prst="rect">
-            <a:avLst/>
-          </a:prstGeom>
-        </p:spPr>
-      </p:pic>
-      <p:sp>
-        <p:nvSpPr>
-          <p:cNvPr id="8" name="Text 4"/>
+      <p:sp>
+        <p:nvSpPr>
+          <p:cNvPr id="7" name="Text 4"/>
           <p:cNvSpPr txBox="1"/>
           <p:nvPr/>
         </p:nvSpPr>
         <p:spPr>
           <a:xfrm>
-            <a:off x="1280160" y="2209800"/>
-            <a:ext cx="10362895" cy="792480"/>
+            <a:off x="731520" y="2514600"/>
+            <a:ext cx="548640" cy="1143000"/>
           </a:xfrm>
           <a:prstGeom prst="rect">
             <a:avLst/>
@@ -11353,92 +10956,90 @@
               <a:buNone/>
             </a:pPr>
             <a:r>
-              <a:rPr lang="en-US" sz="2000" dirty="0">
-                <a:solidFill>
-                  <a:schemeClr val="bg1"/>
-                </a:solidFill>
-              </a:rPr>
-              <a:t>Keadaan task: Running, Ready, </a:t>
-            </a:r>
-            <a:r>
-              <a:rPr lang="en-US" sz="2000" b="1" dirty="0">
-                <a:solidFill>
-                  <a:schemeClr val="bg1"/>
-                </a:solidFill>
-              </a:rPr>
-              <a:t>Blocked</a:t>
-            </a:r>
-            <a:r>
-              <a:rPr lang="en-US" sz="2000" dirty="0">
-                <a:solidFill>
-                  <a:schemeClr val="bg1"/>
-                </a:solidFill>
-              </a:rPr>
-              <a:t>, Suspended</a:t>
-            </a:r>
-            <a:endParaRPr lang="en-US" sz="2000" dirty="0"/>
-          </a:p>
-        </p:txBody>
-      </p:sp>
-      <p:sp>
-        <p:nvSpPr>
-          <p:cNvPr id="9" name="pad"/>
+              <a:rPr lang="en-US" sz="2600" b="1" dirty="0">
+                <a:solidFill>
+                  <a:schemeClr val="accent2"/>
+                </a:solidFill>
+              </a:rPr>
+              <a:t>A</a:t>
+            </a:r>
+            <a:endParaRPr lang="en-US" sz="2600" dirty="0"/>
+          </a:p>
+        </p:txBody>
+      </p:sp>
+      <p:sp>
+        <p:nvSpPr>
+          <p:cNvPr id="8" name="Text 5"/>
+          <p:cNvSpPr txBox="1"/>
+          <p:nvPr/>
+        </p:nvSpPr>
+        <p:spPr>
+          <a:xfrm>
+            <a:off x="1325880" y="2514600"/>
+            <a:ext cx="4449928" cy="1143000"/>
+          </a:xfrm>
+          <a:prstGeom prst="rect">
+            <a:avLst/>
+          </a:prstGeom>
+          <a:noFill/>
+          <a:ln/>
+        </p:spPr>
+        <p:txBody>
+          <a:bodyPr wrap="square" lIns="0" tIns="0" rIns="0" bIns="0" rtlCol="0" anchor="ctr"/>
+          <a:lstStyle/>
+          <a:p>
+            <a:pPr indent="0" marL="0">
+              <a:buNone/>
+            </a:pPr>
+            <a:r>
+              <a:rPr lang="en-US" sz="1800" dirty="0">
+                <a:solidFill>
+                  <a:schemeClr val="tx1"/>
+                </a:solidFill>
+              </a:rPr>
+              <a:t>B menunggu sampai A selesai</a:t>
+            </a:r>
+            <a:endParaRPr lang="en-US" sz="1800" dirty="0"/>
+          </a:p>
+        </p:txBody>
+      </p:sp>
+      <p:sp>
+        <p:nvSpPr>
+          <p:cNvPr id="9" name="kartu"/>
           <p:cNvSpPr/>
           <p:nvPr/>
         </p:nvSpPr>
         <p:spPr>
           <a:xfrm>
-            <a:off x="548640" y="3169920"/>
-            <a:ext cx="457200" cy="457200"/>
-          </a:xfrm>
-          <a:prstGeom prst="ellipse">
-            <a:avLst/>
+            <a:off x="6233008" y="2514600"/>
+            <a:ext cx="5410048" cy="1143000"/>
+          </a:xfrm>
+          <a:prstGeom prst="roundRect">
+            <a:avLst>
+              <a:gd name="adj" fmla="val 9600"/>
+            </a:avLst>
           </a:prstGeom>
           <a:solidFill>
-            <a:schemeClr val="tx2"/>
+            <a:schemeClr val="bg2"/>
           </a:solidFill>
-          <a:ln w="28575">
+          <a:ln w="9525">
             <a:solidFill>
-              <a:schemeClr val="accent2"/>
+              <a:schemeClr val="bg2"/>
             </a:solidFill>
             <a:prstDash val="solid"/>
           </a:ln>
         </p:spPr>
       </p:sp>
-      <p:pic>
-        <p:nvPicPr>
-          <p:cNvPr id="10" name="ikon-check" descr="preencoded.png">    </p:cNvPr>
-          <p:cNvPicPr>
-            <a:picLocks noChangeAspect="1"/>
-          </p:cNvPicPr>
-          <p:nvPr/>
-        </p:nvPicPr>
-        <p:blipFill>
-          <a:blip r:embed="rId3"/>
-          <a:stretch>
-            <a:fillRect/>
-          </a:stretch>
-        </p:blipFill>
-        <p:spPr>
-          <a:xfrm>
-            <a:off x="667512" y="3288792"/>
-            <a:ext cx="219456" cy="219456"/>
-          </a:xfrm>
-          <a:prstGeom prst="rect">
-            <a:avLst/>
-          </a:prstGeom>
-        </p:spPr>
-      </p:pic>
-      <p:sp>
-        <p:nvSpPr>
-          <p:cNvPr id="11" name="Text 6"/>
+      <p:sp>
+        <p:nvSpPr>
+          <p:cNvPr id="10" name="Text 7"/>
           <p:cNvSpPr txBox="1"/>
           <p:nvPr/>
         </p:nvSpPr>
         <p:spPr>
           <a:xfrm>
-            <a:off x="1280160" y="3002280"/>
-            <a:ext cx="10362895" cy="792480"/>
+            <a:off x="6415888" y="2514600"/>
+            <a:ext cx="548640" cy="1143000"/>
           </a:xfrm>
           <a:prstGeom prst="rect">
             <a:avLst/>
@@ -11454,76 +11055,90 @@
               <a:buNone/>
             </a:pPr>
             <a:r>
-              <a:rPr lang="en-US" sz="2000" dirty="0">
-                <a:solidFill>
-                  <a:schemeClr val="bg1"/>
-                </a:solidFill>
-              </a:rPr>
-              <a:t>Prioritas 0–24, preemption, time slicing, tick 1 ms, dua inti</a:t>
-            </a:r>
-            <a:endParaRPr lang="en-US" sz="2000" dirty="0"/>
-          </a:p>
-        </p:txBody>
-      </p:sp>
-      <p:sp>
-        <p:nvSpPr>
-          <p:cNvPr id="12" name="pad"/>
+              <a:rPr lang="en-US" sz="2600" b="1" dirty="0">
+                <a:solidFill>
+                  <a:schemeClr val="accent2"/>
+                </a:solidFill>
+              </a:rPr>
+              <a:t>B</a:t>
+            </a:r>
+            <a:endParaRPr lang="en-US" sz="2600" dirty="0"/>
+          </a:p>
+        </p:txBody>
+      </p:sp>
+      <p:sp>
+        <p:nvSpPr>
+          <p:cNvPr id="11" name="Text 8"/>
+          <p:cNvSpPr txBox="1"/>
+          <p:nvPr/>
+        </p:nvSpPr>
+        <p:spPr>
+          <a:xfrm>
+            <a:off x="7010248" y="2514600"/>
+            <a:ext cx="4449928" cy="1143000"/>
+          </a:xfrm>
+          <a:prstGeom prst="rect">
+            <a:avLst/>
+          </a:prstGeom>
+          <a:noFill/>
+          <a:ln/>
+        </p:spPr>
+        <p:txBody>
+          <a:bodyPr wrap="square" lIns="0" tIns="0" rIns="0" bIns="0" rtlCol="0" anchor="ctr"/>
+          <a:lstStyle/>
+          <a:p>
+            <a:pPr indent="0" marL="0">
+              <a:buNone/>
+            </a:pPr>
+            <a:r>
+              <a:rPr lang="en-US" sz="1800" dirty="0">
+                <a:solidFill>
+                  <a:schemeClr val="tx1"/>
+                </a:solidFill>
+              </a:rPr>
+              <a:t>B langsung merebut CPU (preemption)</a:t>
+            </a:r>
+            <a:endParaRPr lang="en-US" sz="1800" dirty="0"/>
+          </a:p>
+        </p:txBody>
+      </p:sp>
+      <p:sp>
+        <p:nvSpPr>
+          <p:cNvPr id="12" name="kartu"/>
           <p:cNvSpPr/>
           <p:nvPr/>
         </p:nvSpPr>
         <p:spPr>
           <a:xfrm>
-            <a:off x="548640" y="3962400"/>
-            <a:ext cx="457200" cy="457200"/>
-          </a:xfrm>
-          <a:prstGeom prst="ellipse">
-            <a:avLst/>
+            <a:off x="548640" y="3931920"/>
+            <a:ext cx="5410048" cy="1143000"/>
+          </a:xfrm>
+          <a:prstGeom prst="roundRect">
+            <a:avLst>
+              <a:gd name="adj" fmla="val 9600"/>
+            </a:avLst>
           </a:prstGeom>
           <a:solidFill>
-            <a:schemeClr val="tx2"/>
+            <a:schemeClr val="bg2"/>
           </a:solidFill>
-          <a:ln w="28575">
+          <a:ln w="9525">
             <a:solidFill>
-              <a:schemeClr val="accent2"/>
+              <a:schemeClr val="bg2"/>
             </a:solidFill>
             <a:prstDash val="solid"/>
           </a:ln>
         </p:spPr>
       </p:sp>
-      <p:pic>
-        <p:nvPicPr>
-          <p:cNvPr id="13" name="ikon-check" descr="preencoded.png">    </p:cNvPr>
-          <p:cNvPicPr>
-            <a:picLocks noChangeAspect="1"/>
-          </p:cNvPicPr>
-          <p:nvPr/>
-        </p:nvPicPr>
-        <p:blipFill>
-          <a:blip r:embed="rId4"/>
-          <a:stretch>
-            <a:fillRect/>
-          </a:stretch>
-        </p:blipFill>
-        <p:spPr>
-          <a:xfrm>
-            <a:off x="667512" y="4081272"/>
-            <a:ext cx="219456" cy="219456"/>
-          </a:xfrm>
-          <a:prstGeom prst="rect">
-            <a:avLst/>
-          </a:prstGeom>
-        </p:spPr>
-      </p:pic>
-      <p:sp>
-        <p:nvSpPr>
-          <p:cNvPr id="14" name="Text 8"/>
+      <p:sp>
+        <p:nvSpPr>
+          <p:cNvPr id="13" name="Text 10"/>
           <p:cNvSpPr txBox="1"/>
           <p:nvPr/>
         </p:nvSpPr>
         <p:spPr>
           <a:xfrm>
-            <a:off x="1280160" y="3794760"/>
-            <a:ext cx="10362895" cy="792480"/>
+            <a:off x="731520" y="3931920"/>
+            <a:ext cx="548640" cy="1143000"/>
           </a:xfrm>
           <a:prstGeom prst="rect">
             <a:avLst/>
@@ -11539,103 +11154,90 @@
               <a:buNone/>
             </a:pPr>
             <a:r>
-              <a:rPr lang="en-US" sz="2000" dirty="0">
-                <a:solidFill>
-                  <a:schemeClr val="bg1"/>
-                </a:solidFill>
-              </a:rPr>
-              <a:t>Stack dalam </a:t>
-            </a:r>
-            <a:r>
-              <a:rPr lang="en-US" sz="2000" b="1" dirty="0">
-                <a:solidFill>
-                  <a:schemeClr val="bg1"/>
-                </a:solidFill>
-              </a:rPr>
-              <a:t>byte</a:t>
-            </a:r>
-            <a:r>
-              <a:rPr lang="en-US" sz="2000" dirty="0">
-                <a:solidFill>
-                  <a:schemeClr val="bg1"/>
-                </a:solidFill>
-              </a:rPr>
-              <a:t>; ukur dengan </a:t>
-            </a:r>
-            <a:r>
-              <a:rPr lang="en-US" sz="2000" dirty="0">
-                <a:solidFill>
-                  <a:srgbClr val="F2C98A"/>
-                </a:solidFill>
-                <a:latin typeface="Consolas" pitchFamily="34" charset="0"/>
-                <a:ea typeface="Consolas" pitchFamily="34" charset="-122"/>
-                <a:cs typeface="Consolas" pitchFamily="34" charset="-120"/>
-              </a:rPr>
-              <a:t>uxTaskGetStackHighWaterMark()</a:t>
-            </a:r>
-            <a:endParaRPr lang="en-US" sz="2000" dirty="0"/>
-          </a:p>
-        </p:txBody>
-      </p:sp>
-      <p:sp>
-        <p:nvSpPr>
-          <p:cNvPr id="15" name="pad"/>
+              <a:rPr lang="en-US" sz="2600" b="1" dirty="0">
+                <a:solidFill>
+                  <a:schemeClr val="accent2"/>
+                </a:solidFill>
+              </a:rPr>
+              <a:t>C</a:t>
+            </a:r>
+            <a:endParaRPr lang="en-US" sz="2600" dirty="0"/>
+          </a:p>
+        </p:txBody>
+      </p:sp>
+      <p:sp>
+        <p:nvSpPr>
+          <p:cNvPr id="14" name="Text 11"/>
+          <p:cNvSpPr txBox="1"/>
+          <p:nvPr/>
+        </p:nvSpPr>
+        <p:spPr>
+          <a:xfrm>
+            <a:off x="1325880" y="3931920"/>
+            <a:ext cx="4449928" cy="1143000"/>
+          </a:xfrm>
+          <a:prstGeom prst="rect">
+            <a:avLst/>
+          </a:prstGeom>
+          <a:noFill/>
+          <a:ln/>
+        </p:spPr>
+        <p:txBody>
+          <a:bodyPr wrap="square" lIns="0" tIns="0" rIns="0" bIns="0" rtlCol="0" anchor="ctr"/>
+          <a:lstStyle/>
+          <a:p>
+            <a:pPr indent="0" marL="0">
+              <a:buNone/>
+            </a:pPr>
+            <a:r>
+              <a:rPr lang="en-US" sz="1800" dirty="0">
+                <a:solidFill>
+                  <a:schemeClr val="tx1"/>
+                </a:solidFill>
+              </a:rPr>
+              <a:t>A dan B bergantian setiap tick</a:t>
+            </a:r>
+            <a:endParaRPr lang="en-US" sz="1800" dirty="0"/>
+          </a:p>
+        </p:txBody>
+      </p:sp>
+      <p:sp>
+        <p:nvSpPr>
+          <p:cNvPr id="15" name="kartu"/>
           <p:cNvSpPr/>
           <p:nvPr/>
         </p:nvSpPr>
         <p:spPr>
           <a:xfrm>
-            <a:off x="548640" y="4754880"/>
-            <a:ext cx="457200" cy="457200"/>
-          </a:xfrm>
-          <a:prstGeom prst="ellipse">
-            <a:avLst/>
+            <a:off x="6233008" y="3931920"/>
+            <a:ext cx="5410048" cy="1143000"/>
+          </a:xfrm>
+          <a:prstGeom prst="roundRect">
+            <a:avLst>
+              <a:gd name="adj" fmla="val 9600"/>
+            </a:avLst>
           </a:prstGeom>
           <a:solidFill>
-            <a:schemeClr val="tx2"/>
+            <a:schemeClr val="bg2"/>
           </a:solidFill>
-          <a:ln w="28575">
+          <a:ln w="9525">
             <a:solidFill>
-              <a:schemeClr val="accent2"/>
+              <a:schemeClr val="bg2"/>
             </a:solidFill>
             <a:prstDash val="solid"/>
           </a:ln>
         </p:spPr>
       </p:sp>
-      <p:pic>
-        <p:nvPicPr>
-          <p:cNvPr id="16" name="ikon-check" descr="preencoded.png">    </p:cNvPr>
-          <p:cNvPicPr>
-            <a:picLocks noChangeAspect="1"/>
-          </p:cNvPicPr>
-          <p:nvPr/>
-        </p:nvPicPr>
-        <p:blipFill>
-          <a:blip r:embed="rId5"/>
-          <a:stretch>
-            <a:fillRect/>
-          </a:stretch>
-        </p:blipFill>
-        <p:spPr>
-          <a:xfrm>
-            <a:off x="667512" y="4873752"/>
-            <a:ext cx="219456" cy="219456"/>
-          </a:xfrm>
-          <a:prstGeom prst="rect">
-            <a:avLst/>
-          </a:prstGeom>
-        </p:spPr>
-      </p:pic>
-      <p:sp>
-        <p:nvSpPr>
-          <p:cNvPr id="17" name="Text 10"/>
+      <p:sp>
+        <p:nvSpPr>
+          <p:cNvPr id="16" name="Text 13"/>
           <p:cNvSpPr txBox="1"/>
           <p:nvPr/>
         </p:nvSpPr>
         <p:spPr>
           <a:xfrm>
-            <a:off x="1280160" y="4587240"/>
-            <a:ext cx="10362895" cy="792480"/>
+            <a:off x="6415888" y="3931920"/>
+            <a:ext cx="548640" cy="1143000"/>
           </a:xfrm>
           <a:prstGeom prst="rect">
             <a:avLst/>
@@ -11651,100 +11253,27 @@
               <a:buNone/>
             </a:pPr>
             <a:r>
-              <a:rPr lang="en-US" sz="2000" b="1" dirty="0">
-                <a:solidFill>
-                  <a:schemeClr val="bg1"/>
-                </a:solidFill>
-              </a:rPr>
-              <a:t>Antrean</a:t>
-            </a:r>
-            <a:r>
-              <a:rPr lang="en-US" sz="2000" dirty="0">
-                <a:solidFill>
-                  <a:schemeClr val="bg1"/>
-                </a:solidFill>
-              </a:rPr>
-              <a:t> untuk kirim data, </a:t>
-            </a:r>
-            <a:r>
-              <a:rPr lang="en-US" sz="2000" b="1" dirty="0">
-                <a:solidFill>
-                  <a:schemeClr val="bg1"/>
-                </a:solidFill>
-              </a:rPr>
-              <a:t>mutex</a:t>
-            </a:r>
-            <a:r>
-              <a:rPr lang="en-US" sz="2000" dirty="0">
-                <a:solidFill>
-                  <a:schemeClr val="bg1"/>
-                </a:solidFill>
-              </a:rPr>
-              <a:t> untuk sumber daya bersama</a:t>
-            </a:r>
-            <a:endParaRPr lang="en-US" sz="2000" dirty="0"/>
-          </a:p>
-        </p:txBody>
-      </p:sp>
-      <p:sp>
-        <p:nvSpPr>
-          <p:cNvPr id="18" name="pad"/>
-          <p:cNvSpPr/>
-          <p:nvPr/>
-        </p:nvSpPr>
-        <p:spPr>
-          <a:xfrm>
-            <a:off x="548640" y="5547360"/>
-            <a:ext cx="457200" cy="457200"/>
-          </a:xfrm>
-          <a:prstGeom prst="ellipse">
-            <a:avLst/>
-          </a:prstGeom>
-          <a:solidFill>
-            <a:schemeClr val="tx2"/>
-          </a:solidFill>
-          <a:ln w="28575">
-            <a:solidFill>
-              <a:schemeClr val="accent2"/>
-            </a:solidFill>
-            <a:prstDash val="solid"/>
-          </a:ln>
-        </p:spPr>
-      </p:sp>
-      <p:pic>
-        <p:nvPicPr>
-          <p:cNvPr id="19" name="ikon-check" descr="preencoded.png">    </p:cNvPr>
-          <p:cNvPicPr>
-            <a:picLocks noChangeAspect="1"/>
-          </p:cNvPicPr>
-          <p:nvPr/>
-        </p:nvPicPr>
-        <p:blipFill>
-          <a:blip r:embed="rId6"/>
-          <a:stretch>
-            <a:fillRect/>
-          </a:stretch>
-        </p:blipFill>
-        <p:spPr>
-          <a:xfrm>
-            <a:off x="667512" y="5666232"/>
-            <a:ext cx="219456" cy="219456"/>
-          </a:xfrm>
-          <a:prstGeom prst="rect">
-            <a:avLst/>
-          </a:prstGeom>
-        </p:spPr>
-      </p:pic>
-      <p:sp>
-        <p:nvSpPr>
-          <p:cNvPr id="20" name="Text 12"/>
+              <a:rPr lang="en-US" sz="2600" b="1" dirty="0">
+                <a:solidFill>
+                  <a:schemeClr val="accent2"/>
+                </a:solidFill>
+              </a:rPr>
+              <a:t>D</a:t>
+            </a:r>
+            <a:endParaRPr lang="en-US" sz="2600" dirty="0"/>
+          </a:p>
+        </p:txBody>
+      </p:sp>
+      <p:sp>
+        <p:nvSpPr>
+          <p:cNvPr id="17" name="Text 14"/>
           <p:cNvSpPr txBox="1"/>
           <p:nvPr/>
         </p:nvSpPr>
         <p:spPr>
           <a:xfrm>
-            <a:off x="1280160" y="5379720"/>
-            <a:ext cx="10362895" cy="792480"/>
+            <a:off x="7010248" y="3931920"/>
+            <a:ext cx="4449928" cy="1143000"/>
           </a:xfrm>
           <a:prstGeom prst="rect">
             <a:avLst/>
@@ -11760,25 +11289,14 @@
               <a:buNone/>
             </a:pPr>
             <a:r>
-              <a:rPr lang="en-US" sz="2000" dirty="0">
-                <a:solidFill>
-                  <a:schemeClr val="bg1"/>
-                </a:solidFill>
-              </a:rPr>
-              <a:t>Di ISR pakai fungsi </a:t>
-            </a:r>
-            <a:r>
-              <a:rPr lang="en-US" sz="2000" dirty="0">
-                <a:solidFill>
-                  <a:srgbClr val="F2C98A"/>
-                </a:solidFill>
-                <a:latin typeface="Consolas" pitchFamily="34" charset="0"/>
-                <a:ea typeface="Consolas" pitchFamily="34" charset="-122"/>
-                <a:cs typeface="Consolas" pitchFamily="34" charset="-120"/>
-              </a:rPr>
-              <a:t>...FromISR</a:t>
-            </a:r>
-            <a:endParaRPr lang="en-US" sz="2000" dirty="0"/>
+              <a:rPr lang="en-US" sz="1800" dirty="0">
+                <a:solidFill>
+                  <a:schemeClr val="tx1"/>
+                </a:solidFill>
+              </a:rPr>
+              <a:t>Watchdog me-restart ESP32</a:t>
+            </a:r>
+            <a:endParaRPr lang="en-US" sz="1800" dirty="0"/>
           </a:p>
         </p:txBody>
       </p:sp>
@@ -11812,7 +11330,7 @@
             <a:lvl1pPr>
               <a:defRPr sz="1000">
                 <a:solidFill>
-                  <a:srgbClr val="9FBFAF"/>
+                  <a:srgbClr val="5F6F67"/>
                 </a:solidFill>
               </a:defRPr>
             </a:lvl1pPr>
@@ -11884,6 +11402,718 @@
                   <a:schemeClr val="bg1"/>
                 </a:solidFill>
               </a:rPr>
+              <a:t>Rangkuman</a:t>
+            </a:r>
+            <a:endParaRPr lang="en-US" sz="3200" dirty="0"/>
+          </a:p>
+        </p:txBody>
+      </p:sp>
+      <p:sp>
+        <p:nvSpPr>
+          <p:cNvPr id="3" name="pad"/>
+          <p:cNvSpPr/>
+          <p:nvPr/>
+        </p:nvSpPr>
+        <p:spPr>
+          <a:xfrm>
+            <a:off x="548640" y="1584960"/>
+            <a:ext cx="457200" cy="457200"/>
+          </a:xfrm>
+          <a:prstGeom prst="ellipse">
+            <a:avLst/>
+          </a:prstGeom>
+          <a:solidFill>
+            <a:schemeClr val="tx2"/>
+          </a:solidFill>
+          <a:ln w="28575">
+            <a:solidFill>
+              <a:schemeClr val="accent2"/>
+            </a:solidFill>
+            <a:prstDash val="solid"/>
+          </a:ln>
+        </p:spPr>
+      </p:sp>
+      <p:pic>
+        <p:nvPicPr>
+          <p:cNvPr id="4" name="ikon-check" descr="preencoded.png">    </p:cNvPr>
+          <p:cNvPicPr>
+            <a:picLocks noChangeAspect="1"/>
+          </p:cNvPicPr>
+          <p:nvPr/>
+        </p:nvPicPr>
+        <p:blipFill>
+          <a:blip r:embed="rId1"/>
+          <a:stretch>
+            <a:fillRect/>
+          </a:stretch>
+        </p:blipFill>
+        <p:spPr>
+          <a:xfrm>
+            <a:off x="667512" y="1703832"/>
+            <a:ext cx="219456" cy="219456"/>
+          </a:xfrm>
+          <a:prstGeom prst="rect">
+            <a:avLst/>
+          </a:prstGeom>
+        </p:spPr>
+      </p:pic>
+      <p:sp>
+        <p:nvSpPr>
+          <p:cNvPr id="5" name="Text 2"/>
+          <p:cNvSpPr txBox="1"/>
+          <p:nvPr/>
+        </p:nvSpPr>
+        <p:spPr>
+          <a:xfrm>
+            <a:off x="1280160" y="1417320"/>
+            <a:ext cx="10362895" cy="792480"/>
+          </a:xfrm>
+          <a:prstGeom prst="rect">
+            <a:avLst/>
+          </a:prstGeom>
+          <a:noFill/>
+          <a:ln/>
+        </p:spPr>
+        <p:txBody>
+          <a:bodyPr wrap="square" lIns="0" tIns="0" rIns="0" bIns="0" rtlCol="0" anchor="ctr"/>
+          <a:lstStyle/>
+          <a:p>
+            <a:pPr indent="0" marL="0">
+              <a:buNone/>
+            </a:pPr>
+            <a:r>
+              <a:rPr lang="en-US" sz="2000" dirty="0">
+                <a:solidFill>
+                  <a:schemeClr val="bg1"/>
+                </a:solidFill>
+              </a:rPr>
+              <a:t>RTOS membagi pekerjaan menjadi </a:t>
+            </a:r>
+            <a:r>
+              <a:rPr lang="en-US" sz="2000" b="1" dirty="0">
+                <a:solidFill>
+                  <a:schemeClr val="bg1"/>
+                </a:solidFill>
+              </a:rPr>
+              <a:t>task</a:t>
+            </a:r>
+            <a:r>
+              <a:rPr lang="en-US" sz="2000" dirty="0">
+                <a:solidFill>
+                  <a:schemeClr val="bg1"/>
+                </a:solidFill>
+              </a:rPr>
+              <a:t> yang dijadwalkan penjadwal</a:t>
+            </a:r>
+            <a:endParaRPr lang="en-US" sz="2000" dirty="0"/>
+          </a:p>
+        </p:txBody>
+      </p:sp>
+      <p:sp>
+        <p:nvSpPr>
+          <p:cNvPr id="6" name="pad"/>
+          <p:cNvSpPr/>
+          <p:nvPr/>
+        </p:nvSpPr>
+        <p:spPr>
+          <a:xfrm>
+            <a:off x="548640" y="2377440"/>
+            <a:ext cx="457200" cy="457200"/>
+          </a:xfrm>
+          <a:prstGeom prst="ellipse">
+            <a:avLst/>
+          </a:prstGeom>
+          <a:solidFill>
+            <a:schemeClr val="tx2"/>
+          </a:solidFill>
+          <a:ln w="28575">
+            <a:solidFill>
+              <a:schemeClr val="accent2"/>
+            </a:solidFill>
+            <a:prstDash val="solid"/>
+          </a:ln>
+        </p:spPr>
+      </p:sp>
+      <p:pic>
+        <p:nvPicPr>
+          <p:cNvPr id="7" name="ikon-check" descr="preencoded.png">    </p:cNvPr>
+          <p:cNvPicPr>
+            <a:picLocks noChangeAspect="1"/>
+          </p:cNvPicPr>
+          <p:nvPr/>
+        </p:nvPicPr>
+        <p:blipFill>
+          <a:blip r:embed="rId2"/>
+          <a:stretch>
+            <a:fillRect/>
+          </a:stretch>
+        </p:blipFill>
+        <p:spPr>
+          <a:xfrm>
+            <a:off x="667512" y="2496312"/>
+            <a:ext cx="219456" cy="219456"/>
+          </a:xfrm>
+          <a:prstGeom prst="rect">
+            <a:avLst/>
+          </a:prstGeom>
+        </p:spPr>
+      </p:pic>
+      <p:sp>
+        <p:nvSpPr>
+          <p:cNvPr id="8" name="Text 4"/>
+          <p:cNvSpPr txBox="1"/>
+          <p:nvPr/>
+        </p:nvSpPr>
+        <p:spPr>
+          <a:xfrm>
+            <a:off x="1280160" y="2209800"/>
+            <a:ext cx="10362895" cy="792480"/>
+          </a:xfrm>
+          <a:prstGeom prst="rect">
+            <a:avLst/>
+          </a:prstGeom>
+          <a:noFill/>
+          <a:ln/>
+        </p:spPr>
+        <p:txBody>
+          <a:bodyPr wrap="square" lIns="0" tIns="0" rIns="0" bIns="0" rtlCol="0" anchor="ctr"/>
+          <a:lstStyle/>
+          <a:p>
+            <a:pPr indent="0" marL="0">
+              <a:buNone/>
+            </a:pPr>
+            <a:r>
+              <a:rPr lang="en-US" sz="2000" dirty="0">
+                <a:solidFill>
+                  <a:schemeClr val="bg1"/>
+                </a:solidFill>
+              </a:rPr>
+              <a:t>Keadaan task: Running, Ready, </a:t>
+            </a:r>
+            <a:r>
+              <a:rPr lang="en-US" sz="2000" b="1" dirty="0">
+                <a:solidFill>
+                  <a:schemeClr val="bg1"/>
+                </a:solidFill>
+              </a:rPr>
+              <a:t>Blocked</a:t>
+            </a:r>
+            <a:r>
+              <a:rPr lang="en-US" sz="2000" dirty="0">
+                <a:solidFill>
+                  <a:schemeClr val="bg1"/>
+                </a:solidFill>
+              </a:rPr>
+              <a:t>, Suspended</a:t>
+            </a:r>
+            <a:endParaRPr lang="en-US" sz="2000" dirty="0"/>
+          </a:p>
+        </p:txBody>
+      </p:sp>
+      <p:sp>
+        <p:nvSpPr>
+          <p:cNvPr id="9" name="pad"/>
+          <p:cNvSpPr/>
+          <p:nvPr/>
+        </p:nvSpPr>
+        <p:spPr>
+          <a:xfrm>
+            <a:off x="548640" y="3169920"/>
+            <a:ext cx="457200" cy="457200"/>
+          </a:xfrm>
+          <a:prstGeom prst="ellipse">
+            <a:avLst/>
+          </a:prstGeom>
+          <a:solidFill>
+            <a:schemeClr val="tx2"/>
+          </a:solidFill>
+          <a:ln w="28575">
+            <a:solidFill>
+              <a:schemeClr val="accent2"/>
+            </a:solidFill>
+            <a:prstDash val="solid"/>
+          </a:ln>
+        </p:spPr>
+      </p:sp>
+      <p:pic>
+        <p:nvPicPr>
+          <p:cNvPr id="10" name="ikon-check" descr="preencoded.png">    </p:cNvPr>
+          <p:cNvPicPr>
+            <a:picLocks noChangeAspect="1"/>
+          </p:cNvPicPr>
+          <p:nvPr/>
+        </p:nvPicPr>
+        <p:blipFill>
+          <a:blip r:embed="rId3"/>
+          <a:stretch>
+            <a:fillRect/>
+          </a:stretch>
+        </p:blipFill>
+        <p:spPr>
+          <a:xfrm>
+            <a:off x="667512" y="3288792"/>
+            <a:ext cx="219456" cy="219456"/>
+          </a:xfrm>
+          <a:prstGeom prst="rect">
+            <a:avLst/>
+          </a:prstGeom>
+        </p:spPr>
+      </p:pic>
+      <p:sp>
+        <p:nvSpPr>
+          <p:cNvPr id="11" name="Text 6"/>
+          <p:cNvSpPr txBox="1"/>
+          <p:nvPr/>
+        </p:nvSpPr>
+        <p:spPr>
+          <a:xfrm>
+            <a:off x="1280160" y="3002280"/>
+            <a:ext cx="10362895" cy="792480"/>
+          </a:xfrm>
+          <a:prstGeom prst="rect">
+            <a:avLst/>
+          </a:prstGeom>
+          <a:noFill/>
+          <a:ln/>
+        </p:spPr>
+        <p:txBody>
+          <a:bodyPr wrap="square" lIns="0" tIns="0" rIns="0" bIns="0" rtlCol="0" anchor="ctr"/>
+          <a:lstStyle/>
+          <a:p>
+            <a:pPr indent="0" marL="0">
+              <a:buNone/>
+            </a:pPr>
+            <a:r>
+              <a:rPr lang="en-US" sz="2000" dirty="0">
+                <a:solidFill>
+                  <a:schemeClr val="bg1"/>
+                </a:solidFill>
+              </a:rPr>
+              <a:t>Prioritas 0–24, preemption, time slicing, tick 1 ms, dua inti</a:t>
+            </a:r>
+            <a:endParaRPr lang="en-US" sz="2000" dirty="0"/>
+          </a:p>
+        </p:txBody>
+      </p:sp>
+      <p:sp>
+        <p:nvSpPr>
+          <p:cNvPr id="12" name="pad"/>
+          <p:cNvSpPr/>
+          <p:nvPr/>
+        </p:nvSpPr>
+        <p:spPr>
+          <a:xfrm>
+            <a:off x="548640" y="3962400"/>
+            <a:ext cx="457200" cy="457200"/>
+          </a:xfrm>
+          <a:prstGeom prst="ellipse">
+            <a:avLst/>
+          </a:prstGeom>
+          <a:solidFill>
+            <a:schemeClr val="tx2"/>
+          </a:solidFill>
+          <a:ln w="28575">
+            <a:solidFill>
+              <a:schemeClr val="accent2"/>
+            </a:solidFill>
+            <a:prstDash val="solid"/>
+          </a:ln>
+        </p:spPr>
+      </p:sp>
+      <p:pic>
+        <p:nvPicPr>
+          <p:cNvPr id="13" name="ikon-check" descr="preencoded.png">    </p:cNvPr>
+          <p:cNvPicPr>
+            <a:picLocks noChangeAspect="1"/>
+          </p:cNvPicPr>
+          <p:nvPr/>
+        </p:nvPicPr>
+        <p:blipFill>
+          <a:blip r:embed="rId4"/>
+          <a:stretch>
+            <a:fillRect/>
+          </a:stretch>
+        </p:blipFill>
+        <p:spPr>
+          <a:xfrm>
+            <a:off x="667512" y="4081272"/>
+            <a:ext cx="219456" cy="219456"/>
+          </a:xfrm>
+          <a:prstGeom prst="rect">
+            <a:avLst/>
+          </a:prstGeom>
+        </p:spPr>
+      </p:pic>
+      <p:sp>
+        <p:nvSpPr>
+          <p:cNvPr id="14" name="Text 8"/>
+          <p:cNvSpPr txBox="1"/>
+          <p:nvPr/>
+        </p:nvSpPr>
+        <p:spPr>
+          <a:xfrm>
+            <a:off x="1280160" y="3794760"/>
+            <a:ext cx="10362895" cy="792480"/>
+          </a:xfrm>
+          <a:prstGeom prst="rect">
+            <a:avLst/>
+          </a:prstGeom>
+          <a:noFill/>
+          <a:ln/>
+        </p:spPr>
+        <p:txBody>
+          <a:bodyPr wrap="square" lIns="0" tIns="0" rIns="0" bIns="0" rtlCol="0" anchor="ctr"/>
+          <a:lstStyle/>
+          <a:p>
+            <a:pPr indent="0" marL="0">
+              <a:buNone/>
+            </a:pPr>
+            <a:r>
+              <a:rPr lang="en-US" sz="2000" dirty="0">
+                <a:solidFill>
+                  <a:schemeClr val="bg1"/>
+                </a:solidFill>
+              </a:rPr>
+              <a:t>Stack dalam </a:t>
+            </a:r>
+            <a:r>
+              <a:rPr lang="en-US" sz="2000" b="1" dirty="0">
+                <a:solidFill>
+                  <a:schemeClr val="bg1"/>
+                </a:solidFill>
+              </a:rPr>
+              <a:t>byte</a:t>
+            </a:r>
+            <a:r>
+              <a:rPr lang="en-US" sz="2000" dirty="0">
+                <a:solidFill>
+                  <a:schemeClr val="bg1"/>
+                </a:solidFill>
+              </a:rPr>
+              <a:t>; ukur dengan </a:t>
+            </a:r>
+            <a:r>
+              <a:rPr lang="en-US" sz="2000" dirty="0">
+                <a:solidFill>
+                  <a:srgbClr val="F2C98A"/>
+                </a:solidFill>
+                <a:latin typeface="Consolas" pitchFamily="34" charset="0"/>
+                <a:ea typeface="Consolas" pitchFamily="34" charset="-122"/>
+                <a:cs typeface="Consolas" pitchFamily="34" charset="-120"/>
+              </a:rPr>
+              <a:t>uxTaskGetStackHighWaterMark()</a:t>
+            </a:r>
+            <a:endParaRPr lang="en-US" sz="2000" dirty="0"/>
+          </a:p>
+        </p:txBody>
+      </p:sp>
+      <p:sp>
+        <p:nvSpPr>
+          <p:cNvPr id="15" name="pad"/>
+          <p:cNvSpPr/>
+          <p:nvPr/>
+        </p:nvSpPr>
+        <p:spPr>
+          <a:xfrm>
+            <a:off x="548640" y="4754880"/>
+            <a:ext cx="457200" cy="457200"/>
+          </a:xfrm>
+          <a:prstGeom prst="ellipse">
+            <a:avLst/>
+          </a:prstGeom>
+          <a:solidFill>
+            <a:schemeClr val="tx2"/>
+          </a:solidFill>
+          <a:ln w="28575">
+            <a:solidFill>
+              <a:schemeClr val="accent2"/>
+            </a:solidFill>
+            <a:prstDash val="solid"/>
+          </a:ln>
+        </p:spPr>
+      </p:sp>
+      <p:pic>
+        <p:nvPicPr>
+          <p:cNvPr id="16" name="ikon-check" descr="preencoded.png">    </p:cNvPr>
+          <p:cNvPicPr>
+            <a:picLocks noChangeAspect="1"/>
+          </p:cNvPicPr>
+          <p:nvPr/>
+        </p:nvPicPr>
+        <p:blipFill>
+          <a:blip r:embed="rId5"/>
+          <a:stretch>
+            <a:fillRect/>
+          </a:stretch>
+        </p:blipFill>
+        <p:spPr>
+          <a:xfrm>
+            <a:off x="667512" y="4873752"/>
+            <a:ext cx="219456" cy="219456"/>
+          </a:xfrm>
+          <a:prstGeom prst="rect">
+            <a:avLst/>
+          </a:prstGeom>
+        </p:spPr>
+      </p:pic>
+      <p:sp>
+        <p:nvSpPr>
+          <p:cNvPr id="17" name="Text 10"/>
+          <p:cNvSpPr txBox="1"/>
+          <p:nvPr/>
+        </p:nvSpPr>
+        <p:spPr>
+          <a:xfrm>
+            <a:off x="1280160" y="4587240"/>
+            <a:ext cx="10362895" cy="792480"/>
+          </a:xfrm>
+          <a:prstGeom prst="rect">
+            <a:avLst/>
+          </a:prstGeom>
+          <a:noFill/>
+          <a:ln/>
+        </p:spPr>
+        <p:txBody>
+          <a:bodyPr wrap="square" lIns="0" tIns="0" rIns="0" bIns="0" rtlCol="0" anchor="ctr"/>
+          <a:lstStyle/>
+          <a:p>
+            <a:pPr indent="0" marL="0">
+              <a:buNone/>
+            </a:pPr>
+            <a:r>
+              <a:rPr lang="en-US" sz="2000" b="1" dirty="0">
+                <a:solidFill>
+                  <a:schemeClr val="bg1"/>
+                </a:solidFill>
+              </a:rPr>
+              <a:t>Antrean</a:t>
+            </a:r>
+            <a:r>
+              <a:rPr lang="en-US" sz="2000" dirty="0">
+                <a:solidFill>
+                  <a:schemeClr val="bg1"/>
+                </a:solidFill>
+              </a:rPr>
+              <a:t> untuk kirim data, </a:t>
+            </a:r>
+            <a:r>
+              <a:rPr lang="en-US" sz="2000" b="1" dirty="0">
+                <a:solidFill>
+                  <a:schemeClr val="bg1"/>
+                </a:solidFill>
+              </a:rPr>
+              <a:t>mutex</a:t>
+            </a:r>
+            <a:r>
+              <a:rPr lang="en-US" sz="2000" dirty="0">
+                <a:solidFill>
+                  <a:schemeClr val="bg1"/>
+                </a:solidFill>
+              </a:rPr>
+              <a:t> untuk sumber daya bersama</a:t>
+            </a:r>
+            <a:endParaRPr lang="en-US" sz="2000" dirty="0"/>
+          </a:p>
+        </p:txBody>
+      </p:sp>
+      <p:sp>
+        <p:nvSpPr>
+          <p:cNvPr id="18" name="pad"/>
+          <p:cNvSpPr/>
+          <p:nvPr/>
+        </p:nvSpPr>
+        <p:spPr>
+          <a:xfrm>
+            <a:off x="548640" y="5547360"/>
+            <a:ext cx="457200" cy="457200"/>
+          </a:xfrm>
+          <a:prstGeom prst="ellipse">
+            <a:avLst/>
+          </a:prstGeom>
+          <a:solidFill>
+            <a:schemeClr val="tx2"/>
+          </a:solidFill>
+          <a:ln w="28575">
+            <a:solidFill>
+              <a:schemeClr val="accent2"/>
+            </a:solidFill>
+            <a:prstDash val="solid"/>
+          </a:ln>
+        </p:spPr>
+      </p:sp>
+      <p:pic>
+        <p:nvPicPr>
+          <p:cNvPr id="19" name="ikon-check" descr="preencoded.png">    </p:cNvPr>
+          <p:cNvPicPr>
+            <a:picLocks noChangeAspect="1"/>
+          </p:cNvPicPr>
+          <p:nvPr/>
+        </p:nvPicPr>
+        <p:blipFill>
+          <a:blip r:embed="rId6"/>
+          <a:stretch>
+            <a:fillRect/>
+          </a:stretch>
+        </p:blipFill>
+        <p:spPr>
+          <a:xfrm>
+            <a:off x="667512" y="5666232"/>
+            <a:ext cx="219456" cy="219456"/>
+          </a:xfrm>
+          <a:prstGeom prst="rect">
+            <a:avLst/>
+          </a:prstGeom>
+        </p:spPr>
+      </p:pic>
+      <p:sp>
+        <p:nvSpPr>
+          <p:cNvPr id="20" name="Text 12"/>
+          <p:cNvSpPr txBox="1"/>
+          <p:nvPr/>
+        </p:nvSpPr>
+        <p:spPr>
+          <a:xfrm>
+            <a:off x="1280160" y="5379720"/>
+            <a:ext cx="10362895" cy="792480"/>
+          </a:xfrm>
+          <a:prstGeom prst="rect">
+            <a:avLst/>
+          </a:prstGeom>
+          <a:noFill/>
+          <a:ln/>
+        </p:spPr>
+        <p:txBody>
+          <a:bodyPr wrap="square" lIns="0" tIns="0" rIns="0" bIns="0" rtlCol="0" anchor="ctr"/>
+          <a:lstStyle/>
+          <a:p>
+            <a:pPr indent="0" marL="0">
+              <a:buNone/>
+            </a:pPr>
+            <a:r>
+              <a:rPr lang="en-US" sz="2000" dirty="0">
+                <a:solidFill>
+                  <a:schemeClr val="bg1"/>
+                </a:solidFill>
+              </a:rPr>
+              <a:t>Di ISR pakai fungsi </a:t>
+            </a:r>
+            <a:r>
+              <a:rPr lang="en-US" sz="2000" dirty="0">
+                <a:solidFill>
+                  <a:srgbClr val="F2C98A"/>
+                </a:solidFill>
+                <a:latin typeface="Consolas" pitchFamily="34" charset="0"/>
+                <a:ea typeface="Consolas" pitchFamily="34" charset="-122"/>
+                <a:cs typeface="Consolas" pitchFamily="34" charset="-120"/>
+              </a:rPr>
+              <a:t>...FromISR</a:t>
+            </a:r>
+            <a:endParaRPr lang="en-US" sz="2000" dirty="0"/>
+          </a:p>
+        </p:txBody>
+      </p:sp>
+      <p:sp>
+        <p:nvSpPr>
+          <p:cNvPr id="25" name="Slide Number Placeholder 0"/>
+          <p:cNvSpPr>
+            <a:spLocks noGrp="1"/>
+          </p:cNvSpPr>
+          <p:nvPr>
+            <p:ph type="sldNum" sz="quarter" idx="4294967295"/>
+          </p:nvPr>
+        </p:nvSpPr>
+        <p:spPr>
+          <a:xfrm>
+            <a:off x="11094415" y="6400800"/>
+            <a:ext cx="548640" cy="274320"/>
+          </a:xfrm>
+          <a:prstGeom prst="rect">
+            <a:avLst/>
+          </a:prstGeom>
+          <a:extLst>
+            <a:ext uri="{C572A759-6A51-4108-AA02-DFA0A04FC94B}">
+              <ma14:wrappingTextBoxFlag xmlns:ma14="http://schemas.microsoft.com/office/mac/drawingml/2011/main" val="0"/>
+            </a:ext>
+          </a:extLst>
+        </p:spPr>
+        <p:txBody>
+          <a:bodyPr/>
+          <a:lstStyle>
+            <a:lvl1pPr>
+              <a:defRPr sz="1000">
+                <a:solidFill>
+                  <a:srgbClr val="9FBFAF"/>
+                </a:solidFill>
+              </a:defRPr>
+            </a:lvl1pPr>
+          </a:lstStyle>
+          <a:p>
+            <a:pPr algn="r"/>
+            <a:fld id="{F7021451-1387-4CA6-816F-3879F97B5CBC}" type="slidenum">
+              <a:rPr b="0" lang="en-US"/>
+              <a:t>25</a:t>
+            </a:fld>
+            <a:endParaRPr lang="en-US"/>
+          </a:p>
+        </p:txBody>
+      </p:sp>
+    </p:spTree>
+  </p:cSld>
+  <p:clrMapOvr>
+    <a:masterClrMapping/>
+  </p:clrMapOvr>
+</p:sld>
+</file>
+
+<file path=ppt/slides/slide26.xml><?xml version="1.0" encoding="utf-8"?>
+<p:sld xmlns:a="http://schemas.openxmlformats.org/drawingml/2006/main" xmlns:r="http://schemas.openxmlformats.org/officeDocument/2006/relationships" xmlns:p="http://schemas.openxmlformats.org/presentationml/2006/main">
+  <p:cSld name="Slide 26">
+    <p:spTree>
+      <p:nvGrpSpPr>
+        <p:cNvPr id="1" name=""/>
+        <p:cNvGrpSpPr/>
+        <p:nvPr/>
+      </p:nvGrpSpPr>
+      <p:grpSpPr>
+        <a:xfrm>
+          <a:off x="0" y="0"/>
+          <a:ext cx="0" cy="0"/>
+          <a:chOff x="0" y="0"/>
+          <a:chExt cx="0" cy="0"/>
+        </a:xfrm>
+      </p:grpSpPr>
+      <p:sp>
+        <p:nvSpPr>
+          <p:cNvPr id="2" name="Text 0"/>
+          <p:cNvSpPr/>
+          <p:nvPr>
+            <p:ph idx="100" type="title" hasCustomPrompt="1"/>
+          </p:nvPr>
+        </p:nvSpPr>
+        <p:spPr>
+          <a:xfrm>
+            <a:off x="548640" y="411480"/>
+            <a:ext cx="11094415" cy="777240"/>
+          </a:xfrm>
+          <a:prstGeom prst="rect">
+            <a:avLst/>
+          </a:prstGeom>
+          <a:noFill/>
+          <a:ln/>
+        </p:spPr>
+        <p:txBody>
+          <a:bodyPr wrap="square" lIns="0" tIns="0" rIns="0" bIns="0" rtlCol="0" anchor="ctr"/>
+          <a:lstStyle/>
+          <a:p>
+            <a:pPr algn="l" indent="0" marL="0">
+              <a:buNone/>
+            </a:pPr>
+            <a:r>
+              <a:rPr lang="en-US" sz="3200" b="1" dirty="0">
+                <a:solidFill>
+                  <a:schemeClr val="bg1"/>
+                </a:solidFill>
+              </a:rPr>
               <a:t>Sebelum Pertemuan 13</a:t>
             </a:r>
             <a:endParaRPr lang="en-US" sz="3200" dirty="0"/>
@@ -12439,7 +12669,7 @@
             <a:pPr algn="r"/>
             <a:fld id="{F7021451-1387-4CA6-816F-3879F97B5CBC}" type="slidenum">
               <a:rPr b="0" lang="en-US"/>
-              <a:t>25</a:t>
+              <a:t>26</a:t>
             </a:fld>
             <a:endParaRPr lang="en-US"/>
           </a:p>
@@ -14469,7 +14699,7 @@
                   <a:schemeClr val="tx1"/>
                 </a:solidFill>
               </a:rPr>
-              <a:t>/</a:t>
+              <a:t> dan </a:t>
             </a:r>
             <a:r>
               <a:rPr lang="en-US" sz="1700" dirty="0">
@@ -14488,7 +14718,7 @@
                   <a:schemeClr val="tx1"/>
                 </a:solidFill>
               </a:rPr>
-              <a:t> pun berjalan di task </a:t>
+              <a:t> pun dijalankan oleh sebuah task bernama </a:t>
             </a:r>
             <a:r>
               <a:rPr lang="en-US" sz="1700" dirty="0">
@@ -14507,7 +14737,7 @@
                   <a:schemeClr val="tx1"/>
                 </a:solidFill>
               </a:rPr>
-              <a:t> (8.192 B, prioritas 1, inti 1)</a:t>
+              <a:t> (slide berikut)</a:t>
             </a:r>
             <a:endParaRPr lang="en-US" sz="1700" dirty="0"/>
           </a:p>
@@ -14615,15 +14845,67 @@
                   <a:schemeClr val="tx2"/>
                 </a:solidFill>
               </a:rPr>
-              <a:t>Siklus Hidup Task: Empat Keadaan</a:t>
+              <a:t>Program Arduino-mu Juga Sebuah Task</a:t>
             </a:r>
             <a:endParaRPr lang="en-US" sz="3000" dirty="0"/>
           </a:p>
         </p:txBody>
+      </p:sp>
+      <p:sp>
+        <p:nvSpPr>
+          <p:cNvPr id="3" name="kartu"/>
+          <p:cNvSpPr/>
+          <p:nvPr/>
+        </p:nvSpPr>
+        <p:spPr>
+          <a:xfrm>
+            <a:off x="548640" y="1512189"/>
+            <a:ext cx="3484778" cy="4199382"/>
+          </a:xfrm>
+          <a:prstGeom prst="roundRect">
+            <a:avLst>
+              <a:gd name="adj" fmla="val 3149"/>
+            </a:avLst>
+          </a:prstGeom>
+          <a:solidFill>
+            <a:schemeClr val="bg2"/>
+          </a:solidFill>
+          <a:ln w="9525">
+            <a:solidFill>
+              <a:schemeClr val="bg2"/>
+            </a:solidFill>
+            <a:prstDash val="solid"/>
+          </a:ln>
+        </p:spPr>
+      </p:sp>
+      <p:sp>
+        <p:nvSpPr>
+          <p:cNvPr id="4" name="pad"/>
+          <p:cNvSpPr/>
+          <p:nvPr/>
+        </p:nvSpPr>
+        <p:spPr>
+          <a:xfrm>
+            <a:off x="822960" y="1786509"/>
+            <a:ext cx="685800" cy="685800"/>
+          </a:xfrm>
+          <a:prstGeom prst="ellipse">
+            <a:avLst/>
+          </a:prstGeom>
+          <a:solidFill>
+            <a:schemeClr val="bg1"/>
+          </a:solidFill>
+          <a:ln w="28575">
+            <a:solidFill>
+              <a:schemeClr val="accent2"/>
+            </a:solidFill>
+            <a:prstDash val="solid"/>
+          </a:ln>
+        </p:spPr>
       </p:sp>
       <p:pic>
         <p:nvPicPr>
-          <p:cNvPr id="3" name="gambar" descr="/home/claude/work/slides/img/p12/p12-siklus-hidup-task.png">    </p:cNvPr>
+          <p:cNvPr id="5" name="ikon-memory" descr="preencoded.png">    </p:cNvPr>
           <p:cNvPicPr>
             <a:picLocks noChangeAspect="1"/>
           </p:cNvPicPr>
@@ -14637,14 +14919,611 @@
         </p:blipFill>
         <p:spPr>
           <a:xfrm>
-            <a:off x="1679423" y="1280160"/>
-            <a:ext cx="8832850" cy="4892040"/>
+            <a:off x="994410" y="1957959"/>
+            <a:ext cx="342900" cy="342900"/>
           </a:xfrm>
           <a:prstGeom prst="rect">
             <a:avLst/>
           </a:prstGeom>
         </p:spPr>
       </p:pic>
+      <p:sp>
+        <p:nvSpPr>
+          <p:cNvPr id="6" name="Text 3"/>
+          <p:cNvSpPr txBox="1"/>
+          <p:nvPr/>
+        </p:nvSpPr>
+        <p:spPr>
+          <a:xfrm>
+            <a:off x="822960" y="2609469"/>
+            <a:ext cx="2936138" cy="411480"/>
+          </a:xfrm>
+          <a:prstGeom prst="rect">
+            <a:avLst/>
+          </a:prstGeom>
+          <a:noFill/>
+          <a:ln/>
+        </p:spPr>
+        <p:txBody>
+          <a:bodyPr wrap="square" lIns="0" tIns="0" rIns="0" bIns="0" rtlCol="0" anchor="t"/>
+          <a:lstStyle/>
+          <a:p>
+            <a:pPr indent="0" marL="0">
+              <a:buNone/>
+            </a:pPr>
+            <a:r>
+              <a:rPr lang="en-US" sz="2100" b="1" dirty="0">
+                <a:solidFill>
+                  <a:schemeClr val="tx2"/>
+                </a:solidFill>
+              </a:rPr>
+              <a:t>Stack 8 KB</a:t>
+            </a:r>
+            <a:endParaRPr lang="en-US" sz="2100" dirty="0"/>
+          </a:p>
+        </p:txBody>
+      </p:sp>
+      <p:sp>
+        <p:nvSpPr>
+          <p:cNvPr id="7" name="Text 4"/>
+          <p:cNvSpPr txBox="1"/>
+          <p:nvPr/>
+        </p:nvSpPr>
+        <p:spPr>
+          <a:xfrm>
+            <a:off x="822960" y="3066669"/>
+            <a:ext cx="2936138" cy="2462022"/>
+          </a:xfrm>
+          <a:prstGeom prst="rect">
+            <a:avLst/>
+          </a:prstGeom>
+          <a:noFill/>
+          <a:ln/>
+        </p:spPr>
+        <p:txBody>
+          <a:bodyPr wrap="square" lIns="0" tIns="0" rIns="0" bIns="0" rtlCol="0" anchor="t"/>
+          <a:lstStyle/>
+          <a:p>
+            <a:pPr indent="0" marL="0">
+              <a:buNone/>
+            </a:pPr>
+            <a:r>
+              <a:rPr lang="en-US" sz="1700" dirty="0">
+                <a:solidFill>
+                  <a:schemeClr val="tx1"/>
+                </a:solidFill>
+              </a:rPr>
+              <a:t>Saat menyala, ESP32 membuat task </a:t>
+            </a:r>
+            <a:r>
+              <a:rPr lang="en-US" sz="1700" dirty="0">
+                <a:solidFill>
+                  <a:srgbClr val="A35F14"/>
+                </a:solidFill>
+                <a:latin typeface="Consolas" pitchFamily="34" charset="0"/>
+                <a:ea typeface="Consolas" pitchFamily="34" charset="-122"/>
+                <a:cs typeface="Consolas" pitchFamily="34" charset="-120"/>
+              </a:rPr>
+              <a:t>loopTask</a:t>
+            </a:r>
+            <a:r>
+              <a:rPr lang="en-US" sz="1700" dirty="0">
+                <a:solidFill>
+                  <a:schemeClr val="tx1"/>
+                </a:solidFill>
+              </a:rPr>
+              <a:t> yang memanggil </a:t>
+            </a:r>
+            <a:r>
+              <a:rPr lang="en-US" sz="1700" dirty="0">
+                <a:solidFill>
+                  <a:srgbClr val="A35F14"/>
+                </a:solidFill>
+                <a:latin typeface="Consolas" pitchFamily="34" charset="0"/>
+                <a:ea typeface="Consolas" pitchFamily="34" charset="-122"/>
+                <a:cs typeface="Consolas" pitchFamily="34" charset="-120"/>
+              </a:rPr>
+              <a:t>setup()</a:t>
+            </a:r>
+            <a:r>
+              <a:rPr lang="en-US" sz="1700" dirty="0">
+                <a:solidFill>
+                  <a:schemeClr val="tx1"/>
+                </a:solidFill>
+              </a:rPr>
+              <a:t> sekali, lalu </a:t>
+            </a:r>
+            <a:r>
+              <a:rPr lang="en-US" sz="1700" dirty="0">
+                <a:solidFill>
+                  <a:srgbClr val="A35F14"/>
+                </a:solidFill>
+                <a:latin typeface="Consolas" pitchFamily="34" charset="0"/>
+                <a:ea typeface="Consolas" pitchFamily="34" charset="-122"/>
+                <a:cs typeface="Consolas" pitchFamily="34" charset="-120"/>
+              </a:rPr>
+              <a:t>loop()</a:t>
+            </a:r>
+            <a:r>
+              <a:rPr lang="en-US" sz="1700" dirty="0">
+                <a:solidFill>
+                  <a:schemeClr val="tx1"/>
+                </a:solidFill>
+              </a:rPr>
+              <a:t> terus-menerus. Variabel lokalnya disimpan di </a:t>
+            </a:r>
+            <a:r>
+              <a:rPr lang="en-US" sz="1700" i="1" dirty="0">
+                <a:solidFill>
+                  <a:schemeClr val="tx1"/>
+                </a:solidFill>
+              </a:rPr>
+              <a:t>stack</a:t>
+            </a:r>
+            <a:r>
+              <a:rPr lang="en-US" sz="1700" dirty="0">
+                <a:solidFill>
+                  <a:schemeClr val="tx1"/>
+                </a:solidFill>
+              </a:rPr>
+              <a:t> </a:t>
+            </a:r>
+            <a:r>
+              <a:rPr lang="en-US" sz="1700" b="1" dirty="0">
+                <a:solidFill>
+                  <a:schemeClr val="tx1"/>
+                </a:solidFill>
+              </a:rPr>
+              <a:t>8.192 byte</a:t>
+            </a:r>
+            <a:r>
+              <a:rPr lang="en-US" sz="1700" dirty="0">
+                <a:solidFill>
+                  <a:schemeClr val="tx1"/>
+                </a:solidFill>
+              </a:rPr>
+              <a:t>. Larik lokal yang besar bisa membuatnya penuh (</a:t>
+            </a:r>
+            <a:r>
+              <a:rPr lang="en-US" sz="1700" i="1" dirty="0">
+                <a:solidFill>
+                  <a:schemeClr val="tx1"/>
+                </a:solidFill>
+              </a:rPr>
+              <a:t>stack overflow</a:t>
+            </a:r>
+            <a:r>
+              <a:rPr lang="en-US" sz="1700" dirty="0">
+                <a:solidFill>
+                  <a:schemeClr val="tx1"/>
+                </a:solidFill>
+              </a:rPr>
+              <a:t>).</a:t>
+            </a:r>
+            <a:endParaRPr lang="en-US" sz="1700" dirty="0"/>
+          </a:p>
+        </p:txBody>
+      </p:sp>
+      <p:sp>
+        <p:nvSpPr>
+          <p:cNvPr id="8" name="kartu"/>
+          <p:cNvSpPr/>
+          <p:nvPr/>
+        </p:nvSpPr>
+        <p:spPr>
+          <a:xfrm>
+            <a:off x="4353458" y="1512189"/>
+            <a:ext cx="3484778" cy="4199382"/>
+          </a:xfrm>
+          <a:prstGeom prst="roundRect">
+            <a:avLst>
+              <a:gd name="adj" fmla="val 3149"/>
+            </a:avLst>
+          </a:prstGeom>
+          <a:solidFill>
+            <a:schemeClr val="bg2"/>
+          </a:solidFill>
+          <a:ln w="9525">
+            <a:solidFill>
+              <a:schemeClr val="bg2"/>
+            </a:solidFill>
+            <a:prstDash val="solid"/>
+          </a:ln>
+        </p:spPr>
+      </p:sp>
+      <p:sp>
+        <p:nvSpPr>
+          <p:cNvPr id="9" name="pad"/>
+          <p:cNvSpPr/>
+          <p:nvPr/>
+        </p:nvSpPr>
+        <p:spPr>
+          <a:xfrm>
+            <a:off x="4627778" y="1786509"/>
+            <a:ext cx="685800" cy="685800"/>
+          </a:xfrm>
+          <a:prstGeom prst="ellipse">
+            <a:avLst/>
+          </a:prstGeom>
+          <a:solidFill>
+            <a:schemeClr val="bg1"/>
+          </a:solidFill>
+          <a:ln w="28575">
+            <a:solidFill>
+              <a:schemeClr val="accent2"/>
+            </a:solidFill>
+            <a:prstDash val="solid"/>
+          </a:ln>
+        </p:spPr>
+      </p:sp>
+      <p:pic>
+        <p:nvPicPr>
+          <p:cNvPr id="10" name="ikon-sliders" descr="preencoded.png">    </p:cNvPr>
+          <p:cNvPicPr>
+            <a:picLocks noChangeAspect="1"/>
+          </p:cNvPicPr>
+          <p:nvPr/>
+        </p:nvPicPr>
+        <p:blipFill>
+          <a:blip r:embed="rId2"/>
+          <a:stretch>
+            <a:fillRect/>
+          </a:stretch>
+        </p:blipFill>
+        <p:spPr>
+          <a:xfrm>
+            <a:off x="4799228" y="1957959"/>
+            <a:ext cx="342900" cy="342900"/>
+          </a:xfrm>
+          <a:prstGeom prst="rect">
+            <a:avLst/>
+          </a:prstGeom>
+        </p:spPr>
+      </p:pic>
+      <p:sp>
+        <p:nvSpPr>
+          <p:cNvPr id="11" name="Text 7"/>
+          <p:cNvSpPr txBox="1"/>
+          <p:nvPr/>
+        </p:nvSpPr>
+        <p:spPr>
+          <a:xfrm>
+            <a:off x="4627778" y="2609469"/>
+            <a:ext cx="2936138" cy="411480"/>
+          </a:xfrm>
+          <a:prstGeom prst="rect">
+            <a:avLst/>
+          </a:prstGeom>
+          <a:noFill/>
+          <a:ln/>
+        </p:spPr>
+        <p:txBody>
+          <a:bodyPr wrap="square" lIns="0" tIns="0" rIns="0" bIns="0" rtlCol="0" anchor="t"/>
+          <a:lstStyle/>
+          <a:p>
+            <a:pPr indent="0" marL="0">
+              <a:buNone/>
+            </a:pPr>
+            <a:r>
+              <a:rPr lang="en-US" sz="2100" b="1" dirty="0">
+                <a:solidFill>
+                  <a:schemeClr val="tx2"/>
+                </a:solidFill>
+              </a:rPr>
+              <a:t>Prioritas 1</a:t>
+            </a:r>
+            <a:endParaRPr lang="en-US" sz="2100" dirty="0"/>
+          </a:p>
+        </p:txBody>
+      </p:sp>
+      <p:sp>
+        <p:nvSpPr>
+          <p:cNvPr id="12" name="Text 8"/>
+          <p:cNvSpPr txBox="1"/>
+          <p:nvPr/>
+        </p:nvSpPr>
+        <p:spPr>
+          <a:xfrm>
+            <a:off x="4627778" y="3066669"/>
+            <a:ext cx="2936138" cy="2462022"/>
+          </a:xfrm>
+          <a:prstGeom prst="rect">
+            <a:avLst/>
+          </a:prstGeom>
+          <a:noFill/>
+          <a:ln/>
+        </p:spPr>
+        <p:txBody>
+          <a:bodyPr wrap="square" lIns="0" tIns="0" rIns="0" bIns="0" rtlCol="0" anchor="t"/>
+          <a:lstStyle/>
+          <a:p>
+            <a:pPr indent="0" marL="0">
+              <a:buNone/>
+            </a:pPr>
+            <a:r>
+              <a:rPr lang="en-US" sz="1700" dirty="0">
+                <a:solidFill>
+                  <a:schemeClr val="tx1"/>
+                </a:solidFill>
+              </a:rPr>
+              <a:t>Prioritasnya rendah, hanya satu tingkat di atas task IDLE (0). Task buatanmu yang prioritasnya </a:t>
+            </a:r>
+            <a:r>
+              <a:rPr lang="en-US" sz="1700" b="1" dirty="0">
+                <a:solidFill>
+                  <a:schemeClr val="tx1"/>
+                </a:solidFill>
+              </a:rPr>
+              <a:t>lebih tinggi</a:t>
+            </a:r>
+            <a:r>
+              <a:rPr lang="en-US" sz="1700" dirty="0">
+                <a:solidFill>
+                  <a:schemeClr val="tx1"/>
+                </a:solidFill>
+              </a:rPr>
+              <a:t> di inti yang sama akan didahulukan.</a:t>
+            </a:r>
+            <a:endParaRPr lang="en-US" sz="1700" dirty="0"/>
+          </a:p>
+        </p:txBody>
+      </p:sp>
+      <p:sp>
+        <p:nvSpPr>
+          <p:cNvPr id="13" name="kartu"/>
+          <p:cNvSpPr/>
+          <p:nvPr/>
+        </p:nvSpPr>
+        <p:spPr>
+          <a:xfrm>
+            <a:off x="8158277" y="1512189"/>
+            <a:ext cx="3484778" cy="4199382"/>
+          </a:xfrm>
+          <a:prstGeom prst="roundRect">
+            <a:avLst>
+              <a:gd name="adj" fmla="val 3149"/>
+            </a:avLst>
+          </a:prstGeom>
+          <a:solidFill>
+            <a:schemeClr val="bg2"/>
+          </a:solidFill>
+          <a:ln w="9525">
+            <a:solidFill>
+              <a:schemeClr val="bg2"/>
+            </a:solidFill>
+            <a:prstDash val="solid"/>
+          </a:ln>
+        </p:spPr>
+      </p:sp>
+      <p:sp>
+        <p:nvSpPr>
+          <p:cNvPr id="14" name="pad"/>
+          <p:cNvSpPr/>
+          <p:nvPr/>
+        </p:nvSpPr>
+        <p:spPr>
+          <a:xfrm>
+            <a:off x="8432597" y="1786509"/>
+            <a:ext cx="685800" cy="685800"/>
+          </a:xfrm>
+          <a:prstGeom prst="ellipse">
+            <a:avLst/>
+          </a:prstGeom>
+          <a:solidFill>
+            <a:schemeClr val="bg1"/>
+          </a:solidFill>
+          <a:ln w="28575">
+            <a:solidFill>
+              <a:schemeClr val="accent2"/>
+            </a:solidFill>
+            <a:prstDash val="solid"/>
+          </a:ln>
+        </p:spPr>
+      </p:sp>
+      <p:pic>
+        <p:nvPicPr>
+          <p:cNvPr id="15" name="ikon-chip" descr="preencoded.png">    </p:cNvPr>
+          <p:cNvPicPr>
+            <a:picLocks noChangeAspect="1"/>
+          </p:cNvPicPr>
+          <p:nvPr/>
+        </p:nvPicPr>
+        <p:blipFill>
+          <a:blip r:embed="rId3"/>
+          <a:stretch>
+            <a:fillRect/>
+          </a:stretch>
+        </p:blipFill>
+        <p:spPr>
+          <a:xfrm>
+            <a:off x="8604047" y="1957959"/>
+            <a:ext cx="342900" cy="342900"/>
+          </a:xfrm>
+          <a:prstGeom prst="rect">
+            <a:avLst/>
+          </a:prstGeom>
+        </p:spPr>
+      </p:pic>
+      <p:sp>
+        <p:nvSpPr>
+          <p:cNvPr id="16" name="Text 11"/>
+          <p:cNvSpPr txBox="1"/>
+          <p:nvPr/>
+        </p:nvSpPr>
+        <p:spPr>
+          <a:xfrm>
+            <a:off x="8432597" y="2609469"/>
+            <a:ext cx="2936138" cy="411480"/>
+          </a:xfrm>
+          <a:prstGeom prst="rect">
+            <a:avLst/>
+          </a:prstGeom>
+          <a:noFill/>
+          <a:ln/>
+        </p:spPr>
+        <p:txBody>
+          <a:bodyPr wrap="square" lIns="0" tIns="0" rIns="0" bIns="0" rtlCol="0" anchor="t"/>
+          <a:lstStyle/>
+          <a:p>
+            <a:pPr indent="0" marL="0">
+              <a:buNone/>
+            </a:pPr>
+            <a:r>
+              <a:rPr lang="en-US" sz="2100" b="1" dirty="0">
+                <a:solidFill>
+                  <a:schemeClr val="tx2"/>
+                </a:solidFill>
+              </a:rPr>
+              <a:t>Inti 1</a:t>
+            </a:r>
+            <a:endParaRPr lang="en-US" sz="2100" dirty="0"/>
+          </a:p>
+        </p:txBody>
+      </p:sp>
+      <p:sp>
+        <p:nvSpPr>
+          <p:cNvPr id="17" name="Text 12"/>
+          <p:cNvSpPr txBox="1"/>
+          <p:nvPr/>
+        </p:nvSpPr>
+        <p:spPr>
+          <a:xfrm>
+            <a:off x="8432597" y="3066669"/>
+            <a:ext cx="2936138" cy="2462022"/>
+          </a:xfrm>
+          <a:prstGeom prst="rect">
+            <a:avLst/>
+          </a:prstGeom>
+          <a:noFill/>
+          <a:ln/>
+        </p:spPr>
+        <p:txBody>
+          <a:bodyPr wrap="square" lIns="0" tIns="0" rIns="0" bIns="0" rtlCol="0" anchor="t"/>
+          <a:lstStyle/>
+          <a:p>
+            <a:pPr indent="0" marL="0">
+              <a:buNone/>
+            </a:pPr>
+            <a:r>
+              <a:rPr lang="en-US" sz="1700" dirty="0">
+                <a:solidFill>
+                  <a:schemeClr val="tx1"/>
+                </a:solidFill>
+              </a:rPr>
+              <a:t>ESP32 punya dua inti. </a:t>
+            </a:r>
+            <a:r>
+              <a:rPr lang="en-US" sz="1700" b="1" dirty="0">
+                <a:solidFill>
+                  <a:schemeClr val="tx1"/>
+                </a:solidFill>
+              </a:rPr>
+              <a:t>Inti 0</a:t>
+            </a:r>
+            <a:r>
+              <a:rPr lang="en-US" sz="1700" dirty="0">
+                <a:solidFill>
+                  <a:schemeClr val="tx1"/>
+                </a:solidFill>
+              </a:rPr>
+              <a:t> umumnya mengurus Wi-Fi, sedangkan </a:t>
+            </a:r>
+            <a:r>
+              <a:rPr lang="en-US" sz="1700" dirty="0">
+                <a:solidFill>
+                  <a:srgbClr val="A35F14"/>
+                </a:solidFill>
+                <a:latin typeface="Consolas" pitchFamily="34" charset="0"/>
+                <a:ea typeface="Consolas" pitchFamily="34" charset="-122"/>
+                <a:cs typeface="Consolas" pitchFamily="34" charset="-120"/>
+              </a:rPr>
+              <a:t>loopTask</a:t>
+            </a:r>
+            <a:r>
+              <a:rPr lang="en-US" sz="1700" dirty="0">
+                <a:solidFill>
+                  <a:schemeClr val="tx1"/>
+                </a:solidFill>
+              </a:rPr>
+              <a:t> berjalan di </a:t>
+            </a:r>
+            <a:r>
+              <a:rPr lang="en-US" sz="1700" b="1" dirty="0">
+                <a:solidFill>
+                  <a:schemeClr val="tx1"/>
+                </a:solidFill>
+              </a:rPr>
+              <a:t>inti 1</a:t>
+            </a:r>
+            <a:r>
+              <a:rPr lang="en-US" sz="1700" dirty="0">
+                <a:solidFill>
+                  <a:schemeClr val="tx1"/>
+                </a:solidFill>
+              </a:rPr>
+              <a:t>. </a:t>
+            </a:r>
+            <a:r>
+              <a:rPr lang="en-US" sz="1700" dirty="0">
+                <a:solidFill>
+                  <a:srgbClr val="A35F14"/>
+                </a:solidFill>
+                <a:latin typeface="Consolas" pitchFamily="34" charset="0"/>
+                <a:ea typeface="Consolas" pitchFamily="34" charset="-122"/>
+                <a:cs typeface="Consolas" pitchFamily="34" charset="-120"/>
+              </a:rPr>
+              <a:t>delay()</a:t>
+            </a:r>
+            <a:r>
+              <a:rPr lang="en-US" sz="1700" dirty="0">
+                <a:solidFill>
+                  <a:schemeClr val="tx1"/>
+                </a:solidFill>
+              </a:rPr>
+              <a:t> di </a:t>
+            </a:r>
+            <a:r>
+              <a:rPr lang="en-US" sz="1700" dirty="0">
+                <a:solidFill>
+                  <a:srgbClr val="A35F14"/>
+                </a:solidFill>
+                <a:latin typeface="Consolas" pitchFamily="34" charset="0"/>
+                <a:ea typeface="Consolas" pitchFamily="34" charset="-122"/>
+                <a:cs typeface="Consolas" pitchFamily="34" charset="-120"/>
+              </a:rPr>
+              <a:t>loop()</a:t>
+            </a:r>
+            <a:r>
+              <a:rPr lang="en-US" sz="1700" dirty="0">
+                <a:solidFill>
+                  <a:schemeClr val="tx1"/>
+                </a:solidFill>
+              </a:rPr>
+              <a:t> sama dengan </a:t>
+            </a:r>
+            <a:r>
+              <a:rPr lang="en-US" sz="1700" dirty="0">
+                <a:solidFill>
+                  <a:srgbClr val="A35F14"/>
+                </a:solidFill>
+                <a:latin typeface="Consolas" pitchFamily="34" charset="0"/>
+                <a:ea typeface="Consolas" pitchFamily="34" charset="-122"/>
+                <a:cs typeface="Consolas" pitchFamily="34" charset="-120"/>
+              </a:rPr>
+              <a:t>vTaskDelay()</a:t>
+            </a:r>
+            <a:r>
+              <a:rPr lang="en-US" sz="1700" dirty="0">
+                <a:solidFill>
+                  <a:schemeClr val="tx1"/>
+                </a:solidFill>
+              </a:rPr>
+              <a:t>, jadi selama menunggu, CPU bisa dipakai task lain.</a:t>
+            </a:r>
+            <a:endParaRPr lang="en-US" sz="1700" dirty="0"/>
+          </a:p>
+        </p:txBody>
+      </p:sp>
       <p:sp>
         <p:nvSpPr>
           <p:cNvPr id="25" name="Slide Number Placeholder 0"/>
@@ -14747,7 +15626,7 @@
                   <a:schemeClr val="tx2"/>
                 </a:solidFill>
               </a:rPr>
-              <a:t>Prioritas, Preemption, dan Time Slicing</a:t>
+              <a:t>Siklus Hidup Task: Empat Keadaan</a:t>
             </a:r>
             <a:endParaRPr lang="en-US" sz="3000" dirty="0"/>
           </a:p>
@@ -14755,7 +15634,7 @@
       </p:sp>
       <p:pic>
         <p:nvPicPr>
-          <p:cNvPr id="3" name="gambar" descr="/home/claude/work/slides/img/p12/p12-penjadwal-prioritas.png">    </p:cNvPr>
+          <p:cNvPr id="3" name="gambar" descr="/home/claude/work/slides/img/p12/p12-siklus-hidup-task.png">    </p:cNvPr>
           <p:cNvPicPr>
             <a:picLocks noChangeAspect="1"/>
           </p:cNvPicPr>
@@ -14769,8 +15648,8 @@
         </p:blipFill>
         <p:spPr>
           <a:xfrm>
-            <a:off x="1849002" y="1280160"/>
-            <a:ext cx="8493692" cy="4892040"/>
+            <a:off x="1679423" y="1280160"/>
+            <a:ext cx="8832850" cy="4892040"/>
           </a:xfrm>
           <a:prstGeom prst="rect">
             <a:avLst/>
